--- a/deck/Training-Failure-Triage.pptx
+++ b/deck/Training-Failure-Triage.pptx
@@ -5,7 +5,7 @@
     <p:sldMasterId id="2147483648" r:id="rId0"/>
   </p:sldMasterIdLst>
   <p:notesMasterIdLst>
-    <p:notesMasterId r:id="rId15"/>
+    <p:notesMasterId r:id="rId16"/>
   </p:notesMasterIdLst>
   <p:sldIdLst>
     <p:sldId id="256" r:id="rId1"/>
@@ -22,6 +22,7 @@
     <p:sldId id="267" r:id="rId12"/>
     <p:sldId id="268" r:id="rId13"/>
     <p:sldId id="269" r:id="rId14"/>
+    <p:sldId id="270" r:id="rId15"/>
   </p:sldIdLst>
   <p:sldSz cx="12192000" cy="6858000"/>
   <p:notesSz cx="6858000" cy="12192000"/>
@@ -557,7 +558,7 @@
   <p:cSld>
     <p:spTree>
       <p:nvGrpSpPr>
-        <p:cNvPr id="1" name=""/>
+        <p:cNvPr id="1" name="" descr="// 01: cover, preserving the supplied dark grid and large score.&#10;const FONT = 'Inter, &quot;Helvetica Neue&quot;, Arial, sans-serif';&#10;const MONO = '&quot;JetBrains Mono&quot;, &quot;SF Mono&quot;, Menlo, monospace';&#10;const BLUE = '#2F6BFF';&#10;const DEEP = 'linear-gradient(160deg, #0B1220 0%, #131E33 62%, #0B1220 100%)';&#10;&#10;const GRID_X = [0, 71, 142, 213, 284, 355, 426, 497, 568, 639, 710, 781, 852, 923, 994, 1065, 1136];&#10;const GRID_Y = [0, 64, 128, 192, 256, 320, 384, 448, 512, 576];&#10;&#10;const STEPS = ['Detection', 'Evidence collection', 'Diagnosis and plan', 'Action and verification'];&#10;&#10;&lt;Slide style={{ width: 1280, height: 720, padding: '72px', background: DEEP, fontFamily: FONT }}&gt;&#10;    &lt;Box style={{ position: 'relative', width: 1136, height: 576 }}&gt;&#10;&#10;        &lt;Box style={{ position: 'absolute', left: 0, top: 0, width: 1136, height: 576 }}&gt;&#10;            &lt;svg width={1136} height={576} viewBox='0 0 1136 576'&gt;&#10;                {GRID_X.map((x, i) =&gt; (&#10;                    &lt;line key={'gx' + i} x1={x} y1={0} x2={x} y2={576} stroke='rgba(255,255,255,0.05)' strokeWidth={1} /&gt;&#10;                ))}&#10;                {GRID_Y.map((y, i) =&gt; (&#10;                    &lt;line key={'gy' + i} x1={0} y1={y} x2={1136} y2={y} stroke='rgba(255,255,255,0.05)' strokeWidth={1} /&gt;&#10;                ))}&#10;            &lt;/svg&gt;&#10;        &lt;/Box&gt;&#10;&#10;        &lt;Box style={{ position: 'absolute', right: 0, top: 74, width: 660, alignItems: 'flex-end' }}&gt;&#10;            &lt;Text style={{ fontFamily: MONO, fontSize: 176, fontWeight: 700, color: 'rgba(47,107,255,0.17)', lineHeight: 1.02 }}&gt;11 /&lt;/Text&gt;&#10;            &lt;Text style={{ fontFamily: MONO, fontSize: 176, fontWeight: 700, color: 'rgba(47,107,255,0.17)', lineHeight: 1.02 }}&gt;14&lt;/Text&gt;&#10;        &lt;/Box&gt;&#10;&#10;        &lt;Box style={{ position: 'relative', width: 790, height: 576, justifyContent: 'center', gap: 22 }}&gt;&#10;            &lt;Text style={{ fontFamily: MONO, fontSize: 14, color: BLUE, letterSpacing: 3 }}&gt;AI BUILDER CUP 2026, JAPAC&lt;/Text&gt;&#10;            &lt;Text style={{ fontSize: 76, fontWeight: 700, color: '#FFFFFF', lineHeight: 1.08 }}&gt;Training Failure&lt;/Text&gt;&#10;            &lt;Text style={{ fontSize: 76, fontWeight: 700, color: '#FFFFFF', lineHeight: 1.08 }}&gt;Triage&lt;/Text&gt;&#10;            &lt;Box style={{ width: 96, height: 3, background: BLUE, marginTop: 10 }} /&gt;&#10;            &lt;Text style={{ fontSize: 20, color: '#94A3B8', lineHeight: 1.62, width: 720 }}&gt;&#10;                Evidence for deciding &lt;span style={{ color: '#E2E8F0' }}&gt;whether a training failure comes from software or GPU hardware&lt;/span&gt;, with risk controls for the proposed action.&#10;            &lt;/Text&gt;&#10;            &lt;Box style={{ flexDirection: 'row', gap: 10, marginTop: 12 }}&gt;&#10;                {STEPS.map((s, i) =&gt; (&#10;                    &lt;Box key={i} style={{ paddingTop: 7, paddingBottom: 7, paddingLeft: 13, paddingRight: 13, borderRadius: 5, background: 'rgba(255,255,255,0.07)', border: '1px solid rgba(255,255,255,0.13)' }}&gt;&#10;                        &lt;Text style={{ fontSize: 14, color: '#C7D2E0' }}&gt;{s}&lt;/Text&gt;&#10;                    &lt;/Box&gt;&#10;                ))}&#10;            &lt;/Box&gt;&#10;            &lt;Text style={{ fontFamily: MONO, fontSize: 13, color: 'rgba(255,255,255,0.42)', lineHeight: 1.5, width: 720 }}&gt;&#10;                11 / 14 is the joint classification and RMA rule score on 14 constructed cases&#10;            &lt;/Text&gt;&#10;        &lt;/Box&gt;&#10;&#10;        &lt;Box style={{ position: 'absolute', left: 0, bottom: 0, width: 1136, flexDirection: 'row', justifyContent: 'space-between', alignItems: 'flex-end' }}&gt;&#10;            &lt;Text style={{ fontFamily: MONO, fontSize: 14, color: 'rgba(255,255,255,0.52)' }}&gt;gpu-waste-auditor-2026.web.app&lt;/Text&gt;&#10;            &lt;Text style={{ fontSize: 14, color: 'rgba(255,255,255,0.52)' }}&gt;Sustainability &amp;amp; Social Impact&lt;/Text&gt;&#10;        &lt;/Box&gt;&#10;&#10;    &lt;/Box&gt;&#10;&lt;/Slide&gt;&#10;"/>
         <p:cNvGrpSpPr/>
         <p:nvPr/>
       </p:nvGrpSpPr>
@@ -601,10 +602,7 @@
         </p:spPr>
         <p:txBody>
           <a:bodyPr/>
-          <a:p>
-            <a:pPr/>
-            <a:endParaRPr/>
-          </a:p>
+          <a:p/>
         </p:txBody>
       </p:sp>
       <p:pic>
@@ -741,7 +739,7 @@
                 <a:latin typeface="JetBrains Mono"/>
                 <a:ea typeface="JetBrains Mono"/>
               </a:rPr>
-              <a:t>AI BUILDER CUP 2026 · JAPAC</a:t>
+              <a:t>AI BUILDER CUP 2026, JAPAC</a:t>
             </a:r>
             <a:endParaRPr/>
           </a:p>
@@ -838,10 +836,7 @@
         </p:spPr>
         <p:txBody>
           <a:bodyPr/>
-          <a:p>
-            <a:pPr/>
-            <a:endParaRPr/>
-          </a:p>
+          <a:p/>
         </p:txBody>
       </p:sp>
       <p:sp>
@@ -875,7 +870,7 @@
                 <a:latin typeface="Inter"/>
                 <a:ea typeface="Inter"/>
               </a:rPr>
-              <a:t xml:space="preserve">A training job fails. The task is to decide </a:t>
+              <a:t xml:space="preserve">Evidence for deciding </a:t>
             </a:r>
             <a:r>
               <a:rPr lang="en-US" sz="1500">
@@ -885,7 +880,7 @@
                 <a:latin typeface="Inter"/>
                 <a:ea typeface="Inter"/>
               </a:rPr>
-              <a:t>whether the fault is in the software or in the card</a:t>
+              <a:t>whether a training failure comes from software or GPU hardware</a:t>
             </a:r>
             <a:r>
               <a:rPr lang="en-US" sz="1500">
@@ -895,7 +890,7 @@
                 <a:latin typeface="Inter"/>
                 <a:ea typeface="Inter"/>
               </a:rPr>
-              <a:t>, and to show the evidence the decision rests on.</a:t>
+              <a:t>, with risk controls for the proposed action.</a:t>
             </a:r>
             <a:endParaRPr/>
           </a:p>
@@ -910,7 +905,7 @@
         <p:spPr>
           <a:xfrm rot="0" flipH="0" flipV="0">
             <a:off x="685800" y="5105400"/>
-            <a:ext cx="647700" cy="295275"/>
+            <a:ext cx="828675" cy="295275"/>
           </a:xfrm>
           <a:prstGeom prst="roundRect">
             <a:avLst>
@@ -933,10 +928,7 @@
         </p:spPr>
         <p:txBody>
           <a:bodyPr/>
-          <a:p>
-            <a:pPr/>
-            <a:endParaRPr/>
-          </a:p>
+          <a:p/>
         </p:txBody>
       </p:sp>
       <p:sp>
@@ -948,7 +940,7 @@
         <p:spPr>
           <a:xfrm rot="0" flipH="0" flipV="0">
             <a:off x="809625" y="5172075"/>
-            <a:ext cx="400050" cy="161925"/>
+            <a:ext cx="581025" cy="161925"/>
           </a:xfrm>
           <a:prstGeom prst="rect"/>
         </p:spPr>
@@ -968,7 +960,7 @@
                 <a:latin typeface="Inter"/>
                 <a:ea typeface="Inter"/>
               </a:rPr>
-              <a:t>Detect</a:t>
+              <a:t>Detection</a:t>
             </a:r>
             <a:endParaRPr/>
           </a:p>
@@ -982,8 +974,8 @@
         </p:nvSpPr>
         <p:spPr>
           <a:xfrm rot="0" flipH="0" flipV="0">
-            <a:off x="1428750" y="5105400"/>
-            <a:ext cx="1238250" cy="295275"/>
+            <a:off x="1609725" y="5105400"/>
+            <a:ext cx="1409700" cy="295275"/>
           </a:xfrm>
           <a:prstGeom prst="roundRect">
             <a:avLst>
@@ -1006,10 +998,7 @@
         </p:spPr>
         <p:txBody>
           <a:bodyPr/>
-          <a:p>
-            <a:pPr/>
-            <a:endParaRPr/>
-          </a:p>
+          <a:p/>
         </p:txBody>
       </p:sp>
       <p:sp>
@@ -1020,8 +1009,8 @@
         </p:nvSpPr>
         <p:spPr>
           <a:xfrm rot="0" flipH="0" flipV="0">
-            <a:off x="1552575" y="5172075"/>
-            <a:ext cx="990600" cy="161925"/>
+            <a:off x="1733550" y="5172075"/>
+            <a:ext cx="1162050" cy="161925"/>
           </a:xfrm>
           <a:prstGeom prst="rect"/>
         </p:spPr>
@@ -1041,7 +1030,7 @@
                 <a:latin typeface="Inter"/>
                 <a:ea typeface="Inter"/>
               </a:rPr>
-              <a:t>Collect evidence</a:t>
+              <a:t>Evidence collection</a:t>
             </a:r>
             <a:endParaRPr/>
           </a:p>
@@ -1055,8 +1044,8 @@
         </p:nvSpPr>
         <p:spPr>
           <a:xfrm rot="0" flipH="0" flipV="0">
-            <a:off x="2762250" y="5105400"/>
-            <a:ext cx="1228725" cy="295275"/>
+            <a:off x="3114675" y="5105400"/>
+            <a:ext cx="1390650" cy="295275"/>
           </a:xfrm>
           <a:prstGeom prst="roundRect">
             <a:avLst>
@@ -1079,10 +1068,7 @@
         </p:spPr>
         <p:txBody>
           <a:bodyPr/>
-          <a:p>
-            <a:pPr/>
-            <a:endParaRPr/>
-          </a:p>
+          <a:p/>
         </p:txBody>
       </p:sp>
       <p:sp>
@@ -1093,8 +1079,8 @@
         </p:nvSpPr>
         <p:spPr>
           <a:xfrm rot="0" flipH="0" flipV="0">
-            <a:off x="2886075" y="5172075"/>
-            <a:ext cx="981075" cy="161925"/>
+            <a:off x="3238500" y="5172075"/>
+            <a:ext cx="1143000" cy="161925"/>
           </a:xfrm>
           <a:prstGeom prst="rect"/>
         </p:spPr>
@@ -1114,7 +1100,7 @@
                 <a:latin typeface="Inter"/>
                 <a:ea typeface="Inter"/>
               </a:rPr>
-              <a:t>Diagnose &amp; plan</a:t>
+              <a:t>Diagnosis and plan</a:t>
             </a:r>
             <a:endParaRPr/>
           </a:p>
@@ -1128,8 +1114,8 @@
         </p:nvSpPr>
         <p:spPr>
           <a:xfrm rot="0" flipH="0" flipV="0">
-            <a:off x="4086225" y="5105400"/>
-            <a:ext cx="1323975" cy="295275"/>
+            <a:off x="4600575" y="5105400"/>
+            <a:ext cx="1581150" cy="295275"/>
           </a:xfrm>
           <a:prstGeom prst="roundRect">
             <a:avLst>
@@ -1152,10 +1138,7 @@
         </p:spPr>
         <p:txBody>
           <a:bodyPr/>
-          <a:p>
-            <a:pPr/>
-            <a:endParaRPr/>
-          </a:p>
+          <a:p/>
         </p:txBody>
       </p:sp>
       <p:sp>
@@ -1166,8 +1149,8 @@
         </p:nvSpPr>
         <p:spPr>
           <a:xfrm rot="0" flipH="0" flipV="0">
-            <a:off x="4210050" y="5172075"/>
-            <a:ext cx="1076325" cy="161925"/>
+            <a:off x="4724400" y="5172075"/>
+            <a:ext cx="1333500" cy="161925"/>
           </a:xfrm>
           <a:prstGeom prst="rect"/>
         </p:spPr>
@@ -1187,7 +1170,7 @@
                 <a:latin typeface="Inter"/>
                 <a:ea typeface="Inter"/>
               </a:rPr>
-              <a:t>Act · notify · verify</a:t>
+              <a:t>Action and verification</a:t>
             </a:r>
             <a:endParaRPr/>
           </a:p>
@@ -1224,7 +1207,7 @@
                 <a:latin typeface="JetBrains Mono"/>
                 <a:ea typeface="JetBrains Mono"/>
               </a:rPr>
-              <a:t>11 / 14 above = the rule baseline's score on the 14-case library (chapter 03)</a:t>
+              <a:t>11 / 14 is the joint classification and RMA rule score on 14 constructed cases</a:t>
             </a:r>
             <a:endParaRPr/>
           </a:p>
@@ -1314,7 +1297,7 @@
   <p:cSld>
     <p:spTree>
       <p:nvGrpSpPr>
-        <p:cNvPr id="22" name=""/>
+        <p:cNvPr id="22" name="" descr="// 10: triage replay summary and actual application tool trace.&#10;const FONT = 'Inter, &quot;Helvetica Neue&quot;, Arial, sans-serif';&#10;const MONO = '&quot;JetBrains Mono&quot;, &quot;SF Mono&quot;, Menlo, monospace';&#10;const INK = '#0B1220';&#10;const BLUE = '#2F6BFF';&#10;const RED = '#E5484D';&#10;const DIM = '#64748B';&#10;const BODY = '#1A2434';&#10;&#10;&lt;Slide style={{ width: 1280, height: 720, padding: '18px 72px', background: '#FFFFFF', fontFamily: FONT }}&gt;&#10;    &lt;Box style={{ width: 1136, height: 92, flexDirection: 'row', justifyContent: 'space-between', alignItems: 'flex-end' }}&gt;&#10;        &lt;Text style={{ fontSize: 34, fontWeight: 700, color: INK, lineHeight: 1.3 }}&gt;Triage tool trace&lt;/Text&gt;&#10;        &lt;Text style={{ fontFamily: MONO, fontSize: 14, color: DIM, lineHeight: 1.45 }}&gt;case-xid94-rising, local replay&lt;/Text&gt;&#10;    &lt;/Box&gt;&#10;&#10;    &lt;Box style={{ width: 1136, height: 544 }}&gt;&#10;&#10;        &lt;Box style={{ width: 1136, height: 104, flexDirection: 'row', alignItems: 'center', gap: 24 }}&gt;&#10;            &lt;Box style={{ paddingTop: 8, paddingBottom: 8, paddingLeft: 16, paddingRight: 16, borderRadius: 6, background: INK }}&gt;&#10;                &lt;Text style={{ fontFamily: MONO, fontSize: 18, fontWeight: 600, color: '#FFFFFF' }}&gt;hardware&lt;/Text&gt;&#10;            &lt;/Box&gt;&#10;            &lt;Box style={{ paddingTop: 8, paddingBottom: 8, paddingLeft: 16, paddingRight: 16, borderRadius: 6, background: RED }}&gt;&#10;                &lt;Text style={{ fontFamily: MONO, fontSize: 18, fontWeight: 600, color: '#FFFFFF' }}&gt;RMA advised&lt;/Text&gt;&#10;            &lt;/Box&gt;&#10;            &lt;Text style={{ fontFamily: MONO, fontSize: 72, fontWeight: 700, color: INK, lineHeight: 1 }}&gt;0.95&lt;/Text&gt;&#10;            &lt;Box&gt;&#10;                &lt;Text style={{ fontSize: 15, color: DIM, lineHeight: 1.4 }}&gt;confidence in replay fixture&lt;/Text&gt;&#10;                &lt;Text style={{ fontSize: 15, color: DIM, lineHeight: 1.4 }}&gt;4 recorded tool calls&lt;/Text&gt;&#10;            &lt;/Box&gt;&#10;            &lt;Box style={{ flex: 1 }} /&gt;&#10;            &lt;Text style={{ fontFamily: MONO, fontSize: 14, color: DIM, lineHeight: 1.5 }}&gt;expected: hardware, RMA&lt;/Text&gt;&#10;        &lt;/Box&gt;&#10;&#10;        &lt;Box style={{ width: 1136, height: 240 }}&gt;&#10;            &lt;Text style={{ fontFamily: MONO, fontSize: 13, color: DIM, lineHeight: 1.6 }}&gt;&#10;                English replay fixture rendered by the application tool-trace component&#10;            &lt;/Text&gt;&#10;            &lt;Image src='assets/crop-tooltrace.png' style={{ width: 1096, height: 204, marginTop: 8, border: '1px solid #E9EDF4' }} /&gt;&#10;        &lt;/Box&gt;&#10;&#10;        &lt;Box style={{ width: 1136, height: 168, flexDirection: 'row', gap: 36, marginTop: 32 }}&gt;&#10;&#10;            &lt;Box style={{ width: 700 }}&gt;&#10;                &lt;Text style={{ fontSize: 20, fontWeight: 600, color: INK, lineHeight: 1.45 }}&gt;Tool evidence for the recommendation&lt;/Text&gt;&#10;                &lt;Text style={{ fontSize: 15, color: BODY, lineHeight: 1.62, marginTop: 10, width: 700 }}&gt;&#10;                    &lt;span style={{ fontFamily: MONO, color: INK }}&gt;lookup_xid&lt;/span&gt; reads the Xid knowledge base.&#10;                    &lt;span style={{ fontFamily: MONO, color: INK }}&gt; inspect_node&lt;/span&gt; supplies node telemetry.&#10;                    The prompt requires tool evidence for numerical claims.&#10;                &lt;/Text&gt;&#10;            &lt;/Box&gt;&#10;&#10;            &lt;Box style={{ width: 400 }}&gt;&#10;                &lt;Text style={{ fontFamily: MONO, fontSize: 13, color: BLUE, lineHeight: 1.6 }}&gt;References T1, T2 and T3&lt;/Text&gt;&#10;                &lt;Text style={{ fontSize: 15, color: BODY, lineHeight: 1.62, marginTop: 8, width: 400 }}&gt;&#10;                    The app registers references when tools execute. It drops unknown reference IDs from proposed actions and reports the dropped IDs.&#10;                &lt;/Text&gt;&#10;            &lt;/Box&gt;&#10;&#10;        &lt;/Box&gt;&#10;&#10;    &lt;/Box&gt;&#10;&#10;    &lt;Box style={{ width: 1136, height: 48, flexDirection: 'row', justifyContent: 'space-between', alignItems: 'center' }}&gt;&#10;        &lt;Text style={{ fontSize: 14, color: DIM }}&gt;Local replay demonstrates English rendering and makes no model request&lt;/Text&gt;&#10;        &lt;Text style={{ fontFamily: MONO, fontSize: 14, color: DIM }}&gt;10 / 15&lt;/Text&gt;&#10;    &lt;/Box&gt;&#10;&lt;/Slide&gt;&#10;"/>
         <p:cNvGrpSpPr/>
         <p:nvPr/>
       </p:nvGrpSpPr>
@@ -1347,10 +1330,7 @@
         </p:spPr>
         <p:txBody>
           <a:bodyPr/>
-          <a:p>
-            <a:pPr/>
-            <a:endParaRPr/>
-          </a:p>
+          <a:p/>
         </p:txBody>
       </p:sp>
       <p:sp>
@@ -1362,7 +1342,7 @@
         <p:spPr>
           <a:xfrm rot="0" flipH="0" flipV="0">
             <a:off x="685800" y="533400"/>
-            <a:ext cx="7124700" cy="514350"/>
+            <a:ext cx="2524125" cy="514350"/>
           </a:xfrm>
           <a:prstGeom prst="rect"/>
         </p:spPr>
@@ -1382,7 +1362,7 @@
                 <a:latin typeface="Inter"/>
                 <a:ea typeface="Inter"/>
               </a:rPr>
-              <a:t>Where every number on this page comes from</a:t>
+              <a:t>Triage tool trace</a:t>
             </a:r>
             <a:endParaRPr/>
           </a:p>
@@ -1396,8 +1376,8 @@
         </p:nvSpPr>
         <p:spPr>
           <a:xfrm rot="0" flipH="0" flipV="0">
-            <a:off x="8848725" y="809625"/>
-            <a:ext cx="2657475" cy="238125"/>
+            <a:off x="9010650" y="809625"/>
+            <a:ext cx="2495550" cy="238125"/>
           </a:xfrm>
           <a:prstGeom prst="rect"/>
         </p:spPr>
@@ -1417,7 +1397,7 @@
                 <a:latin typeface="JetBrains Mono"/>
                 <a:ea typeface="JetBrains Mono"/>
               </a:rPr>
-              <a:t>case-xid94-rising · single triage</a:t>
+              <a:t>case-xid94-rising, local replay</a:t>
             </a:r>
             <a:endParaRPr/>
           </a:p>
@@ -1446,10 +1426,7 @@
         </p:spPr>
         <p:txBody>
           <a:bodyPr/>
-          <a:p>
-            <a:pPr/>
-            <a:endParaRPr/>
-          </a:p>
+          <a:p/>
         </p:txBody>
       </p:sp>
       <p:sp>
@@ -1496,7 +1473,7 @@
         <p:spPr>
           <a:xfrm rot="0" flipH="0" flipV="0">
             <a:off x="2047875" y="1362075"/>
-            <a:ext cx="1238250" cy="361950"/>
+            <a:ext cx="1447800" cy="361950"/>
           </a:xfrm>
           <a:prstGeom prst="roundRect">
             <a:avLst>
@@ -1510,10 +1487,7 @@
         </p:spPr>
         <p:txBody>
           <a:bodyPr/>
-          <a:p>
-            <a:pPr/>
-            <a:endParaRPr/>
-          </a:p>
+          <a:p/>
         </p:txBody>
       </p:sp>
       <p:sp>
@@ -1525,7 +1499,7 @@
         <p:spPr>
           <a:xfrm rot="0" flipH="0" flipV="0">
             <a:off x="2200275" y="1438275"/>
-            <a:ext cx="933450" cy="209550"/>
+            <a:ext cx="1143000" cy="209550"/>
           </a:xfrm>
           <a:prstGeom prst="rect"/>
         </p:spPr>
@@ -1545,7 +1519,7 @@
                 <a:latin typeface="JetBrains Mono"/>
                 <a:ea typeface="JetBrains Mono"/>
               </a:rPr>
-              <a:t>RMA filed</a:t>
+              <a:t>RMA advised</a:t>
             </a:r>
             <a:endParaRPr/>
           </a:p>
@@ -1559,7 +1533,7 @@
         </p:nvSpPr>
         <p:spPr>
           <a:xfrm rot="0" flipH="0" flipV="0">
-            <a:off x="3514725" y="1133475"/>
+            <a:off x="3724275" y="1133475"/>
             <a:ext cx="1657350" cy="828675"/>
           </a:xfrm>
           <a:prstGeom prst="rect"/>
@@ -1594,8 +1568,8 @@
         </p:nvSpPr>
         <p:spPr>
           <a:xfrm rot="0" flipH="0" flipV="0">
-            <a:off x="5400675" y="1295400"/>
-            <a:ext cx="2752725" cy="247650"/>
+            <a:off x="5610225" y="1295400"/>
+            <a:ext cx="1724025" cy="247650"/>
           </a:xfrm>
           <a:prstGeom prst="rect"/>
         </p:spPr>
@@ -1615,7 +1589,7 @@
                 <a:latin typeface="Inter"/>
                 <a:ea typeface="Inter"/>
               </a:rPr>
-              <a:t>model confidence</a:t>
+              <a:t>confidence in replay fixture</a:t>
             </a:r>
             <a:endParaRPr/>
           </a:p>
@@ -1629,8 +1603,8 @@
         </p:nvSpPr>
         <p:spPr>
           <a:xfrm rot="0" flipH="0" flipV="0">
-            <a:off x="5400675" y="1543050"/>
-            <a:ext cx="2752725" cy="247650"/>
+            <a:off x="5610225" y="1543050"/>
+            <a:ext cx="1724025" cy="247650"/>
           </a:xfrm>
           <a:prstGeom prst="rect"/>
         </p:spPr>
@@ -1650,7 +1624,7 @@
                 <a:latin typeface="Inter"/>
                 <a:ea typeface="Inter"/>
               </a:rPr>
-              <a:t>4 tool calls before it was allowed to answer</a:t>
+              <a:t>4 recorded tool calls</a:t>
             </a:r>
             <a:endParaRPr/>
           </a:p>
@@ -1664,8 +1638,8 @@
         </p:nvSpPr>
         <p:spPr>
           <a:xfrm rot="0" flipH="0" flipV="0">
-            <a:off x="9572625" y="1419225"/>
-            <a:ext cx="1933575" cy="247650"/>
+            <a:off x="9658350" y="1419225"/>
+            <a:ext cx="1847850" cy="247650"/>
           </a:xfrm>
           <a:prstGeom prst="rect"/>
         </p:spPr>
@@ -1685,7 +1659,7 @@
                 <a:latin typeface="JetBrains Mono"/>
                 <a:ea typeface="JetBrains Mono"/>
               </a:rPr>
-              <a:t>expected: hardware · RMA</a:t>
+              <a:t>expected: hardware, RMA</a:t>
             </a:r>
             <a:endParaRPr/>
           </a:p>
@@ -1720,7 +1694,7 @@
                 <a:latin typeface="JetBrains Mono"/>
                 <a:ea typeface="JetBrains Mono"/>
               </a:rPr>
-              <a:t>AI tool-call trace: arguments printed exactly as they were sent</a:t>
+              <a:t>English replay fixture rendered by the application tool-trace component</a:t>
             </a:r>
             <a:endParaRPr/>
           </a:p>
@@ -1749,10 +1723,7 @@
         </p:spPr>
         <p:txBody>
           <a:bodyPr/>
-          <a:p>
-            <a:pPr/>
-            <a:endParaRPr/>
-          </a:p>
+          <a:p/>
         </p:txBody>
       </p:sp>
       <p:pic>
@@ -1809,7 +1780,7 @@
                 <a:latin typeface="Inter"/>
                 <a:ea typeface="Inter"/>
               </a:rPr>
-              <a:t>Numbers come from tools, not from the model</a:t>
+              <a:t>Tool evidence for the recommendation</a:t>
             </a:r>
             <a:endParaRPr/>
           </a:p>
@@ -1841,52 +1812,42 @@
             <a:r>
               <a:rPr lang="en-US" sz="1125">
                 <a:solidFill>
-                  <a:srgbClr val="1A2434"/>
+                  <a:srgbClr val="0B1220"/>
                 </a:solidFill>
                 <a:latin typeface="Inter"/>
                 <a:ea typeface="Inter"/>
               </a:rPr>
-              <a:t xml:space="preserve">The model is not allowed to compute or recall a number. </a:t>
+              <a:t>lookup_xid</a:t>
             </a:r>
             <a:r>
               <a:rPr lang="en-US" sz="1125">
                 <a:solidFill>
-                  <a:srgbClr val="0B1220"/>
+                  <a:srgbClr val="1A2434"/>
                 </a:solidFill>
                 <a:latin typeface="Inter"/>
                 <a:ea typeface="Inter"/>
               </a:rPr>
-              <a:t>lookup_xid</a:t>
+              <a:t xml:space="preserve"> reads the Xid knowledge base.</a:t>
             </a:r>
             <a:r>
               <a:rPr lang="en-US" sz="1125">
                 <a:solidFill>
-                  <a:srgbClr val="1A2434"/>
+                  <a:srgbClr val="0B1220"/>
                 </a:solidFill>
                 <a:latin typeface="Inter"/>
                 <a:ea typeface="Inter"/>
               </a:rPr>
-              <a:t xml:space="preserve"> reads the Xid knowledge base,</a:t>
+              <a:t xml:space="preserve"> inspect_node</a:t>
             </a:r>
             <a:r>
               <a:rPr lang="en-US" sz="1125">
                 <a:solidFill>
-                  <a:srgbClr val="0B1220"/>
+                  <a:srgbClr val="1A2434"/>
                 </a:solidFill>
                 <a:latin typeface="Inter"/>
                 <a:ea typeface="Inter"/>
               </a:rPr>
-              <a:t xml:space="preserve"> inspect_node</a:t>
-            </a:r>
-            <a:r>
-              <a:rPr lang="en-US" sz="1125">
-                <a:solidFill>
-                  <a:srgbClr val="1A2434"/>
-                </a:solidFill>
-                <a:latin typeface="Inter"/>
-                <a:ea typeface="Inter"/>
-              </a:rPr>
-              <a:t xml:space="preserve"> reads node telemetry. A value that was never fetched cannot appear in the conclusion.</a:t>
+              <a:t xml:space="preserve"> supplies node telemetry. The prompt requires tool evidence for numerical claims.</a:t>
             </a:r>
             <a:endParaRPr/>
           </a:p>
@@ -1921,7 +1882,7 @@
                 <a:latin typeface="JetBrains Mono"/>
                 <a:ea typeface="JetBrains Mono"/>
               </a:rPr>
-              <a:t>T1 · T2 · T3</a:t>
+              <a:t>References T1, T2 and T3</a:t>
             </a:r>
             <a:endParaRPr/>
           </a:p>
@@ -1958,7 +1919,7 @@
                 <a:latin typeface="Inter"/>
                 <a:ea typeface="Inter"/>
               </a:rPr>
-              <a:t>Citation ids are attached by the app when a call actually executes. A reference the model invents is dropped, and the model is told it was dropped.</a:t>
+              <a:t>The app registers references when tools execute. It drops unknown reference IDs from proposed actions and reports the dropped IDs.</a:t>
             </a:r>
             <a:endParaRPr/>
           </a:p>
@@ -1973,7 +1934,7 @@
         <p:spPr>
           <a:xfrm rot="0" flipH="0" flipV="0">
             <a:off x="685800" y="6381750"/>
-            <a:ext cx="4953000" cy="161925"/>
+            <a:ext cx="4419600" cy="161925"/>
           </a:xfrm>
           <a:prstGeom prst="rect"/>
         </p:spPr>
@@ -1993,7 +1954,7 @@
                 <a:latin typeface="Inter"/>
                 <a:ea typeface="Inter"/>
               </a:rPr>
-              <a:t>The model writes the verdict; the app supplies and checks everything underneath it</a:t>
+              <a:t>Local replay demonstrates English rendering and makes no model request</a:t>
             </a:r>
             <a:endParaRPr/>
           </a:p>
@@ -2028,7 +1989,7 @@
                 <a:latin typeface="JetBrains Mono"/>
                 <a:ea typeface="JetBrains Mono"/>
               </a:rPr>
-              <a:t>10 / 14</a:t>
+              <a:t>10 / 15</a:t>
             </a:r>
             <a:endParaRPr/>
           </a:p>
@@ -2044,7 +2005,7 @@
   <p:cSld>
     <p:spTree>
       <p:nvGrpSpPr>
-        <p:cNvPr id="43" name=""/>
+        <p:cNvPr id="43" name="" descr="// 11: evidence section with the joint F8 rule score.&#10;const FONT = 'Inter, &quot;Helvetica Neue&quot;, Arial, sans-serif';&#10;const MONO = '&quot;JetBrains Mono&quot;, &quot;SF Mono&quot;, Menlo, monospace';&#10;const BLUE = '#2F6BFF';&#10;const DEEP = 'linear-gradient(160deg, #0B1220 0%, #131E33 62%, #0B1220 100%)';&#10;&#10;const GRID_X = [0, 71, 142, 213, 284, 355, 426, 497, 568, 639, 710, 781, 852, 923, 994, 1065, 1136];&#10;const GRID_Y = [0, 64, 128, 192, 256, 320, 384, 448, 512, 576];&#10;&#10;&lt;Slide style={{ width: 1280, height: 720, padding: '72px', background: DEEP, fontFamily: FONT }}&gt;&#10;    &lt;Box style={{ position: 'relative', width: 1136, height: 576 }}&gt;&#10;&#10;        &lt;Box style={{ position: 'absolute', left: 0, top: 0, width: 1136, height: 576 }}&gt;&#10;            &lt;svg width={1136} height={576} viewBox='0 0 1136 576'&gt;&#10;                {GRID_X.map((x, i) =&gt; (&#10;                    &lt;line key={'gx' + i} x1={x} y1={0} x2={x} y2={576} stroke='rgba(255,255,255,0.045)' strokeWidth={1} /&gt;&#10;                ))}&#10;                {GRID_Y.map((y, i) =&gt; (&#10;                    &lt;line key={'gy' + i} x1={0} y1={y} x2={1136} y2={y} stroke='rgba(255,255,255,0.045)' strokeWidth={1} /&gt;&#10;                ))}&#10;            &lt;/svg&gt;&#10;        &lt;/Box&gt;&#10;&#10;        &lt;Box style={{ position: 'absolute', right: 0, top: 24, width: 640, alignItems: 'flex-end' }}&gt;&#10;            &lt;Text style={{ fontFamily: MONO, fontSize: 180, fontWeight: 700, color: 'rgba(47,107,255,0.18)', lineHeight: 1 }}&gt;11 /&lt;/Text&gt;&#10;            &lt;Text style={{ fontFamily: MONO, fontSize: 180, fontWeight: 700, color: 'rgba(47,107,255,0.18)', lineHeight: 1 }}&gt;14&lt;/Text&gt;&#10;            &lt;Text style={{ fontFamily: MONO, fontSize: 14, color: 'rgba(255,255,255,0.52)', lineHeight: 1.5, marginTop: 10 }}&gt;&#10;                rule baseline on the 14-case library&#10;            &lt;/Text&gt;&#10;        &lt;/Box&gt;&#10;&#10;        &lt;Box style={{ position: 'relative', width: 760, height: 576, justifyContent: 'center', gap: 18 }}&gt;&#10;            &lt;Text style={{ fontFamily: MONO, fontSize: 14, color: BLUE, letterSpacing: 3 }}&gt;CHAPTER 03&lt;/Text&gt;&#10;            &lt;Text style={{ fontSize: 64, fontWeight: 700, color: '#FFFFFF', lineHeight: 1.1 }}&gt;Evidence and limits&lt;/Text&gt;&#10;            &lt;Text style={{ fontSize: 24, color: '#94A3B8', lineHeight: 1.5 }}&gt;A rule benchmark on 14 constructed cases&lt;/Text&gt;&#10;            &lt;Box style={{ width: 88, height: 3, background: 'rgba(255,255,255,0.28)', marginTop: 14 }} /&gt;&#10;            &lt;Text style={{ fontSize: 18, color: '#C7D2E0', lineHeight: 1.65, width: 740 }}&gt;&#10;                F8 requires both the classification and RMA decision to match the expected result.&#10;                The rule baseline scores 11/14. The constructed case set does not establish production accuracy,&#10;                and this submission reports no aggregate AI score.&#10;            &lt;/Text&gt;&#10;        &lt;/Box&gt;&#10;&#10;        &lt;Box style={{ position: 'absolute', left: 0, bottom: 0, width: 1136, flexDirection: 'row', justifyContent: 'flex-end' }}&gt;&#10;            &lt;Text style={{ fontFamily: MONO, fontSize: 14, color: 'rgba(255,255,255,0.45)' }}&gt;11 / 15&lt;/Text&gt;&#10;        &lt;/Box&gt;&#10;&#10;    &lt;/Box&gt;&#10;&lt;/Slide&gt;&#10;"/>
         <p:cNvGrpSpPr/>
         <p:nvPr/>
       </p:nvGrpSpPr>
@@ -2088,10 +2049,7 @@
         </p:spPr>
         <p:txBody>
           <a:bodyPr/>
-          <a:p>
-            <a:pPr/>
-            <a:endParaRPr/>
-          </a:p>
+          <a:p/>
         </p:txBody>
       </p:sp>
       <p:pic>
@@ -2244,7 +2202,7 @@
         </p:nvSpPr>
         <p:spPr>
           <a:xfrm rot="0" flipH="0" flipV="0">
-            <a:off x="685800" y="1971675"/>
+            <a:off x="685800" y="1800225"/>
             <a:ext cx="7239000" cy="161925"/>
           </a:xfrm>
           <a:prstGeom prst="rect"/>
@@ -2279,7 +2237,7 @@
         </p:nvSpPr>
         <p:spPr>
           <a:xfrm rot="0" flipH="0" flipV="0">
-            <a:off x="685800" y="2305050"/>
+            <a:off x="685800" y="2133600"/>
             <a:ext cx="7239000" cy="809625"/>
           </a:xfrm>
           <a:prstGeom prst="rect"/>
@@ -2300,7 +2258,7 @@
                 <a:latin typeface="Inter"/>
                 <a:ea typeface="Inter"/>
               </a:rPr>
-              <a:t>Evidence &amp; boundaries</a:t>
+              <a:t>Evidence and limits</a:t>
             </a:r>
             <a:endParaRPr/>
           </a:p>
@@ -2314,7 +2272,7 @@
         </p:nvSpPr>
         <p:spPr>
           <a:xfrm rot="0" flipH="0" flipV="0">
-            <a:off x="685800" y="3286125"/>
+            <a:off x="685800" y="3114675"/>
             <a:ext cx="7239000" cy="419100"/>
           </a:xfrm>
           <a:prstGeom prst="rect"/>
@@ -2335,7 +2293,7 @@
                 <a:latin typeface="Inter"/>
                 <a:ea typeface="Inter"/>
               </a:rPr>
-              <a:t>Reproducible numbers, stated limits</a:t>
+              <a:t>A rule benchmark on 14 constructed cases</a:t>
             </a:r>
             <a:endParaRPr/>
           </a:p>
@@ -2349,7 +2307,7 @@
         </p:nvSpPr>
         <p:spPr>
           <a:xfrm rot="0" flipH="0" flipV="0">
-            <a:off x="685800" y="4010025"/>
+            <a:off x="685800" y="3838575"/>
             <a:ext cx="838200" cy="28575"/>
           </a:xfrm>
           <a:prstGeom prst="rect">
@@ -2364,10 +2322,7 @@
         </p:spPr>
         <p:txBody>
           <a:bodyPr/>
-          <a:p>
-            <a:pPr/>
-            <a:endParaRPr/>
-          </a:p>
+          <a:p/>
         </p:txBody>
       </p:sp>
       <p:sp>
@@ -2378,8 +2333,8 @@
         </p:nvSpPr>
         <p:spPr>
           <a:xfrm rot="0" flipH="0" flipV="0">
-            <a:off x="685800" y="4210050"/>
-            <a:ext cx="7048500" cy="685800"/>
+            <a:off x="685800" y="4038600"/>
+            <a:ext cx="7048500" cy="1019175"/>
           </a:xfrm>
           <a:prstGeom prst="rect"/>
         </p:spPr>
@@ -2401,7 +2356,7 @@
                 <a:latin typeface="Inter"/>
                 <a:ea typeface="Inter"/>
               </a:rPr>
-              <a:t>Every number in this chapter can be rerun from a script in the repository. Where we never ran a case, the table shows a blank rather than a plausible value.</a:t>
+              <a:t>F8 requires both the classification and RMA decision to match the expected result. The rule baseline scores 11/14. The constructed case set does not establish production accuracy, and this submission reports no aggregate AI score.</a:t>
             </a:r>
             <a:endParaRPr/>
           </a:p>
@@ -2438,7 +2393,7 @@
                 <a:latin typeface="JetBrains Mono"/>
                 <a:ea typeface="JetBrains Mono"/>
               </a:rPr>
-              <a:t>11 / 14</a:t>
+              <a:t>11 / 15</a:t>
             </a:r>
             <a:endParaRPr/>
           </a:p>
@@ -2454,7 +2409,7 @@
   <p:cSld>
     <p:spTree>
       <p:nvGrpSpPr>
-        <p:cNvPr id="55" name=""/>
+        <p:cNvPr id="55" name="" descr="// 12: joint F8 result and all 14 case rows.&#10;const FONT = 'Inter, &quot;Helvetica Neue&quot;, Arial, sans-serif';&#10;const MONO = '&quot;JetBrains Mono&quot;, &quot;SF Mono&quot;, Menlo, monospace';&#10;const INK = '#0B1220';&#10;const BLUE = '#2F6BFF';&#10;const RED = '#E5484D';&#10;const DIM = '#64748B';&#10;const BODY = '#1A2434';&#10;&#10;const MISSES = [&#10;    { id: 'case-xid48-dbe', why: 'hardware evidence loses to application signature votes' },&#10;    { id: 'case-xid94-rising', why: 'frequent Xid 94 with rising ECC remains hardware_watch' },&#10;    { id: 'case-gpu-hang-deadlock', why: 'a secondary hang taken for the root cause' },&#10;];&#10;&#10;&lt;Slide style={{ width: 1280, height: 720, padding: '18px 72px', background: '#FFFFFF', fontFamily: FONT }}&gt;&#10;    &lt;Box style={{ width: 1136, height: 92, flexDirection: 'row', justifyContent: 'space-between', alignItems: 'flex-end' }}&gt;&#10;        &lt;Text style={{ fontSize: 34, fontWeight: 700, color: INK, lineHeight: 1.3 }}&gt;Rule benchmark results&lt;/Text&gt;&#10;        &lt;Text style={{ fontFamily: MONO, fontSize: 14, color: DIM, lineHeight: 1.45 }}&gt;Offline baseline, no model calls&lt;/Text&gt;&#10;    &lt;/Box&gt;&#10;&#10;    &lt;Box style={{ width: 1136, height: 544, flexDirection: 'row', gap: 24 }}&gt;&#10;&#10;        &lt;Box style={{ width: 452 }}&gt;&#10;            &lt;Text style={{ fontFamily: MONO, fontSize: 104, fontWeight: 700, color: INK, lineHeight: 1 }}&gt;11 / &lt;span style={{ color: RED }}&gt;14&lt;/span&gt;&lt;/Text&gt;&#10;            &lt;Text style={{ fontFamily: MONO, fontSize: 16, color: DIM, lineHeight: 1.5, marginTop: 8 }}&gt;78.6% joint F8, class and RMA&lt;/Text&gt;&#10;&#10;            &lt;Box style={{ width: 452, height: 1, background: '#E6EBF3', marginTop: 16, marginBottom: 14 }} /&gt;&#10;&#10;            &lt;Text style={{ fontSize: 16, fontWeight: 600, color: INK, lineHeight: 1.45 }}&gt;Three rule-baseline misses&lt;/Text&gt;&#10;            {MISSES.map((m, i) =&gt; (&#10;                &lt;Box key={i} style={{ marginTop: 12, width: 452 }}&gt;&#10;                    &lt;Text style={{ fontFamily: MONO, fontSize: 13, color: BLUE, lineHeight: 1.5 }}&gt;{m.id}&lt;/Text&gt;&#10;                    &lt;Text style={{ fontSize: 14, color: BODY, lineHeight: 1.5 }}&gt;{m.why}&lt;/Text&gt;&#10;                &lt;/Box&gt;&#10;            ))}&#10;&#10;            &lt;Text style={{ fontSize: 13, color: DIM, lineHeight: 1.6, marginTop: 16, width: 452 }}&gt;&#10;                Classification alone: 11/14. RMA alone: 12/14.&#10;                The baseline votes over signature hits and maps hardware to an RMA recommendation.&#10;            &lt;/Text&gt;&#10;        &lt;/Box&gt;&#10;&#10;        &lt;Box style={{ width: 660, alignItems: 'center', justifyContent: 'center' }}&gt;&#10;            {/* Keep all case rows inside the measured table crop. */}&#10;            &lt;Image src='assets/crop-bench-table.png' style={{ width: 660, height: 400, border: '1px solid #E9EDF4' }} /&gt;&#10;            &lt;Text style={{ fontSize: 13, color: DIM, lineHeight: 1.5, marginTop: 10, width: 660 }}&gt;&#10;                All 14 constructed cases, scored locally. The AI column shows Not run for this capture.&#10;            &lt;/Text&gt;&#10;        &lt;/Box&gt;&#10;&#10;    &lt;/Box&gt;&#10;&#10;    &lt;Box style={{ width: 1136, height: 48, flexDirection: 'row', justifyContent: 'space-between', alignItems: 'center' }}&gt;&#10;        &lt;Text style={{ fontSize: 14, color: DIM }}&gt;scripts/verify_triage.mjs and the browser use the same scoring path&lt;/Text&gt;&#10;        &lt;Text style={{ fontFamily: MONO, fontSize: 14, color: DIM }}&gt;12 / 15&lt;/Text&gt;&#10;    &lt;/Box&gt;&#10;&lt;/Slide&gt;&#10;"/>
         <p:cNvGrpSpPr/>
         <p:nvPr/>
       </p:nvGrpSpPr>
@@ -2487,10 +2442,7 @@
         </p:spPr>
         <p:txBody>
           <a:bodyPr/>
-          <a:p>
-            <a:pPr/>
-            <a:endParaRPr/>
-          </a:p>
+          <a:p/>
         </p:txBody>
       </p:sp>
       <p:sp>
@@ -2502,7 +2454,7 @@
         <p:spPr>
           <a:xfrm rot="0" flipH="0" flipV="0">
             <a:off x="685800" y="533400"/>
-            <a:ext cx="4276725" cy="514350"/>
+            <a:ext cx="3667125" cy="514350"/>
           </a:xfrm>
           <a:prstGeom prst="rect"/>
         </p:spPr>
@@ -2522,7 +2474,7 @@
                 <a:latin typeface="Inter"/>
                 <a:ea typeface="Inter"/>
               </a:rPr>
-              <a:t>11 / 14, and you can rerun it</a:t>
+              <a:t>Rule benchmark results</a:t>
             </a:r>
             <a:endParaRPr/>
           </a:p>
@@ -2536,8 +2488,8 @@
         </p:nvSpPr>
         <p:spPr>
           <a:xfrm rot="0" flipH="0" flipV="0">
-            <a:off x="8124825" y="809625"/>
-            <a:ext cx="3381375" cy="238125"/>
+            <a:off x="8934450" y="809625"/>
+            <a:ext cx="2571750" cy="238125"/>
           </a:xfrm>
           <a:prstGeom prst="rect"/>
         </p:spPr>
@@ -2557,7 +2509,7 @@
                 <a:latin typeface="JetBrains Mono"/>
                 <a:ea typeface="JetBrains Mono"/>
               </a:rPr>
-              <a:t>Rule baseline · offline · zero model calls</a:t>
+              <a:t>Offline baseline, no model calls</a:t>
             </a:r>
             <a:endParaRPr/>
           </a:p>
@@ -2637,7 +2589,7 @@
                 <a:latin typeface="JetBrains Mono"/>
                 <a:ea typeface="JetBrains Mono"/>
               </a:rPr>
-              <a:t>78.6% · classification only</a:t>
+              <a:t>78.6% joint F8, class and RMA</a:t>
             </a:r>
             <a:endParaRPr/>
           </a:p>
@@ -2664,10 +2616,7 @@
         </p:spPr>
         <p:txBody>
           <a:bodyPr/>
-          <a:p>
-            <a:pPr/>
-            <a:endParaRPr/>
-          </a:p>
+          <a:p/>
         </p:txBody>
       </p:sp>
       <p:sp>
@@ -2699,7 +2648,7 @@
                 <a:latin typeface="Inter"/>
                 <a:ea typeface="Inter"/>
               </a:rPr>
-              <a:t>The three it gets wrong</a:t>
+              <a:t>Three rule-baseline misses</a:t>
             </a:r>
             <a:endParaRPr/>
           </a:p>
@@ -2769,7 +2718,7 @@
                 <a:latin typeface="Inter"/>
                 <a:ea typeface="Inter"/>
               </a:rPr>
-              <a:t>a rising correctable-ECC trend read as an application bug</a:t>
+              <a:t>hardware evidence loses to application signature votes</a:t>
             </a:r>
             <a:endParaRPr/>
           </a:p>
@@ -2839,7 +2788,7 @@
                 <a:latin typeface="Inter"/>
                 <a:ea typeface="Inter"/>
               </a:rPr>
-              <a:t>the pair that needs the 30-day window, not the code</a:t>
+              <a:t>frequent Xid 94 with rising ECC remains hardware_watch</a:t>
             </a:r>
             <a:endParaRPr/>
           </a:p>
@@ -2946,7 +2895,7 @@
                 <a:latin typeface="Inter"/>
                 <a:ea typeface="Inter"/>
               </a:rPr>
-              <a:t>The baseline does two things only: vote over pre-analysis hits, and “hardware means file an RMA”.</a:t>
+              <a:t>Classification alone: 11/14. RMA alone: 12/14. The baseline votes over signature hits and maps hardware to an RMA recommendation.</a:t>
             </a:r>
             <a:endParaRPr/>
           </a:p>
@@ -2960,7 +2909,7 @@
         </p:nvSpPr>
         <p:spPr>
           <a:xfrm rot="0" flipH="0" flipV="0">
-            <a:off x="5219700" y="1466850"/>
+            <a:off x="5219700" y="1571625"/>
             <a:ext cx="6286500" cy="3810000"/>
           </a:xfrm>
           <a:prstGeom prst="rect">
@@ -2975,10 +2924,7 @@
         </p:spPr>
         <p:txBody>
           <a:bodyPr/>
-          <a:p>
-            <a:pPr/>
-            <a:endParaRPr/>
-          </a:p>
+          <a:p/>
         </p:txBody>
       </p:sp>
       <p:pic>
@@ -2997,7 +2943,7 @@
         </p:blipFill>
         <p:spPr>
           <a:xfrm rot="0" flipH="0" flipV="0">
-            <a:off x="5219700" y="1466850"/>
+            <a:off x="5219700" y="1571625"/>
             <a:ext cx="6286500" cy="3810000"/>
           </a:xfrm>
           <a:prstGeom prst="rect">
@@ -3014,15 +2960,13 @@
         </p:nvSpPr>
         <p:spPr>
           <a:xfrm rot="0" flipH="0" flipV="0">
-            <a:off x="5219700" y="5372100"/>
-            <a:ext cx="6286500" cy="447675"/>
-          </a:xfrm>
-          <a:prstGeom prst="rect"/>
-        </p:spPr>
-        <p:txBody>
-          <a:bodyPr wrap="square" lIns="0" tIns="0" rIns="0" bIns="0">
-            <a:normAutofit/>
-          </a:bodyPr>
+            <a:off x="5219700" y="5476875"/>
+            <a:ext cx="6286500" cy="228600"/>
+          </a:xfrm>
+          <a:prstGeom prst="rect"/>
+        </p:spPr>
+        <p:txBody>
+          <a:bodyPr wrap="none" lIns="0" tIns="0" rIns="0" bIns="0"/>
           <a:p>
             <a:pPr>
               <a:lnSpc>
@@ -3037,7 +2981,7 @@
                 <a:latin typeface="Inter"/>
                 <a:ea typeface="Inter"/>
               </a:rPr>
-              <a:t>Same case library, same scoring script. The AI column is blank wherever we did not run the AI, because a blank is the honest value there.</a:t>
+              <a:t>All 14 constructed cases, scored locally. The AI column shows Not run for this capture.</a:t>
             </a:r>
             <a:endParaRPr/>
           </a:p>
@@ -3052,7 +2996,7 @@
         <p:spPr>
           <a:xfrm rot="0" flipH="0" flipV="0">
             <a:off x="685800" y="6381750"/>
-            <a:ext cx="5219700" cy="161925"/>
+            <a:ext cx="4038600" cy="161925"/>
           </a:xfrm>
           <a:prstGeom prst="rect"/>
         </p:spPr>
@@ -3072,7 +3016,7 @@
                 <a:latin typeface="Inter"/>
                 <a:ea typeface="Inter"/>
               </a:rPr>
-              <a:t>Reproduced by scripts/verify_triage.mjs — the page and the script share one code path</a:t>
+              <a:t>scripts/verify_triage.mjs and the browser use the same scoring path</a:t>
             </a:r>
             <a:endParaRPr/>
           </a:p>
@@ -3107,7 +3051,7 @@
                 <a:latin typeface="JetBrains Mono"/>
                 <a:ea typeface="JetBrains Mono"/>
               </a:rPr>
-              <a:t>12 / 14</a:t>
+              <a:t>12 / 15</a:t>
             </a:r>
             <a:endParaRPr/>
           </a:p>
@@ -3123,7 +3067,7 @@
   <p:cSld>
     <p:spTree>
       <p:nvGrpSpPr>
-        <p:cNvPr id="75" name=""/>
+        <p:cNvPr id="75" name="" descr="// 13: five architecture layers and code responsibilities.&#10;const FONT = 'Inter, &quot;Helvetica Neue&quot;, Arial, sans-serif';&#10;const MONO = '&quot;JetBrains Mono&quot;, &quot;SF Mono&quot;, Menlo, monospace';&#10;const INK = '#0B1220';&#10;const BLUE = '#2F6BFF';&#10;const PANEL = '#F1F4FA';&#10;const DIM = '#64748B';&#10;const BODY = '#1A2434';&#10;&#10;const LAYERS = [&#10;    { no: '01', t: 'Knowledge base', d: '24 Xid entries, 27 failure signatures and 6 diagnostic principles' },&#10;    { no: '02', t: 'Deterministic pre-analysis', d: 'Local compatibility checks and memory accounting produce structured facts' },&#10;    { no: '03', t: 'Tools', d: '10 registered tools, with 6 available for cases and all 10 for patrol' },&#10;    { no: '04', t: 'Model loop', d: 'Gemini allows up to 12 turns per attempt. Fallback retains completed calls.' },&#10;    { no: '05', t: 'Execution', d: 'Automatic actions require low risk. The app checks state and records the result.' },&#10;];&#10;&#10;&lt;Slide style={{ width: 1280, height: 720, padding: '18px 72px', background: '#FFFFFF', fontFamily: FONT }}&gt;&#10;    &lt;Box style={{ width: 1136, height: 92, flexDirection: 'row', justifyContent: 'space-between', alignItems: 'flex-end' }}&gt;&#10;        &lt;Text style={{ fontSize: 34, fontWeight: 700, color: INK, lineHeight: 1.3 }}&gt;Application architecture&lt;/Text&gt;&#10;        &lt;Text style={{ fontFamily: MONO, fontSize: 14, color: DIM, lineHeight: 1.45 }}&gt;Architecture&lt;/Text&gt;&#10;    &lt;/Box&gt;&#10;&#10;    &lt;Box style={{ width: 1136, height: 544, flexDirection: 'row', gap: 36 }}&gt;&#10;&#10;        &lt;Box style={{ width: 704 }}&gt;&#10;            {LAYERS.map((l, i) =&gt; (&#10;                &lt;Box key={i} style={{&#10;                    width: 704, height: 96, marginBottom: i &lt; 4 ? 10 : 0, paddingLeft: 16, paddingRight: 16,&#10;                    background: i === 3 ? 'rgba(47,107,255,0.07)' : PANEL, borderRadius: 6,&#10;                    borderLeft: '4px solid ' + (i === 3 ? BLUE : '#C3CFE2'),&#10;                    flexDirection: 'row', alignItems: 'center', gap: 18,&#10;                }}&gt;&#10;                    &lt;Text style={{ fontFamily: MONO, fontSize: 14, fontWeight: 700, color: i === 3 ? BLUE : DIM, width: 30 }}&gt;{l.no}&lt;/Text&gt;&#10;                    &lt;Box style={{ width: 620 }}&gt;&#10;                        &lt;Text style={{ fontSize: 19, fontWeight: 600, color: INK, lineHeight: 1.35 }}&gt;{l.t}&lt;/Text&gt;&#10;                        &lt;Text style={{ fontSize: 14, color: DIM, lineHeight: 1.5, marginTop: 3 }}&gt;{l.d}&lt;/Text&gt;&#10;                    &lt;/Box&gt;&#10;                &lt;/Box&gt;&#10;            ))}&#10;        &lt;/Box&gt;&#10;&#10;        &lt;Box style={{ width: 396 }}&gt;&#10;            &lt;Text style={{ fontSize: 22, fontWeight: 600, color: INK, lineHeight: 1.45 }}&gt;Prompt and code responsibilities&lt;/Text&gt;&#10;            &lt;Text style={{ fontSize: 16, color: BODY, lineHeight: 1.65, marginTop: 14, width: 396 }}&gt;&#10;                The prompt requires tool evidence for numerical claims. The action library supplies risk levels&#10;                for the action IDs the model selects.&#10;            &lt;/Text&gt;&#10;            &lt;Text style={{ fontSize: 16, color: BODY, lineHeight: 1.65, marginTop: 14, width: 396 }}&gt;&#10;                Code limits available tools and rejects automatic execution above low risk.&#10;                Citation checks remove unknown references from proposed actions.&#10;            &lt;/Text&gt;&#10;            &lt;Box style={{ width: 396, height: 1, background: '#E6EBF3', marginTop: 22, marginBottom: 22 }} /&gt;&#10;            &lt;Text style={{ fontSize: 19, fontWeight: 700, color: INK, lineHeight: 1.5, width: 396 }}&gt;&#10;                Medium and high risk actions require operator approval&#10;            &lt;/Text&gt;&#10;        &lt;/Box&gt;&#10;&#10;    &lt;/Box&gt;&#10;&#10;    &lt;Box style={{ width: 1136, height: 48, flexDirection: 'row', justifyContent: 'space-between', alignItems: 'center' }}&gt;&#10;        &lt;Text style={{ fontSize: 14, color: DIM }}&gt;The app selects each mode's tool list before the model loop starts&lt;/Text&gt;&#10;        &lt;Text style={{ fontFamily: MONO, fontSize: 14, color: DIM }}&gt;13 / 15&lt;/Text&gt;&#10;    &lt;/Box&gt;&#10;&lt;/Slide&gt;&#10;"/>
         <p:cNvGrpSpPr/>
         <p:nvPr/>
       </p:nvGrpSpPr>
@@ -3156,10 +3100,7 @@
         </p:spPr>
         <p:txBody>
           <a:bodyPr/>
-          <a:p>
-            <a:pPr/>
-            <a:endParaRPr/>
-          </a:p>
+          <a:p/>
         </p:txBody>
       </p:sp>
       <p:sp>
@@ -3171,7 +3112,7 @@
         <p:spPr>
           <a:xfrm rot="0" flipH="0" flipV="0">
             <a:off x="685800" y="533400"/>
-            <a:ext cx="3076575" cy="514350"/>
+            <a:ext cx="3705225" cy="514350"/>
           </a:xfrm>
           <a:prstGeom prst="rect"/>
         </p:spPr>
@@ -3191,7 +3132,7 @@
                 <a:latin typeface="Inter"/>
                 <a:ea typeface="Inter"/>
               </a:rPr>
-              <a:t>Five layers, one rule</a:t>
+              <a:t>Application architecture</a:t>
             </a:r>
             <a:endParaRPr/>
           </a:p>
@@ -3255,10 +3196,7 @@
         </p:spPr>
         <p:txBody>
           <a:bodyPr/>
-          <a:p>
-            <a:pPr/>
-            <a:endParaRPr/>
-          </a:p>
+          <a:p/>
         </p:txBody>
       </p:sp>
       <p:sp>
@@ -3315,10 +3253,7 @@
         </p:spPr>
         <p:txBody>
           <a:bodyPr/>
-          <a:p>
-            <a:pPr/>
-            <a:endParaRPr/>
-          </a:p>
+          <a:p/>
         </p:txBody>
       </p:sp>
       <p:sp>
@@ -3420,7 +3355,7 @@
                 <a:latin typeface="Inter"/>
                 <a:ea typeface="Inter"/>
               </a:rPr>
-              <a:t>24 Xid entries · 27 failure signatures · 6 diagnostic principles</a:t>
+              <a:t>24 Xid entries, 27 failure signatures and 6 diagnostic principles</a:t>
             </a:r>
             <a:endParaRPr/>
           </a:p>
@@ -3449,10 +3384,7 @@
         </p:spPr>
         <p:txBody>
           <a:bodyPr/>
-          <a:p>
-            <a:pPr/>
-            <a:endParaRPr/>
-          </a:p>
+          <a:p/>
         </p:txBody>
       </p:sp>
       <p:sp>
@@ -3509,10 +3441,7 @@
         </p:spPr>
         <p:txBody>
           <a:bodyPr/>
-          <a:p>
-            <a:pPr/>
-            <a:endParaRPr/>
-          </a:p>
+          <a:p/>
         </p:txBody>
       </p:sp>
       <p:sp>
@@ -3614,7 +3543,7 @@
                 <a:latin typeface="Inter"/>
                 <a:ea typeface="Inter"/>
               </a:rPr>
-              <a:t>version stack, memory accounting, structured facts — no model involved</a:t>
+              <a:t>Local compatibility checks and memory accounting produce structured facts</a:t>
             </a:r>
             <a:endParaRPr/>
           </a:p>
@@ -3643,10 +3572,7 @@
         </p:spPr>
         <p:txBody>
           <a:bodyPr/>
-          <a:p>
-            <a:pPr/>
-            <a:endParaRPr/>
-          </a:p>
+          <a:p/>
         </p:txBody>
       </p:sp>
       <p:sp>
@@ -3703,10 +3629,7 @@
         </p:spPr>
         <p:txBody>
           <a:bodyPr/>
-          <a:p>
-            <a:pPr/>
-            <a:endParaRPr/>
-          </a:p>
+          <a:p/>
         </p:txBody>
       </p:sp>
       <p:sp>
@@ -3808,7 +3731,7 @@
                 <a:latin typeface="Inter"/>
                 <a:ea typeface="Inter"/>
               </a:rPr>
-              <a:t>10 registered · 6 exposed in single triage · 10 in shift patrol</a:t>
+              <a:t>10 registered tools, with 6 available for cases and all 10 for patrol</a:t>
             </a:r>
             <a:endParaRPr/>
           </a:p>
@@ -3839,10 +3762,7 @@
         </p:spPr>
         <p:txBody>
           <a:bodyPr/>
-          <a:p>
-            <a:pPr/>
-            <a:endParaRPr/>
-          </a:p>
+          <a:p/>
         </p:txBody>
       </p:sp>
       <p:sp>
@@ -3899,10 +3819,7 @@
         </p:spPr>
         <p:txBody>
           <a:bodyPr/>
-          <a:p>
-            <a:pPr/>
-            <a:endParaRPr/>
-          </a:p>
+          <a:p/>
         </p:txBody>
       </p:sp>
       <p:sp>
@@ -3948,7 +3865,7 @@
         </p:nvSpPr>
         <p:spPr>
           <a:xfrm rot="0" flipH="0" flipV="0">
-            <a:off x="1333500" y="4133850"/>
+            <a:off x="1333500" y="4248150"/>
             <a:ext cx="5905500" cy="295275"/>
           </a:xfrm>
           <a:prstGeom prst="rect"/>
@@ -3983,15 +3900,13 @@
         </p:nvSpPr>
         <p:spPr>
           <a:xfrm rot="0" flipH="0" flipV="0">
-            <a:off x="1333500" y="4457700"/>
-            <a:ext cx="5905500" cy="485775"/>
-          </a:xfrm>
-          <a:prstGeom prst="rect"/>
-        </p:spPr>
-        <p:txBody>
-          <a:bodyPr wrap="square" lIns="0" tIns="0" rIns="0" bIns="0">
-            <a:normAutofit/>
-          </a:bodyPr>
+            <a:off x="1333500" y="4572000"/>
+            <a:ext cx="5905500" cy="247650"/>
+          </a:xfrm>
+          <a:prstGeom prst="rect"/>
+        </p:spPr>
+        <p:txBody>
+          <a:bodyPr wrap="none" lIns="0" tIns="0" rIns="0" bIns="0"/>
           <a:p>
             <a:pPr>
               <a:lnSpc>
@@ -4006,7 +3921,7 @@
                 <a:latin typeface="Inter"/>
                 <a:ea typeface="Inter"/>
               </a:rPr>
-              <a:t>Gemini · at most 12 tool turns · calls already made are carried over if the model is swapped mid-shift</a:t>
+              <a:t>Gemini allows up to 12 turns per attempt. Fallback retains completed calls.</a:t>
             </a:r>
             <a:endParaRPr/>
           </a:p>
@@ -4035,10 +3950,7 @@
         </p:spPr>
         <p:txBody>
           <a:bodyPr/>
-          <a:p>
-            <a:pPr/>
-            <a:endParaRPr/>
-          </a:p>
+          <a:p/>
         </p:txBody>
       </p:sp>
       <p:sp>
@@ -4095,10 +4007,7 @@
         </p:spPr>
         <p:txBody>
           <a:bodyPr/>
-          <a:p>
-            <a:pPr/>
-            <a:endParaRPr/>
-          </a:p>
+          <a:p/>
         </p:txBody>
       </p:sp>
       <p:sp>
@@ -4200,7 +4109,7 @@
                 <a:latin typeface="Inter"/>
                 <a:ea typeface="Inter"/>
               </a:rPr>
-              <a:t>low risk only, then the value is re-read and logged</a:t>
+              <a:t>Automatic actions require low risk. The app checks state and records the result.</a:t>
             </a:r>
             <a:endParaRPr/>
           </a:p>
@@ -4235,7 +4144,7 @@
                 <a:latin typeface="Inter"/>
                 <a:ea typeface="Inter"/>
               </a:rPr>
-              <a:t>One rule, enforced twice</a:t>
+              <a:t>Prompt and code responsibilities</a:t>
             </a:r>
             <a:endParaRPr/>
           </a:p>
@@ -4272,7 +4181,7 @@
                 <a:latin typeface="Inter"/>
                 <a:ea typeface="Inter"/>
               </a:rPr>
-              <a:t>Numbers must come from a tool. Risk levels must come from the action library. The model is not allowed to declare either one.</a:t>
+              <a:t>The prompt requires tool evidence for numerical claims. The action library supplies risk levels for the action IDs the model selects.</a:t>
             </a:r>
             <a:endParaRPr/>
           </a:p>
@@ -4309,7 +4218,7 @@
                 <a:latin typeface="Inter"/>
                 <a:ea typeface="Inter"/>
               </a:rPr>
-              <a:t>Both rules are written in the prompt and re-checked in code. The prompt exists so the model understands the system; the code is what makes the rule hold.</a:t>
+              <a:t>Code limits available tools and rejects automatic execution above low risk. Citation checks remove unknown references from proposed actions.</a:t>
             </a:r>
             <a:endParaRPr/>
           </a:p>
@@ -4336,10 +4245,7 @@
         </p:spPr>
         <p:txBody>
           <a:bodyPr/>
-          <a:p>
-            <a:pPr/>
-            <a:endParaRPr/>
-          </a:p>
+          <a:p/>
         </p:txBody>
       </p:sp>
       <p:sp>
@@ -4356,7 +4262,9 @@
           <a:prstGeom prst="rect"/>
         </p:spPr>
         <p:txBody>
-          <a:bodyPr wrap="none" lIns="0" tIns="0" rIns="0" bIns="0"/>
+          <a:bodyPr wrap="square" lIns="0" tIns="0" rIns="0" bIns="0">
+            <a:normAutofit/>
+          </a:bodyPr>
           <a:p>
             <a:pPr>
               <a:lnSpc>
@@ -4371,60 +4279,42 @@
                 <a:latin typeface="Inter"/>
                 <a:ea typeface="Inter"/>
               </a:rPr>
-              <a:t>Prompt rules can be argued with.</a:t>
-            </a:r>
-            <a:endParaRPr/>
-          </a:p>
-          <a:p>
-            <a:pPr>
-              <a:lnSpc>
-                <a:spcPct val="150000"/>
-              </a:lnSpc>
-            </a:pPr>
-            <a:r>
-              <a:rPr lang="en-US" sz="1425" b="1">
-                <a:solidFill>
-                  <a:srgbClr val="0B1220"/>
+              <a:t>Medium and high risk actions require operator approval</a:t>
+            </a:r>
+            <a:endParaRPr/>
+          </a:p>
+        </p:txBody>
+      </p:sp>
+      <p:sp>
+        <p:nvSpPr>
+          <p:cNvPr id="109" name="" descr="{&quot;isTemplate&quot;:true,&quot;type&quot;:&quot;text&quot;}"/>
+          <p:cNvSpPr txBox="1"/>
+          <p:nvPr/>
+        </p:nvSpPr>
+        <p:spPr>
+          <a:xfrm rot="0" flipH="0" flipV="0">
+            <a:off x="685800" y="6381750"/>
+            <a:ext cx="3943350" cy="161925"/>
+          </a:xfrm>
+          <a:prstGeom prst="rect"/>
+        </p:spPr>
+        <p:txBody>
+          <a:bodyPr wrap="none" lIns="0" tIns="0" rIns="0" bIns="0"/>
+          <a:p>
+            <a:pPr>
+              <a:lnSpc>
+                <a:spcPct val="100000"/>
+              </a:lnSpc>
+            </a:pPr>
+            <a:r>
+              <a:rPr lang="en-US" sz="1050">
+                <a:solidFill>
+                  <a:srgbClr val="64748B"/>
                 </a:solidFill>
                 <a:latin typeface="Inter"/>
                 <a:ea typeface="Inter"/>
               </a:rPr>
-              <a:t>Code cannot.</a:t>
-            </a:r>
-            <a:endParaRPr/>
-          </a:p>
-        </p:txBody>
-      </p:sp>
-      <p:sp>
-        <p:nvSpPr>
-          <p:cNvPr id="109" name="" descr="{&quot;isTemplate&quot;:true,&quot;type&quot;:&quot;text&quot;}"/>
-          <p:cNvSpPr txBox="1"/>
-          <p:nvPr/>
-        </p:nvSpPr>
-        <p:spPr>
-          <a:xfrm rot="0" flipH="0" flipV="0">
-            <a:off x="685800" y="6381750"/>
-            <a:ext cx="5076825" cy="161925"/>
-          </a:xfrm>
-          <a:prstGeom prst="rect"/>
-        </p:spPr>
-        <p:txBody>
-          <a:bodyPr wrap="none" lIns="0" tIns="0" rIns="0" bIns="0"/>
-          <a:p>
-            <a:pPr>
-              <a:lnSpc>
-                <a:spcPct val="100000"/>
-              </a:lnSpc>
-            </a:pPr>
-            <a:r>
-              <a:rPr lang="en-US" sz="1050">
-                <a:solidFill>
-                  <a:srgbClr val="64748B"/>
-                </a:solidFill>
-                <a:latin typeface="Inter"/>
-                <a:ea typeface="Inter"/>
-              </a:rPr>
-              <a:t>A mode is a capability boundary: the tool list is cut to the mode before the loop starts</a:t>
+              <a:t>The app selects each mode's tool list before the model loop starts</a:t>
             </a:r>
             <a:endParaRPr/>
           </a:p>
@@ -4459,7 +4349,7 @@
                 <a:latin typeface="JetBrains Mono"/>
                 <a:ea typeface="JetBrains Mono"/>
               </a:rPr>
-              <a:t>13 / 14</a:t>
+              <a:t>13 / 15</a:t>
             </a:r>
             <a:endParaRPr/>
           </a:p>
@@ -4471,11 +4361,11 @@
 </file>
 
 <file path=ppt/slides/slide14.xml><?xml version="1.0" encoding="utf-8"?>
-<p:sld xmlns:asvg="http://schemas.microsoft.com/office/drawing/2016/SVG/main" xmlns:r="http://schemas.openxmlformats.org/officeDocument/2006/relationships" xmlns:p="http://schemas.openxmlformats.org/presentationml/2006/main" xmlns:a="http://schemas.openxmlformats.org/drawingml/2006/main" xmlns:mc="http://schemas.openxmlformats.org/markup-compatibility/2006" mc:Ignorable="asvg">
+<p:sld xmlns:p="http://schemas.openxmlformats.org/presentationml/2006/main" xmlns:a="http://schemas.openxmlformats.org/drawingml/2006/main">
   <p:cSld>
     <p:spTree>
       <p:nvGrpSpPr>
-        <p:cNvPr id="111" name=""/>
+        <p:cNvPr id="111" name="" descr="// 14: implemented evidence tiers and the future non-browser REA option.&#10;const FONT = 'Inter, &quot;Helvetica Neue&quot;, Arial, sans-serif';&#10;const MONO = '&quot;JetBrains Mono&quot;, &quot;SF Mono&quot;, Menlo, monospace';&#10;const INK = '#0B1220';&#10;const BLUE = '#2F6BFF';&#10;const PANEL = '#F1F4FA';&#10;const EDGE = '#C3CFE2';&#10;const DIM = '#64748B';&#10;const BODY = '#1A2434';&#10;&#10;const TIERS = [&#10;    {&#10;        no: '1', key: 'snapshot', t: 'Case evidence snapshot', shipped: true,&#10;        d: 'Constructed telemetry stored with a case for repeatable diagnosis and benchmark scoring.',&#10;    },&#10;    {&#10;        no: '2', key: 'live', t: 'Live read', shipped: true,&#10;        d: 'Current node state from the simulated Firestore cluster, including action results.',&#10;    },&#10;    {&#10;        no: '3', key: 'artifact', t: 'Local artifact inspection', shipped: false,&#10;        d: 'Inspection of local files such as binaries or packet captures requires a separate deployment.',&#10;    },&#10;];&#10;&#10;&lt;Slide style={{ width: 1280, height: 720, padding: '18px 72px', background: '#FFFFFF', fontFamily: FONT }}&gt;&#10;    &lt;Box style={{ width: 1136, height: 92, flexDirection: 'row', justifyContent: 'space-between', alignItems: 'flex-end' }}&gt;&#10;        &lt;Text style={{ fontSize: 34, fontWeight: 700, color: INK, lineHeight: 1.3 }}&gt;Evidence support and REA&lt;/Text&gt;&#10;        &lt;Text style={{ fontFamily: MONO, fontSize: 14, color: DIM, lineHeight: 1.45 }}&gt;3 declared tiers, 2 implemented&lt;/Text&gt;&#10;    &lt;/Box&gt;&#10;&#10;    &lt;Box style={{ width: 1136, height: 544 }}&gt;&#10;&#10;        &lt;Box style={{ width: 1136 }}&gt;&#10;            {TIERS.map((t, i) =&gt; (&#10;                &lt;Box key={i} style={{&#10;                    width: 1136, height: 92, marginBottom: i &lt; 2 ? 12 : 0,&#10;                    paddingLeft: 16, paddingRight: 16, borderRadius: 6,&#10;                    background: t.shipped ? PANEL : '#FFFFFF',&#10;                    borderLeft: '4px solid ' + (t.shipped ? BLUE : EDGE),&#10;                    borderTop: t.shipped ? 'none' : '1px dashed ' + EDGE,&#10;                    borderRight: t.shipped ? 'none' : '1px dashed ' + EDGE,&#10;                    borderBottom: t.shipped ? 'none' : '1px dashed ' + EDGE,&#10;                    flexDirection: 'row', alignItems: 'center', gap: 16,&#10;                }}&gt;&#10;                    &lt;Text style={{ fontFamily: MONO, fontSize: 14, fontWeight: 700, color: t.shipped ? BLUE : DIM, width: 22, lineHeight: 1.6 }}&gt;{t.no}&lt;/Text&gt;&#10;                    &lt;Text style={{ fontFamily: MONO, fontSize: 15, fontWeight: 700, color: t.shipped ? INK : DIM, width: 116, lineHeight: 1.6 }}&gt;{t.key}&lt;/Text&gt;&#10;                    &lt;Box style={{ flex: 1 }}&gt;&#10;                        &lt;Text style={{ fontSize: 17, fontWeight: 600, color: t.shipped ? INK : DIM, lineHeight: 1.35 }}&gt;{t.t}&lt;/Text&gt;&#10;                        &lt;Text style={{ fontSize: 13, color: t.shipped ? DIM : '#94A3B8', lineHeight: 1.5, marginTop: 3 }}&gt;{t.d}&lt;/Text&gt;&#10;                    &lt;/Box&gt;&#10;                    &lt;Text style={{ fontFamily: MONO, fontSize: 12, fontWeight: 700, color: t.shipped ? BLUE : DIM, width: 128, textAlign: 'right', lineHeight: 1.6 }}&gt;&#10;                        {t.shipped ? 'SHIPPED' : 'NO PRODUCER'}&#10;                    &lt;/Text&gt;&#10;                &lt;/Box&gt;&#10;            ))}&#10;        &lt;/Box&gt;&#10;&#10;        &lt;Box style={{ width: 1136, height: 210, flexDirection: 'row', gap: 32, marginTop: 20 }}&gt;&#10;&#10;            &lt;Box style={{ width: 620 }}&gt;&#10;                &lt;Text style={{ fontSize: 18, fontWeight: 600, color: INK, lineHeight: 1.45 }}&gt;Browser deployment boundary&lt;/Text&gt;&#10;                &lt;Text style={{ fontSize: 14, color: BODY, lineHeight: 1.6, marginTop: 8, width: 620 }}&gt;&#10;                    The submitted browser build has no local artifact producer.&#10;                    The artifact tier has implemented set to false. Requests for it raise an error.&#10;                &lt;/Text&gt;&#10;                &lt;Box style={{ marginTop: 12, padding: 12, borderRadius: 6, background: INK, width: 620 }}&gt;&#10;                    &lt;Text style={{ fontFamily: MONO, fontSize: 13, color: '#E2E8F0', lineHeight: 1.7 }}&gt;&#10;                        EVIDENCE_TIERS.artifact.implemented   // false&#10;                        &lt;br /&gt;&#10;                        evidenceTier('artifact')              // throws&#10;                    &lt;/Text&gt;&#10;                &lt;/Box&gt;&#10;            &lt;/Box&gt;&#10;&#10;            &lt;Box style={{ width: 484 }}&gt;&#10;                &lt;Text style={{ fontSize: 18, fontWeight: 600, color: INK, lineHeight: 1.45 }}&gt;Future non-browser option&lt;/Text&gt;&#10;                &lt;Text style={{ fontSize: 14, color: BODY, lineHeight: 1.6, marginTop: 8, width: 484 }}&gt;&#10;                    REA is not included in this build. The browser application produces snapshot and live evidence only.&#10;                &lt;/Text&gt;&#10;                &lt;Text style={{ fontSize: 15, fontWeight: 600, color: BLUE, lineHeight: 1.55, marginTop: 10, width: 484 }}&gt;&#10;                    A future CLI or server deployment could evaluate rea-agents for local artifact inspection.&#10;                &lt;/Text&gt;&#10;            &lt;/Box&gt;&#10;&#10;        &lt;/Box&gt;&#10;&#10;    &lt;/Box&gt;&#10;&#10;    &lt;Box style={{ width: 1136, height: 48, flexDirection: 'row', justifyContent: 'space-between', alignItems: 'center' }}&gt;&#10;        &lt;Text style={{ fontSize: 14, color: DIM }}&gt;REA remains a future option for a non-browser deployment&lt;/Text&gt;&#10;        &lt;Text style={{ fontFamily: MONO, fontSize: 14, color: DIM }}&gt;14 / 15&lt;/Text&gt;&#10;    &lt;/Box&gt;&#10;&lt;/Slide&gt;&#10;"/>
         <p:cNvGrpSpPr/>
         <p:nvPr/>
       </p:nvGrpSpPr>
@@ -4490,6 +4380,1397 @@
       <p:sp>
         <p:nvSpPr>
           <p:cNvPr id="112" name=""/>
+          <p:cNvSpPr/>
+          <p:nvPr/>
+        </p:nvSpPr>
+        <p:spPr>
+          <a:xfrm rot="0" flipH="0" flipV="0">
+            <a:off x="0" y="0"/>
+            <a:ext cx="12192000" cy="6858000"/>
+          </a:xfrm>
+          <a:prstGeom prst="rect">
+            <a:avLst/>
+          </a:prstGeom>
+          <a:solidFill>
+            <a:srgbClr val="FFFFFF"/>
+          </a:solidFill>
+          <a:ln/>
+        </p:spPr>
+        <p:txBody>
+          <a:bodyPr/>
+          <a:p/>
+        </p:txBody>
+      </p:sp>
+      <p:sp>
+        <p:nvSpPr>
+          <p:cNvPr id="113" name="" descr="{&quot;isTemplate&quot;:true,&quot;type&quot;:&quot;text&quot;}"/>
+          <p:cNvSpPr txBox="1"/>
+          <p:nvPr/>
+        </p:nvSpPr>
+        <p:spPr>
+          <a:xfrm rot="0" flipH="0" flipV="0">
+            <a:off x="685800" y="533400"/>
+            <a:ext cx="4124325" cy="514350"/>
+          </a:xfrm>
+          <a:prstGeom prst="rect"/>
+        </p:spPr>
+        <p:txBody>
+          <a:bodyPr wrap="none" lIns="0" tIns="0" rIns="0" bIns="0"/>
+          <a:p>
+            <a:pPr>
+              <a:lnSpc>
+                <a:spcPct val="130000"/>
+              </a:lnSpc>
+            </a:pPr>
+            <a:r>
+              <a:rPr lang="en-US" sz="2550" b="1">
+                <a:solidFill>
+                  <a:srgbClr val="0B1220"/>
+                </a:solidFill>
+                <a:latin typeface="Inter"/>
+                <a:ea typeface="Inter"/>
+              </a:rPr>
+              <a:t>Evidence support and REA</a:t>
+            </a:r>
+            <a:endParaRPr/>
+          </a:p>
+        </p:txBody>
+      </p:sp>
+      <p:sp>
+        <p:nvSpPr>
+          <p:cNvPr id="114" name="" descr="{&quot;isTemplate&quot;:true,&quot;type&quot;:&quot;text&quot;}"/>
+          <p:cNvSpPr txBox="1"/>
+          <p:nvPr/>
+        </p:nvSpPr>
+        <p:spPr>
+          <a:xfrm rot="0" flipH="0" flipV="0">
+            <a:off x="9010650" y="809625"/>
+            <a:ext cx="2495550" cy="238125"/>
+          </a:xfrm>
+          <a:prstGeom prst="rect"/>
+        </p:spPr>
+        <p:txBody>
+          <a:bodyPr wrap="none" lIns="0" tIns="0" rIns="0" bIns="0"/>
+          <a:p>
+            <a:pPr>
+              <a:lnSpc>
+                <a:spcPct val="145000"/>
+              </a:lnSpc>
+            </a:pPr>
+            <a:r>
+              <a:rPr lang="en-US" sz="1050">
+                <a:solidFill>
+                  <a:srgbClr val="64748B"/>
+                </a:solidFill>
+                <a:latin typeface="JetBrains Mono"/>
+                <a:ea typeface="JetBrains Mono"/>
+              </a:rPr>
+              <a:t>3 declared tiers, 2 implemented</a:t>
+            </a:r>
+            <a:endParaRPr/>
+          </a:p>
+        </p:txBody>
+      </p:sp>
+      <p:sp>
+        <p:nvSpPr>
+          <p:cNvPr id="115" name=""/>
+          <p:cNvSpPr/>
+          <p:nvPr/>
+        </p:nvSpPr>
+        <p:spPr>
+          <a:xfrm rot="0" flipH="0" flipV="0">
+            <a:off x="723900" y="1047750"/>
+            <a:ext cx="10782300" cy="876300"/>
+          </a:xfrm>
+          <a:prstGeom prst="roundRect">
+            <a:avLst>
+              <a:gd name="adj" fmla="val 6522"/>
+            </a:avLst>
+          </a:prstGeom>
+          <a:solidFill>
+            <a:srgbClr val="F1F4FA"/>
+          </a:solidFill>
+          <a:ln/>
+        </p:spPr>
+        <p:txBody>
+          <a:bodyPr/>
+          <a:p/>
+        </p:txBody>
+      </p:sp>
+      <p:sp>
+        <p:nvSpPr>
+          <p:cNvPr id="116" name=""/>
+          <p:cNvSpPr/>
+          <p:nvPr/>
+        </p:nvSpPr>
+        <p:spPr>
+          <a:xfrm rot="0" flipH="0" flipV="0">
+            <a:off x="723900" y="1047750"/>
+            <a:ext cx="10782300" cy="876300"/>
+          </a:xfrm>
+          <a:custGeom>
+            <a:pathLst>
+              <a:path w="1132" h="92">
+                <a:moveTo>
+                  <a:pt x="6" y="0"/>
+                </a:moveTo>
+                <a:cubicBezTo>
+                  <a:pt x="5" y="0"/>
+                  <a:pt x="4" y="1"/>
+                  <a:pt x="4" y="2"/>
+                </a:cubicBezTo>
+                <a:lnTo>
+                  <a:pt x="4" y="90"/>
+                </a:lnTo>
+                <a:cubicBezTo>
+                  <a:pt x="4" y="91"/>
+                  <a:pt x="5" y="92"/>
+                  <a:pt x="6" y="92"/>
+                </a:cubicBezTo>
+                <a:cubicBezTo>
+                  <a:pt x="3" y="92"/>
+                  <a:pt x="0" y="89"/>
+                  <a:pt x="0" y="86"/>
+                </a:cubicBezTo>
+                <a:lnTo>
+                  <a:pt x="0" y="6"/>
+                </a:lnTo>
+                <a:cubicBezTo>
+                  <a:pt x="0" y="3"/>
+                  <a:pt x="3" y="0"/>
+                  <a:pt x="6" y="0"/>
+                </a:cubicBezTo>
+                <a:close/>
+              </a:path>
+            </a:pathLst>
+          </a:custGeom>
+          <a:solidFill>
+            <a:srgbClr val="2F6BFF"/>
+          </a:solidFill>
+          <a:ln/>
+        </p:spPr>
+        <p:txBody>
+          <a:bodyPr/>
+          <a:p/>
+        </p:txBody>
+      </p:sp>
+      <p:sp>
+        <p:nvSpPr>
+          <p:cNvPr id="117" name="" descr="{&quot;isTemplate&quot;:true,&quot;type&quot;:&quot;text&quot;}"/>
+          <p:cNvSpPr txBox="1"/>
+          <p:nvPr/>
+        </p:nvSpPr>
+        <p:spPr>
+          <a:xfrm rot="0" flipH="0" flipV="0">
+            <a:off x="876300" y="1362075"/>
+            <a:ext cx="209550" cy="257175"/>
+          </a:xfrm>
+          <a:prstGeom prst="rect"/>
+        </p:spPr>
+        <p:txBody>
+          <a:bodyPr wrap="none" lIns="0" tIns="0" rIns="0" bIns="0"/>
+          <a:p>
+            <a:pPr>
+              <a:lnSpc>
+                <a:spcPct val="160000"/>
+              </a:lnSpc>
+            </a:pPr>
+            <a:r>
+              <a:rPr lang="en-US" sz="1050" b="1">
+                <a:solidFill>
+                  <a:srgbClr val="2F6BFF"/>
+                </a:solidFill>
+                <a:latin typeface="JetBrains Mono"/>
+                <a:ea typeface="JetBrains Mono"/>
+              </a:rPr>
+              <a:t>1</a:t>
+            </a:r>
+            <a:endParaRPr/>
+          </a:p>
+        </p:txBody>
+      </p:sp>
+      <p:sp>
+        <p:nvSpPr>
+          <p:cNvPr id="118" name="" descr="{&quot;isTemplate&quot;:true,&quot;type&quot;:&quot;text&quot;}"/>
+          <p:cNvSpPr txBox="1"/>
+          <p:nvPr/>
+        </p:nvSpPr>
+        <p:spPr>
+          <a:xfrm rot="0" flipH="0" flipV="0">
+            <a:off x="1238250" y="1352550"/>
+            <a:ext cx="1104900" cy="276225"/>
+          </a:xfrm>
+          <a:prstGeom prst="rect"/>
+        </p:spPr>
+        <p:txBody>
+          <a:bodyPr wrap="none" lIns="0" tIns="0" rIns="0" bIns="0"/>
+          <a:p>
+            <a:pPr>
+              <a:lnSpc>
+                <a:spcPct val="160000"/>
+              </a:lnSpc>
+            </a:pPr>
+            <a:r>
+              <a:rPr lang="en-US" sz="1125" b="1">
+                <a:solidFill>
+                  <a:srgbClr val="0B1220"/>
+                </a:solidFill>
+                <a:latin typeface="JetBrains Mono"/>
+                <a:ea typeface="JetBrains Mono"/>
+              </a:rPr>
+              <a:t>snapshot</a:t>
+            </a:r>
+            <a:endParaRPr/>
+          </a:p>
+        </p:txBody>
+      </p:sp>
+      <p:sp>
+        <p:nvSpPr>
+          <p:cNvPr id="119" name="" descr="{&quot;isTemplate&quot;:true,&quot;type&quot;:&quot;text&quot;}"/>
+          <p:cNvSpPr txBox="1"/>
+          <p:nvPr/>
+        </p:nvSpPr>
+        <p:spPr>
+          <a:xfrm rot="0" flipH="0" flipV="0">
+            <a:off x="2495550" y="1228725"/>
+            <a:ext cx="7486650" cy="266700"/>
+          </a:xfrm>
+          <a:prstGeom prst="rect"/>
+        </p:spPr>
+        <p:txBody>
+          <a:bodyPr wrap="none" lIns="0" tIns="0" rIns="0" bIns="0"/>
+          <a:p>
+            <a:pPr>
+              <a:lnSpc>
+                <a:spcPct val="135000"/>
+              </a:lnSpc>
+            </a:pPr>
+            <a:r>
+              <a:rPr lang="en-US" sz="1275" b="1">
+                <a:solidFill>
+                  <a:srgbClr val="0B1220"/>
+                </a:solidFill>
+                <a:latin typeface="Inter"/>
+                <a:ea typeface="Inter"/>
+              </a:rPr>
+              <a:t>Case evidence snapshot</a:t>
+            </a:r>
+            <a:endParaRPr/>
+          </a:p>
+        </p:txBody>
+      </p:sp>
+      <p:sp>
+        <p:nvSpPr>
+          <p:cNvPr id="120" name="" descr="{&quot;isTemplate&quot;:true,&quot;type&quot;:&quot;text&quot;}"/>
+          <p:cNvSpPr txBox="1"/>
+          <p:nvPr/>
+        </p:nvSpPr>
+        <p:spPr>
+          <a:xfrm rot="0" flipH="0" flipV="0">
+            <a:off x="2495550" y="1524000"/>
+            <a:ext cx="7486650" cy="228600"/>
+          </a:xfrm>
+          <a:prstGeom prst="rect"/>
+        </p:spPr>
+        <p:txBody>
+          <a:bodyPr wrap="none" lIns="0" tIns="0" rIns="0" bIns="0"/>
+          <a:p>
+            <a:pPr>
+              <a:lnSpc>
+                <a:spcPct val="150000"/>
+              </a:lnSpc>
+            </a:pPr>
+            <a:r>
+              <a:rPr lang="en-US" sz="975">
+                <a:solidFill>
+                  <a:srgbClr val="64748B"/>
+                </a:solidFill>
+                <a:latin typeface="Inter"/>
+                <a:ea typeface="Inter"/>
+              </a:rPr>
+              <a:t>Constructed telemetry stored with a case for repeatable diagnosis and benchmark scoring.</a:t>
+            </a:r>
+            <a:endParaRPr/>
+          </a:p>
+        </p:txBody>
+      </p:sp>
+      <p:sp>
+        <p:nvSpPr>
+          <p:cNvPr id="121" name="" descr="{&quot;isTemplate&quot;:true,&quot;type&quot;:&quot;text&quot;}"/>
+          <p:cNvSpPr txBox="1"/>
+          <p:nvPr/>
+        </p:nvSpPr>
+        <p:spPr>
+          <a:xfrm rot="0" flipH="0" flipV="0">
+            <a:off x="10134600" y="1371600"/>
+            <a:ext cx="1219200" cy="228600"/>
+          </a:xfrm>
+          <a:prstGeom prst="rect"/>
+        </p:spPr>
+        <p:txBody>
+          <a:bodyPr wrap="none" lIns="0" tIns="0" rIns="0" bIns="0"/>
+          <a:p>
+            <a:pPr algn="r">
+              <a:lnSpc>
+                <a:spcPct val="160000"/>
+              </a:lnSpc>
+            </a:pPr>
+            <a:r>
+              <a:rPr lang="en-US" sz="900" b="1">
+                <a:solidFill>
+                  <a:srgbClr val="2F6BFF"/>
+                </a:solidFill>
+                <a:latin typeface="JetBrains Mono"/>
+                <a:ea typeface="JetBrains Mono"/>
+              </a:rPr>
+              <a:t>SHIPPED</a:t>
+            </a:r>
+            <a:endParaRPr/>
+          </a:p>
+        </p:txBody>
+      </p:sp>
+      <p:sp>
+        <p:nvSpPr>
+          <p:cNvPr id="122" name=""/>
+          <p:cNvSpPr/>
+          <p:nvPr/>
+        </p:nvSpPr>
+        <p:spPr>
+          <a:xfrm rot="0" flipH="0" flipV="0">
+            <a:off x="723900" y="2038350"/>
+            <a:ext cx="10782300" cy="876300"/>
+          </a:xfrm>
+          <a:prstGeom prst="roundRect">
+            <a:avLst>
+              <a:gd name="adj" fmla="val 6522"/>
+            </a:avLst>
+          </a:prstGeom>
+          <a:solidFill>
+            <a:srgbClr val="F1F4FA"/>
+          </a:solidFill>
+          <a:ln/>
+        </p:spPr>
+        <p:txBody>
+          <a:bodyPr/>
+          <a:p/>
+        </p:txBody>
+      </p:sp>
+      <p:sp>
+        <p:nvSpPr>
+          <p:cNvPr id="123" name=""/>
+          <p:cNvSpPr/>
+          <p:nvPr/>
+        </p:nvSpPr>
+        <p:spPr>
+          <a:xfrm rot="0" flipH="0" flipV="0">
+            <a:off x="723900" y="2038350"/>
+            <a:ext cx="10782300" cy="876300"/>
+          </a:xfrm>
+          <a:custGeom>
+            <a:pathLst>
+              <a:path w="1132" h="92">
+                <a:moveTo>
+                  <a:pt x="6" y="0"/>
+                </a:moveTo>
+                <a:cubicBezTo>
+                  <a:pt x="5" y="0"/>
+                  <a:pt x="4" y="1"/>
+                  <a:pt x="4" y="2"/>
+                </a:cubicBezTo>
+                <a:lnTo>
+                  <a:pt x="4" y="90"/>
+                </a:lnTo>
+                <a:cubicBezTo>
+                  <a:pt x="4" y="91"/>
+                  <a:pt x="5" y="92"/>
+                  <a:pt x="6" y="92"/>
+                </a:cubicBezTo>
+                <a:cubicBezTo>
+                  <a:pt x="3" y="92"/>
+                  <a:pt x="0" y="89"/>
+                  <a:pt x="0" y="86"/>
+                </a:cubicBezTo>
+                <a:lnTo>
+                  <a:pt x="0" y="6"/>
+                </a:lnTo>
+                <a:cubicBezTo>
+                  <a:pt x="0" y="3"/>
+                  <a:pt x="3" y="0"/>
+                  <a:pt x="6" y="0"/>
+                </a:cubicBezTo>
+                <a:close/>
+              </a:path>
+            </a:pathLst>
+          </a:custGeom>
+          <a:solidFill>
+            <a:srgbClr val="2F6BFF"/>
+          </a:solidFill>
+          <a:ln/>
+        </p:spPr>
+        <p:txBody>
+          <a:bodyPr/>
+          <a:p/>
+        </p:txBody>
+      </p:sp>
+      <p:sp>
+        <p:nvSpPr>
+          <p:cNvPr id="124" name="" descr="{&quot;isTemplate&quot;:true,&quot;type&quot;:&quot;text&quot;}"/>
+          <p:cNvSpPr txBox="1"/>
+          <p:nvPr/>
+        </p:nvSpPr>
+        <p:spPr>
+          <a:xfrm rot="0" flipH="0" flipV="0">
+            <a:off x="876300" y="2352675"/>
+            <a:ext cx="209550" cy="257175"/>
+          </a:xfrm>
+          <a:prstGeom prst="rect"/>
+        </p:spPr>
+        <p:txBody>
+          <a:bodyPr wrap="none" lIns="0" tIns="0" rIns="0" bIns="0"/>
+          <a:p>
+            <a:pPr>
+              <a:lnSpc>
+                <a:spcPct val="160000"/>
+              </a:lnSpc>
+            </a:pPr>
+            <a:r>
+              <a:rPr lang="en-US" sz="1050" b="1">
+                <a:solidFill>
+                  <a:srgbClr val="2F6BFF"/>
+                </a:solidFill>
+                <a:latin typeface="JetBrains Mono"/>
+                <a:ea typeface="JetBrains Mono"/>
+              </a:rPr>
+              <a:t>2</a:t>
+            </a:r>
+            <a:endParaRPr/>
+          </a:p>
+        </p:txBody>
+      </p:sp>
+      <p:sp>
+        <p:nvSpPr>
+          <p:cNvPr id="125" name="" descr="{&quot;isTemplate&quot;:true,&quot;type&quot;:&quot;text&quot;}"/>
+          <p:cNvSpPr txBox="1"/>
+          <p:nvPr/>
+        </p:nvSpPr>
+        <p:spPr>
+          <a:xfrm rot="0" flipH="0" flipV="0">
+            <a:off x="1238250" y="2343150"/>
+            <a:ext cx="1104900" cy="276225"/>
+          </a:xfrm>
+          <a:prstGeom prst="rect"/>
+        </p:spPr>
+        <p:txBody>
+          <a:bodyPr wrap="none" lIns="0" tIns="0" rIns="0" bIns="0"/>
+          <a:p>
+            <a:pPr>
+              <a:lnSpc>
+                <a:spcPct val="160000"/>
+              </a:lnSpc>
+            </a:pPr>
+            <a:r>
+              <a:rPr lang="en-US" sz="1125" b="1">
+                <a:solidFill>
+                  <a:srgbClr val="0B1220"/>
+                </a:solidFill>
+                <a:latin typeface="JetBrains Mono"/>
+                <a:ea typeface="JetBrains Mono"/>
+              </a:rPr>
+              <a:t>live</a:t>
+            </a:r>
+            <a:endParaRPr/>
+          </a:p>
+        </p:txBody>
+      </p:sp>
+      <p:sp>
+        <p:nvSpPr>
+          <p:cNvPr id="126" name="" descr="{&quot;isTemplate&quot;:true,&quot;type&quot;:&quot;text&quot;}"/>
+          <p:cNvSpPr txBox="1"/>
+          <p:nvPr/>
+        </p:nvSpPr>
+        <p:spPr>
+          <a:xfrm rot="0" flipH="0" flipV="0">
+            <a:off x="2495550" y="2219325"/>
+            <a:ext cx="7486650" cy="266700"/>
+          </a:xfrm>
+          <a:prstGeom prst="rect"/>
+        </p:spPr>
+        <p:txBody>
+          <a:bodyPr wrap="none" lIns="0" tIns="0" rIns="0" bIns="0"/>
+          <a:p>
+            <a:pPr>
+              <a:lnSpc>
+                <a:spcPct val="135000"/>
+              </a:lnSpc>
+            </a:pPr>
+            <a:r>
+              <a:rPr lang="en-US" sz="1275" b="1">
+                <a:solidFill>
+                  <a:srgbClr val="0B1220"/>
+                </a:solidFill>
+                <a:latin typeface="Inter"/>
+                <a:ea typeface="Inter"/>
+              </a:rPr>
+              <a:t>Live read</a:t>
+            </a:r>
+            <a:endParaRPr/>
+          </a:p>
+        </p:txBody>
+      </p:sp>
+      <p:sp>
+        <p:nvSpPr>
+          <p:cNvPr id="127" name="" descr="{&quot;isTemplate&quot;:true,&quot;type&quot;:&quot;text&quot;}"/>
+          <p:cNvSpPr txBox="1"/>
+          <p:nvPr/>
+        </p:nvSpPr>
+        <p:spPr>
+          <a:xfrm rot="0" flipH="0" flipV="0">
+            <a:off x="2495550" y="2514600"/>
+            <a:ext cx="7486650" cy="228600"/>
+          </a:xfrm>
+          <a:prstGeom prst="rect"/>
+        </p:spPr>
+        <p:txBody>
+          <a:bodyPr wrap="none" lIns="0" tIns="0" rIns="0" bIns="0"/>
+          <a:p>
+            <a:pPr>
+              <a:lnSpc>
+                <a:spcPct val="150000"/>
+              </a:lnSpc>
+            </a:pPr>
+            <a:r>
+              <a:rPr lang="en-US" sz="975">
+                <a:solidFill>
+                  <a:srgbClr val="64748B"/>
+                </a:solidFill>
+                <a:latin typeface="Inter"/>
+                <a:ea typeface="Inter"/>
+              </a:rPr>
+              <a:t>Current node state from the simulated Firestore cluster, including action results.</a:t>
+            </a:r>
+            <a:endParaRPr/>
+          </a:p>
+        </p:txBody>
+      </p:sp>
+      <p:sp>
+        <p:nvSpPr>
+          <p:cNvPr id="128" name="" descr="{&quot;isTemplate&quot;:true,&quot;type&quot;:&quot;text&quot;}"/>
+          <p:cNvSpPr txBox="1"/>
+          <p:nvPr/>
+        </p:nvSpPr>
+        <p:spPr>
+          <a:xfrm rot="0" flipH="0" flipV="0">
+            <a:off x="10134600" y="2362200"/>
+            <a:ext cx="1219200" cy="228600"/>
+          </a:xfrm>
+          <a:prstGeom prst="rect"/>
+        </p:spPr>
+        <p:txBody>
+          <a:bodyPr wrap="none" lIns="0" tIns="0" rIns="0" bIns="0"/>
+          <a:p>
+            <a:pPr algn="r">
+              <a:lnSpc>
+                <a:spcPct val="160000"/>
+              </a:lnSpc>
+            </a:pPr>
+            <a:r>
+              <a:rPr lang="en-US" sz="900" b="1">
+                <a:solidFill>
+                  <a:srgbClr val="2F6BFF"/>
+                </a:solidFill>
+                <a:latin typeface="JetBrains Mono"/>
+                <a:ea typeface="JetBrains Mono"/>
+              </a:rPr>
+              <a:t>SHIPPED</a:t>
+            </a:r>
+            <a:endParaRPr/>
+          </a:p>
+        </p:txBody>
+      </p:sp>
+      <p:sp>
+        <p:nvSpPr>
+          <p:cNvPr id="129" name=""/>
+          <p:cNvSpPr/>
+          <p:nvPr/>
+        </p:nvSpPr>
+        <p:spPr>
+          <a:xfrm rot="0" flipH="0" flipV="0">
+            <a:off x="723900" y="3038475"/>
+            <a:ext cx="10772775" cy="857250"/>
+          </a:xfrm>
+          <a:prstGeom prst="roundRect">
+            <a:avLst>
+              <a:gd name="adj" fmla="val 6667"/>
+            </a:avLst>
+          </a:prstGeom>
+          <a:solidFill>
+            <a:srgbClr val="FFFFFF"/>
+          </a:solidFill>
+          <a:ln/>
+        </p:spPr>
+        <p:txBody>
+          <a:bodyPr/>
+          <a:p/>
+        </p:txBody>
+      </p:sp>
+      <p:sp>
+        <p:nvSpPr>
+          <p:cNvPr id="130" name=""/>
+          <p:cNvSpPr/>
+          <p:nvPr/>
+        </p:nvSpPr>
+        <p:spPr>
+          <a:xfrm rot="0" flipH="0" flipV="0">
+            <a:off x="723900" y="3038475"/>
+            <a:ext cx="10772775" cy="857250"/>
+          </a:xfrm>
+          <a:custGeom>
+            <a:pathLst>
+              <a:path w="1131" h="90">
+                <a:moveTo>
+                  <a:pt x="6" y="0"/>
+                </a:moveTo>
+                <a:cubicBezTo>
+                  <a:pt x="5" y="0"/>
+                  <a:pt x="4" y="1"/>
+                  <a:pt x="4" y="2"/>
+                </a:cubicBezTo>
+                <a:lnTo>
+                  <a:pt x="4" y="88"/>
+                </a:lnTo>
+                <a:cubicBezTo>
+                  <a:pt x="4" y="89"/>
+                  <a:pt x="5" y="90"/>
+                  <a:pt x="6" y="90"/>
+                </a:cubicBezTo>
+                <a:cubicBezTo>
+                  <a:pt x="3" y="90"/>
+                  <a:pt x="0" y="87"/>
+                  <a:pt x="0" y="84"/>
+                </a:cubicBezTo>
+                <a:lnTo>
+                  <a:pt x="0" y="6"/>
+                </a:lnTo>
+                <a:cubicBezTo>
+                  <a:pt x="0" y="3"/>
+                  <a:pt x="3" y="0"/>
+                  <a:pt x="6" y="0"/>
+                </a:cubicBezTo>
+                <a:close/>
+              </a:path>
+            </a:pathLst>
+          </a:custGeom>
+          <a:solidFill>
+            <a:srgbClr val="C3CFE2"/>
+          </a:solidFill>
+          <a:ln/>
+        </p:spPr>
+        <p:txBody>
+          <a:bodyPr/>
+          <a:p/>
+        </p:txBody>
+      </p:sp>
+      <p:sp>
+        <p:nvSpPr>
+          <p:cNvPr id="131" name=""/>
+          <p:cNvSpPr/>
+          <p:nvPr/>
+        </p:nvSpPr>
+        <p:spPr>
+          <a:xfrm rot="0" flipH="0" flipV="0">
+            <a:off x="723900" y="3038475"/>
+            <a:ext cx="10772775" cy="857250"/>
+          </a:xfrm>
+          <a:custGeom>
+            <a:pathLst>
+              <a:path w="1131" h="90">
+                <a:moveTo>
+                  <a:pt x="1125" y="90"/>
+                </a:moveTo>
+                <a:cubicBezTo>
+                  <a:pt x="1128" y="90"/>
+                  <a:pt x="1130" y="88"/>
+                  <a:pt x="1130" y="85"/>
+                </a:cubicBezTo>
+                <a:lnTo>
+                  <a:pt x="1130" y="5"/>
+                </a:lnTo>
+                <a:cubicBezTo>
+                  <a:pt x="1130" y="3"/>
+                  <a:pt x="1129" y="1"/>
+                  <a:pt x="1126" y="0"/>
+                </a:cubicBezTo>
+                <a:cubicBezTo>
+                  <a:pt x="1129" y="1"/>
+                  <a:pt x="1131" y="3"/>
+                  <a:pt x="1131" y="6"/>
+                </a:cubicBezTo>
+                <a:lnTo>
+                  <a:pt x="1131" y="84"/>
+                </a:lnTo>
+                <a:cubicBezTo>
+                  <a:pt x="1131" y="87"/>
+                  <a:pt x="1128" y="90"/>
+                  <a:pt x="1125" y="90"/>
+                </a:cubicBezTo>
+                <a:close/>
+              </a:path>
+            </a:pathLst>
+          </a:custGeom>
+          <a:solidFill>
+            <a:srgbClr val="C3CFE2"/>
+          </a:solidFill>
+          <a:ln/>
+        </p:spPr>
+        <p:txBody>
+          <a:bodyPr/>
+          <a:p/>
+        </p:txBody>
+      </p:sp>
+      <p:sp>
+        <p:nvSpPr>
+          <p:cNvPr id="132" name=""/>
+          <p:cNvSpPr/>
+          <p:nvPr/>
+        </p:nvSpPr>
+        <p:spPr>
+          <a:xfrm rot="0" flipH="0" flipV="0">
+            <a:off x="723900" y="3038475"/>
+            <a:ext cx="10772775" cy="857250"/>
+          </a:xfrm>
+          <a:custGeom>
+            <a:pathLst>
+              <a:path w="1131" h="90">
+                <a:moveTo>
+                  <a:pt x="1125" y="0"/>
+                </a:moveTo>
+                <a:cubicBezTo>
+                  <a:pt x="1128" y="0"/>
+                  <a:pt x="1130" y="2"/>
+                  <a:pt x="1131" y="4"/>
+                </a:cubicBezTo>
+                <a:cubicBezTo>
+                  <a:pt x="1130" y="2"/>
+                  <a:pt x="1128" y="1"/>
+                  <a:pt x="1126" y="1"/>
+                </a:cubicBezTo>
+                <a:lnTo>
+                  <a:pt x="5" y="1"/>
+                </a:lnTo>
+                <a:cubicBezTo>
+                  <a:pt x="3" y="1"/>
+                  <a:pt x="1" y="2"/>
+                  <a:pt x="0" y="5"/>
+                </a:cubicBezTo>
+                <a:cubicBezTo>
+                  <a:pt x="1" y="2"/>
+                  <a:pt x="3" y="0"/>
+                  <a:pt x="6" y="0"/>
+                </a:cubicBezTo>
+                <a:lnTo>
+                  <a:pt x="1125" y="0"/>
+                </a:lnTo>
+                <a:close/>
+              </a:path>
+            </a:pathLst>
+          </a:custGeom>
+          <a:solidFill>
+            <a:srgbClr val="C3CFE2"/>
+          </a:solidFill>
+          <a:ln/>
+        </p:spPr>
+        <p:txBody>
+          <a:bodyPr/>
+          <a:p/>
+        </p:txBody>
+      </p:sp>
+      <p:sp>
+        <p:nvSpPr>
+          <p:cNvPr id="133" name=""/>
+          <p:cNvSpPr/>
+          <p:nvPr/>
+        </p:nvSpPr>
+        <p:spPr>
+          <a:xfrm rot="0" flipH="0" flipV="0">
+            <a:off x="723900" y="3038475"/>
+            <a:ext cx="10772775" cy="857250"/>
+          </a:xfrm>
+          <a:custGeom>
+            <a:pathLst>
+              <a:path w="1131" h="90">
+                <a:moveTo>
+                  <a:pt x="0" y="84"/>
+                </a:moveTo>
+                <a:cubicBezTo>
+                  <a:pt x="0" y="87"/>
+                  <a:pt x="2" y="89"/>
+                  <a:pt x="5" y="89"/>
+                </a:cubicBezTo>
+                <a:lnTo>
+                  <a:pt x="1126" y="89"/>
+                </a:lnTo>
+                <a:cubicBezTo>
+                  <a:pt x="1128" y="89"/>
+                  <a:pt x="1130" y="88"/>
+                  <a:pt x="1131" y="85"/>
+                </a:cubicBezTo>
+                <a:cubicBezTo>
+                  <a:pt x="1130" y="88"/>
+                  <a:pt x="1128" y="90"/>
+                  <a:pt x="1125" y="90"/>
+                </a:cubicBezTo>
+                <a:lnTo>
+                  <a:pt x="6" y="90"/>
+                </a:lnTo>
+                <a:cubicBezTo>
+                  <a:pt x="3" y="90"/>
+                  <a:pt x="0" y="87"/>
+                  <a:pt x="0" y="84"/>
+                </a:cubicBezTo>
+                <a:close/>
+              </a:path>
+            </a:pathLst>
+          </a:custGeom>
+          <a:solidFill>
+            <a:srgbClr val="C3CFE2"/>
+          </a:solidFill>
+          <a:ln/>
+        </p:spPr>
+        <p:txBody>
+          <a:bodyPr/>
+          <a:p/>
+        </p:txBody>
+      </p:sp>
+      <p:sp>
+        <p:nvSpPr>
+          <p:cNvPr id="134" name="" descr="{&quot;isTemplate&quot;:true,&quot;type&quot;:&quot;text&quot;}"/>
+          <p:cNvSpPr txBox="1"/>
+          <p:nvPr/>
+        </p:nvSpPr>
+        <p:spPr>
+          <a:xfrm rot="0" flipH="0" flipV="0">
+            <a:off x="876300" y="3343275"/>
+            <a:ext cx="209550" cy="257175"/>
+          </a:xfrm>
+          <a:prstGeom prst="rect"/>
+        </p:spPr>
+        <p:txBody>
+          <a:bodyPr wrap="none" lIns="0" tIns="0" rIns="0" bIns="0"/>
+          <a:p>
+            <a:pPr>
+              <a:lnSpc>
+                <a:spcPct val="160000"/>
+              </a:lnSpc>
+            </a:pPr>
+            <a:r>
+              <a:rPr lang="en-US" sz="1050" b="1">
+                <a:solidFill>
+                  <a:srgbClr val="64748B"/>
+                </a:solidFill>
+                <a:latin typeface="JetBrains Mono"/>
+                <a:ea typeface="JetBrains Mono"/>
+              </a:rPr>
+              <a:t>3</a:t>
+            </a:r>
+            <a:endParaRPr/>
+          </a:p>
+        </p:txBody>
+      </p:sp>
+      <p:sp>
+        <p:nvSpPr>
+          <p:cNvPr id="135" name="" descr="{&quot;isTemplate&quot;:true,&quot;type&quot;:&quot;text&quot;}"/>
+          <p:cNvSpPr txBox="1"/>
+          <p:nvPr/>
+        </p:nvSpPr>
+        <p:spPr>
+          <a:xfrm rot="0" flipH="0" flipV="0">
+            <a:off x="1238250" y="3333750"/>
+            <a:ext cx="1104900" cy="276225"/>
+          </a:xfrm>
+          <a:prstGeom prst="rect"/>
+        </p:spPr>
+        <p:txBody>
+          <a:bodyPr wrap="none" lIns="0" tIns="0" rIns="0" bIns="0"/>
+          <a:p>
+            <a:pPr>
+              <a:lnSpc>
+                <a:spcPct val="160000"/>
+              </a:lnSpc>
+            </a:pPr>
+            <a:r>
+              <a:rPr lang="en-US" sz="1125" b="1">
+                <a:solidFill>
+                  <a:srgbClr val="64748B"/>
+                </a:solidFill>
+                <a:latin typeface="JetBrains Mono"/>
+                <a:ea typeface="JetBrains Mono"/>
+              </a:rPr>
+              <a:t>artifact</a:t>
+            </a:r>
+            <a:endParaRPr/>
+          </a:p>
+        </p:txBody>
+      </p:sp>
+      <p:sp>
+        <p:nvSpPr>
+          <p:cNvPr id="136" name="" descr="{&quot;isTemplate&quot;:true,&quot;type&quot;:&quot;text&quot;}"/>
+          <p:cNvSpPr txBox="1"/>
+          <p:nvPr/>
+        </p:nvSpPr>
+        <p:spPr>
+          <a:xfrm rot="0" flipH="0" flipV="0">
+            <a:off x="2495550" y="3209925"/>
+            <a:ext cx="7477125" cy="266700"/>
+          </a:xfrm>
+          <a:prstGeom prst="rect"/>
+        </p:spPr>
+        <p:txBody>
+          <a:bodyPr wrap="none" lIns="0" tIns="0" rIns="0" bIns="0"/>
+          <a:p>
+            <a:pPr>
+              <a:lnSpc>
+                <a:spcPct val="135000"/>
+              </a:lnSpc>
+            </a:pPr>
+            <a:r>
+              <a:rPr lang="en-US" sz="1275" b="1">
+                <a:solidFill>
+                  <a:srgbClr val="64748B"/>
+                </a:solidFill>
+                <a:latin typeface="Inter"/>
+                <a:ea typeface="Inter"/>
+              </a:rPr>
+              <a:t>Local artifact inspection</a:t>
+            </a:r>
+            <a:endParaRPr/>
+          </a:p>
+        </p:txBody>
+      </p:sp>
+      <p:sp>
+        <p:nvSpPr>
+          <p:cNvPr id="137" name="" descr="{&quot;isTemplate&quot;:true,&quot;type&quot;:&quot;text&quot;}"/>
+          <p:cNvSpPr txBox="1"/>
+          <p:nvPr/>
+        </p:nvSpPr>
+        <p:spPr>
+          <a:xfrm rot="0" flipH="0" flipV="0">
+            <a:off x="2495550" y="3505200"/>
+            <a:ext cx="7477125" cy="228600"/>
+          </a:xfrm>
+          <a:prstGeom prst="rect"/>
+        </p:spPr>
+        <p:txBody>
+          <a:bodyPr wrap="none" lIns="0" tIns="0" rIns="0" bIns="0"/>
+          <a:p>
+            <a:pPr>
+              <a:lnSpc>
+                <a:spcPct val="150000"/>
+              </a:lnSpc>
+            </a:pPr>
+            <a:r>
+              <a:rPr lang="en-US" sz="975">
+                <a:solidFill>
+                  <a:srgbClr val="94A3B8"/>
+                </a:solidFill>
+                <a:latin typeface="Inter"/>
+                <a:ea typeface="Inter"/>
+              </a:rPr>
+              <a:t>Inspection of local files such as binaries or packet captures requires a separate deployment.</a:t>
+            </a:r>
+            <a:endParaRPr/>
+          </a:p>
+        </p:txBody>
+      </p:sp>
+      <p:sp>
+        <p:nvSpPr>
+          <p:cNvPr id="138" name="" descr="{&quot;isTemplate&quot;:true,&quot;type&quot;:&quot;text&quot;}"/>
+          <p:cNvSpPr txBox="1"/>
+          <p:nvPr/>
+        </p:nvSpPr>
+        <p:spPr>
+          <a:xfrm rot="0" flipH="0" flipV="0">
+            <a:off x="10125075" y="3352800"/>
+            <a:ext cx="1219200" cy="228600"/>
+          </a:xfrm>
+          <a:prstGeom prst="rect"/>
+        </p:spPr>
+        <p:txBody>
+          <a:bodyPr wrap="none" lIns="0" tIns="0" rIns="0" bIns="0"/>
+          <a:p>
+            <a:pPr algn="r">
+              <a:lnSpc>
+                <a:spcPct val="160000"/>
+              </a:lnSpc>
+            </a:pPr>
+            <a:r>
+              <a:rPr lang="en-US" sz="900" b="1">
+                <a:solidFill>
+                  <a:srgbClr val="64748B"/>
+                </a:solidFill>
+                <a:latin typeface="JetBrains Mono"/>
+                <a:ea typeface="JetBrains Mono"/>
+              </a:rPr>
+              <a:t>NO PRODUCER</a:t>
+            </a:r>
+            <a:endParaRPr/>
+          </a:p>
+        </p:txBody>
+      </p:sp>
+      <p:sp>
+        <p:nvSpPr>
+          <p:cNvPr id="139" name="" descr="{&quot;isTemplate&quot;:true,&quot;type&quot;:&quot;text&quot;}"/>
+          <p:cNvSpPr txBox="1"/>
+          <p:nvPr/>
+        </p:nvSpPr>
+        <p:spPr>
+          <a:xfrm rot="0" flipH="0" flipV="0">
+            <a:off x="685800" y="4095750"/>
+            <a:ext cx="5905500" cy="304800"/>
+          </a:xfrm>
+          <a:prstGeom prst="rect"/>
+        </p:spPr>
+        <p:txBody>
+          <a:bodyPr wrap="none" lIns="0" tIns="0" rIns="0" bIns="0"/>
+          <a:p>
+            <a:pPr>
+              <a:lnSpc>
+                <a:spcPct val="145000"/>
+              </a:lnSpc>
+            </a:pPr>
+            <a:r>
+              <a:rPr lang="en-US" sz="1350" b="1">
+                <a:solidFill>
+                  <a:srgbClr val="0B1220"/>
+                </a:solidFill>
+                <a:latin typeface="Inter"/>
+                <a:ea typeface="Inter"/>
+              </a:rPr>
+              <a:t>Browser deployment boundary</a:t>
+            </a:r>
+            <a:endParaRPr/>
+          </a:p>
+        </p:txBody>
+      </p:sp>
+      <p:sp>
+        <p:nvSpPr>
+          <p:cNvPr id="140" name="" descr="{&quot;isTemplate&quot;:true,&quot;type&quot;:&quot;text&quot;}"/>
+          <p:cNvSpPr txBox="1"/>
+          <p:nvPr/>
+        </p:nvSpPr>
+        <p:spPr>
+          <a:xfrm rot="0" flipH="0" flipV="0">
+            <a:off x="685800" y="4476750"/>
+            <a:ext cx="5905500" cy="514350"/>
+          </a:xfrm>
+          <a:prstGeom prst="rect"/>
+        </p:spPr>
+        <p:txBody>
+          <a:bodyPr wrap="square" lIns="0" tIns="0" rIns="0" bIns="0">
+            <a:normAutofit/>
+          </a:bodyPr>
+          <a:p>
+            <a:pPr>
+              <a:lnSpc>
+                <a:spcPct val="160000"/>
+              </a:lnSpc>
+            </a:pPr>
+            <a:r>
+              <a:rPr lang="en-US" sz="1050">
+                <a:solidFill>
+                  <a:srgbClr val="1A2434"/>
+                </a:solidFill>
+                <a:latin typeface="Inter"/>
+                <a:ea typeface="Inter"/>
+              </a:rPr>
+              <a:t>The submitted browser build has no local artifact producer. The artifact tier has implemented set to false. Requests for it raise an error.</a:t>
+            </a:r>
+            <a:endParaRPr/>
+          </a:p>
+        </p:txBody>
+      </p:sp>
+      <p:sp>
+        <p:nvSpPr>
+          <p:cNvPr id="141" name=""/>
+          <p:cNvSpPr/>
+          <p:nvPr/>
+        </p:nvSpPr>
+        <p:spPr>
+          <a:xfrm rot="0" flipH="0" flipV="0">
+            <a:off x="685800" y="5105400"/>
+            <a:ext cx="5905500" cy="742950"/>
+          </a:xfrm>
+          <a:prstGeom prst="roundRect">
+            <a:avLst>
+              <a:gd name="adj" fmla="val 7692"/>
+            </a:avLst>
+          </a:prstGeom>
+          <a:solidFill>
+            <a:srgbClr val="0B1220"/>
+          </a:solidFill>
+          <a:ln/>
+        </p:spPr>
+        <p:txBody>
+          <a:bodyPr/>
+          <a:p/>
+        </p:txBody>
+      </p:sp>
+      <p:sp>
+        <p:nvSpPr>
+          <p:cNvPr id="142" name="" descr="{&quot;isTemplate&quot;:true,&quot;type&quot;:&quot;text&quot;}"/>
+          <p:cNvSpPr txBox="1"/>
+          <p:nvPr/>
+        </p:nvSpPr>
+        <p:spPr>
+          <a:xfrm rot="0" flipH="0" flipV="0">
+            <a:off x="800100" y="5219700"/>
+            <a:ext cx="5676900" cy="514350"/>
+          </a:xfrm>
+          <a:prstGeom prst="rect"/>
+        </p:spPr>
+        <p:txBody>
+          <a:bodyPr wrap="none" lIns="0" tIns="0" rIns="0" bIns="0"/>
+          <a:p>
+            <a:pPr>
+              <a:lnSpc>
+                <a:spcPct val="170000"/>
+              </a:lnSpc>
+            </a:pPr>
+            <a:r>
+              <a:rPr lang="en-US" sz="975">
+                <a:solidFill>
+                  <a:srgbClr val="E2E8F0"/>
+                </a:solidFill>
+                <a:latin typeface="JetBrains Mono"/>
+                <a:ea typeface="JetBrains Mono"/>
+              </a:rPr>
+              <a:t>EVIDENCE_TIERS.artifact.implemented   // false</a:t>
+            </a:r>
+            <a:endParaRPr/>
+          </a:p>
+          <a:p>
+            <a:pPr>
+              <a:lnSpc>
+                <a:spcPct val="170000"/>
+              </a:lnSpc>
+            </a:pPr>
+            <a:r>
+              <a:rPr lang="en-US" sz="975">
+                <a:solidFill>
+                  <a:srgbClr val="E2E8F0"/>
+                </a:solidFill>
+                <a:latin typeface="JetBrains Mono"/>
+                <a:ea typeface="JetBrains Mono"/>
+              </a:rPr>
+              <a:t>evidenceTier('artifact')              // throws</a:t>
+            </a:r>
+            <a:endParaRPr/>
+          </a:p>
+        </p:txBody>
+      </p:sp>
+      <p:sp>
+        <p:nvSpPr>
+          <p:cNvPr id="143" name="" descr="{&quot;isTemplate&quot;:true,&quot;type&quot;:&quot;text&quot;}"/>
+          <p:cNvSpPr txBox="1"/>
+          <p:nvPr/>
+        </p:nvSpPr>
+        <p:spPr>
+          <a:xfrm rot="0" flipH="0" flipV="0">
+            <a:off x="6896100" y="4095750"/>
+            <a:ext cx="4610100" cy="304800"/>
+          </a:xfrm>
+          <a:prstGeom prst="rect"/>
+        </p:spPr>
+        <p:txBody>
+          <a:bodyPr wrap="none" lIns="0" tIns="0" rIns="0" bIns="0"/>
+          <a:p>
+            <a:pPr>
+              <a:lnSpc>
+                <a:spcPct val="145000"/>
+              </a:lnSpc>
+            </a:pPr>
+            <a:r>
+              <a:rPr lang="en-US" sz="1350" b="1">
+                <a:solidFill>
+                  <a:srgbClr val="0B1220"/>
+                </a:solidFill>
+                <a:latin typeface="Inter"/>
+                <a:ea typeface="Inter"/>
+              </a:rPr>
+              <a:t>Future non-browser option</a:t>
+            </a:r>
+            <a:endParaRPr/>
+          </a:p>
+        </p:txBody>
+      </p:sp>
+      <p:sp>
+        <p:nvSpPr>
+          <p:cNvPr id="144" name="" descr="{&quot;isTemplate&quot;:true,&quot;type&quot;:&quot;text&quot;}"/>
+          <p:cNvSpPr txBox="1"/>
+          <p:nvPr/>
+        </p:nvSpPr>
+        <p:spPr>
+          <a:xfrm rot="0" flipH="0" flipV="0">
+            <a:off x="6896100" y="4476750"/>
+            <a:ext cx="4610100" cy="514350"/>
+          </a:xfrm>
+          <a:prstGeom prst="rect"/>
+        </p:spPr>
+        <p:txBody>
+          <a:bodyPr wrap="square" lIns="0" tIns="0" rIns="0" bIns="0">
+            <a:normAutofit/>
+          </a:bodyPr>
+          <a:p>
+            <a:pPr>
+              <a:lnSpc>
+                <a:spcPct val="160000"/>
+              </a:lnSpc>
+            </a:pPr>
+            <a:r>
+              <a:rPr lang="en-US" sz="1050">
+                <a:solidFill>
+                  <a:srgbClr val="1A2434"/>
+                </a:solidFill>
+                <a:latin typeface="Inter"/>
+                <a:ea typeface="Inter"/>
+              </a:rPr>
+              <a:t>REA is not included in this build. The browser application produces snapshot and live evidence only.</a:t>
+            </a:r>
+            <a:endParaRPr/>
+          </a:p>
+        </p:txBody>
+      </p:sp>
+      <p:sp>
+        <p:nvSpPr>
+          <p:cNvPr id="145" name="" descr="{&quot;isTemplate&quot;:true,&quot;type&quot;:&quot;text&quot;}"/>
+          <p:cNvSpPr txBox="1"/>
+          <p:nvPr/>
+        </p:nvSpPr>
+        <p:spPr>
+          <a:xfrm rot="0" flipH="0" flipV="0">
+            <a:off x="6896100" y="5086350"/>
+            <a:ext cx="4610100" cy="533400"/>
+          </a:xfrm>
+          <a:prstGeom prst="rect"/>
+        </p:spPr>
+        <p:txBody>
+          <a:bodyPr wrap="square" lIns="0" tIns="0" rIns="0" bIns="0">
+            <a:normAutofit/>
+          </a:bodyPr>
+          <a:p>
+            <a:pPr>
+              <a:lnSpc>
+                <a:spcPct val="155000"/>
+              </a:lnSpc>
+            </a:pPr>
+            <a:r>
+              <a:rPr lang="en-US" sz="1125" b="1">
+                <a:solidFill>
+                  <a:srgbClr val="2F6BFF"/>
+                </a:solidFill>
+                <a:latin typeface="Inter"/>
+                <a:ea typeface="Inter"/>
+              </a:rPr>
+              <a:t>A future CLI or server deployment could evaluate rea-agents for local artifact inspection.</a:t>
+            </a:r>
+            <a:endParaRPr/>
+          </a:p>
+        </p:txBody>
+      </p:sp>
+      <p:sp>
+        <p:nvSpPr>
+          <p:cNvPr id="146" name="" descr="{&quot;isTemplate&quot;:true,&quot;type&quot;:&quot;text&quot;}"/>
+          <p:cNvSpPr txBox="1"/>
+          <p:nvPr/>
+        </p:nvSpPr>
+        <p:spPr>
+          <a:xfrm rot="0" flipH="0" flipV="0">
+            <a:off x="685800" y="6381750"/>
+            <a:ext cx="3514725" cy="161925"/>
+          </a:xfrm>
+          <a:prstGeom prst="rect"/>
+        </p:spPr>
+        <p:txBody>
+          <a:bodyPr wrap="none" lIns="0" tIns="0" rIns="0" bIns="0"/>
+          <a:p>
+            <a:pPr>
+              <a:lnSpc>
+                <a:spcPct val="100000"/>
+              </a:lnSpc>
+            </a:pPr>
+            <a:r>
+              <a:rPr lang="en-US" sz="1050">
+                <a:solidFill>
+                  <a:srgbClr val="64748B"/>
+                </a:solidFill>
+                <a:latin typeface="Inter"/>
+                <a:ea typeface="Inter"/>
+              </a:rPr>
+              <a:t>REA remains a future option for a non-browser deployment</a:t>
+            </a:r>
+            <a:endParaRPr/>
+          </a:p>
+        </p:txBody>
+      </p:sp>
+      <p:sp>
+        <p:nvSpPr>
+          <p:cNvPr id="147" name="" descr="{&quot;isTemplate&quot;:true,&quot;type&quot;:&quot;text&quot;}"/>
+          <p:cNvSpPr txBox="1"/>
+          <p:nvPr/>
+        </p:nvSpPr>
+        <p:spPr>
+          <a:xfrm rot="0" flipH="0" flipV="0">
+            <a:off x="10934700" y="6381750"/>
+            <a:ext cx="571500" cy="161925"/>
+          </a:xfrm>
+          <a:prstGeom prst="rect"/>
+        </p:spPr>
+        <p:txBody>
+          <a:bodyPr wrap="none" lIns="0" tIns="0" rIns="0" bIns="0"/>
+          <a:p>
+            <a:pPr>
+              <a:lnSpc>
+                <a:spcPct val="100000"/>
+              </a:lnSpc>
+            </a:pPr>
+            <a:r>
+              <a:rPr lang="en-US" sz="1050">
+                <a:solidFill>
+                  <a:srgbClr val="64748B"/>
+                </a:solidFill>
+                <a:latin typeface="JetBrains Mono"/>
+                <a:ea typeface="JetBrains Mono"/>
+              </a:rPr>
+              <a:t>14 / 15</a:t>
+            </a:r>
+            <a:endParaRPr/>
+          </a:p>
+        </p:txBody>
+      </p:sp>
+    </p:spTree>
+  </p:cSld>
+</p:sld>
+</file>
+
+<file path=ppt/slides/slide15.xml><?xml version="1.0" encoding="utf-8"?>
+<p:sld xmlns:asvg="http://schemas.microsoft.com/office/drawing/2016/SVG/main" xmlns:r="http://schemas.openxmlformats.org/officeDocument/2006/relationships" xmlns:p="http://schemas.openxmlformats.org/presentationml/2006/main" xmlns:a="http://schemas.openxmlformats.org/drawingml/2006/main" xmlns:mc="http://schemas.openxmlformats.org/markup-compatibility/2006" mc:Ignorable="asvg">
+  <p:cSld>
+    <p:spTree>
+      <p:nvGrpSpPr>
+        <p:cNvPr id="148" name="" descr="// 15: demo URL and verification references.&#10;const FONT = 'Inter, &quot;Helvetica Neue&quot;, Arial, sans-serif';&#10;const MONO = '&quot;JetBrains Mono&quot;, &quot;SF Mono&quot;, Menlo, monospace';&#10;const BLUE = '#2F6BFF';&#10;const DEEP = 'linear-gradient(160deg, #0B1220 0%, #131E33 62%, #0B1220 100%)';&#10;&#10;const GRID_X = [0, 71, 142, 213, 284, 355, 426, 497, 568, 639, 710, 781, 852, 923, 994, 1065, 1136];&#10;const GRID_Y = [0, 64, 128, 192, 256, 320, 384, 448, 512, 576];&#10;&#10;const CHECKS = [&#10;    { k: 'verify_triage.mjs', v: 'rule baseline and result invariants' },&#10;    { k: 'verify_pipeline.mjs', v: '81 / 81, scripted transport and in-memory cluster' },&#10;    { k: 'browser_check.mjs', v: '31 / 31 in the earlier recorded browser check' },&#10;];&#10;&#10;&lt;Slide style={{ width: 1280, height: 720, padding: '72px', background: DEEP, fontFamily: FONT }}&gt;&#10;    &lt;Box style={{ position: 'relative', width: 1136, height: 576 }}&gt;&#10;&#10;        &lt;Box style={{ position: 'absolute', left: 0, top: 0, width: 1136, height: 576 }}&gt;&#10;            &lt;svg width={1136} height={576} viewBox='0 0 1136 576'&gt;&#10;                {GRID_X.map((x, i) =&gt; (&#10;                    &lt;line key={'gx' + i} x1={x} y1={0} x2={x} y2={576} stroke='rgba(255,255,255,0.045)' strokeWidth={1} /&gt;&#10;                ))}&#10;                {GRID_Y.map((y, i) =&gt; (&#10;                    &lt;line key={'gy' + i} x1={0} y1={y} x2={1136} y2={y} stroke='rgba(255,255,255,0.045)' strokeWidth={1} /&gt;&#10;                ))}&#10;            &lt;/svg&gt;&#10;        &lt;/Box&gt;&#10;&#10;        &lt;Box style={{ position: 'relative', width: 1136, height: 576, alignItems: 'center', justifyContent: 'center', gap: 20 }}&gt;&#10;&#10;            &lt;Text style={{ fontFamily: MONO, fontSize: 14, color: BLUE, letterSpacing: 3 }}&gt;AI BUILDER CUP 2026, JAPAC&lt;/Text&gt;&#10;&#10;            &lt;Text style={{ fontSize: 52, fontWeight: 600, color: '#FFFFFF', lineHeight: 1.25, textAlign: 'center', width: 1000 }}&gt;&#10;                Demo and verification&#10;            &lt;/Text&gt;&#10;&#10;            &lt;Text style={{ fontSize: 20, color: '#94A3B8', lineHeight: 1.6, textAlign: 'center', width: 880 }}&gt;&#10;                The browser demo uses simulated cluster state. Offline scripts reproduce the rule score and&#10;                exercise tool execution, fallback and approval boundaries.&#10;            &lt;/Text&gt;&#10;&#10;            &lt;Box style={{ width: 96, height: 3, background: 'rgba(255,255,255,0.3)', marginTop: 10, marginBottom: 6 }} /&gt;&#10;&#10;            &lt;Box style={{ flexDirection: 'row', gap: 34, alignItems: 'flex-start' }}&gt;&#10;                &lt;Box style={{ gap: 6 }}&gt;&#10;                    &lt;Text style={{ fontFamily: MONO, fontSize: 13, color: 'rgba(255,255,255,0.5)', lineHeight: 1.5 }}&gt;live demo&lt;/Text&gt;&#10;                    &lt;Text style={{ fontFamily: MONO, fontSize: 15, color: '#FFFFFF', lineHeight: 1.5 }}&gt;gpu-waste-auditor-2026.web.app&lt;/Text&gt;&#10;                &lt;/Box&gt;&#10;                &lt;Box style={{ width: 1, height: 74, background: 'rgba(255,255,255,0.16)' }} /&gt;&#10;                &lt;Box style={{ gap: 6 }}&gt;&#10;                    &lt;Text style={{ fontFamily: MONO, fontSize: 13, color: 'rgba(255,255,255,0.5)', lineHeight: 1.5 }}&gt;verification scripts&lt;/Text&gt;&#10;                    {CHECKS.map((c, i) =&gt; (&#10;                        &lt;Text key={i} style={{ fontFamily: MONO, fontSize: 14, color: '#C7D2E0', lineHeight: 1.55 }}&gt;&#10;                            {c.k}  &lt;span style={{ color: 'rgba(255,255,255,0.5)' }}&gt;{c.v}&lt;/span&gt;&#10;                        &lt;/Text&gt;&#10;                    ))}&#10;                &lt;/Box&gt;&#10;            &lt;/Box&gt;&#10;&#10;        &lt;/Box&gt;&#10;&#10;        &lt;Box style={{ position: 'absolute', left: 0, bottom: 0, width: 1136, flexDirection: 'row', justifyContent: 'space-between', alignItems: 'center' }}&gt;&#10;            &lt;Text style={{ fontSize: 14, color: 'rgba(255,255,255,0.45)' }}&gt;Training Failure Triage, AI Builder Cup 2026&lt;/Text&gt;&#10;            &lt;Text style={{ fontFamily: MONO, fontSize: 14, color: 'rgba(255,255,255,0.45)' }}&gt;15 / 15&lt;/Text&gt;&#10;        &lt;/Box&gt;&#10;&#10;    &lt;/Box&gt;&#10;&lt;/Slide&gt;&#10;"/>
+        <p:cNvGrpSpPr/>
+        <p:nvPr/>
+      </p:nvGrpSpPr>
+      <p:grpSpPr>
+        <a:xfrm>
+          <a:off x="0" y="0"/>
+          <a:ext cx="0" cy="0"/>
+          <a:chOff x="0" y="0"/>
+          <a:chExt cx="0" cy="0"/>
+        </a:xfrm>
+      </p:grpSpPr>
+      <p:sp>
+        <p:nvSpPr>
+          <p:cNvPr id="149" name=""/>
           <p:cNvSpPr/>
           <p:nvPr/>
         </p:nvSpPr>
@@ -4519,15 +5800,12 @@
         </p:spPr>
         <p:txBody>
           <a:bodyPr/>
-          <a:p>
-            <a:pPr/>
-            <a:endParaRPr/>
-          </a:p>
+          <a:p/>
         </p:txBody>
       </p:sp>
       <p:pic>
         <p:nvPicPr>
-          <p:cNvPr id="113" name=""/>
+          <p:cNvPr id="150" name=""/>
           <p:cNvPicPr>
             <a:picLocks noChangeAspect="1"/>
           </p:cNvPicPr>
@@ -4558,14 +5836,14 @@
       </p:pic>
       <p:sp>
         <p:nvSpPr>
-          <p:cNvPr id="114" name="" descr="{&quot;isTemplate&quot;:true,&quot;type&quot;:&quot;text&quot;}"/>
-          <p:cNvSpPr txBox="1"/>
-          <p:nvPr/>
-        </p:nvSpPr>
-        <p:spPr>
-          <a:xfrm rot="0" flipH="0" flipV="0">
-            <a:off x="4629150" y="1552575"/>
-            <a:ext cx="2943225" cy="161925"/>
+          <p:cNvPr id="151" name="" descr="{&quot;isTemplate&quot;:true,&quot;type&quot;:&quot;text&quot;}"/>
+          <p:cNvSpPr txBox="1"/>
+          <p:nvPr/>
+        </p:nvSpPr>
+        <p:spPr>
+          <a:xfrm rot="0" flipH="0" flipV="0">
+            <a:off x="4676775" y="1552575"/>
+            <a:ext cx="2838450" cy="161925"/>
           </a:xfrm>
           <a:prstGeom prst="rect"/>
         </p:spPr>
@@ -4585,15 +5863,15 @@
                 <a:latin typeface="JetBrains Mono"/>
                 <a:ea typeface="JetBrains Mono"/>
               </a:rPr>
-              <a:t>AI BUILDER CUP 2026 · JAPAC</a:t>
-            </a:r>
-            <a:endParaRPr/>
-          </a:p>
-        </p:txBody>
-      </p:sp>
-      <p:sp>
-        <p:nvSpPr>
-          <p:cNvPr id="115" name="" descr="{&quot;isTemplate&quot;:true,&quot;type&quot;:&quot;text&quot;}"/>
+              <a:t>AI BUILDER CUP 2026, JAPAC</a:t>
+            </a:r>
+            <a:endParaRPr/>
+          </a:p>
+        </p:txBody>
+      </p:sp>
+      <p:sp>
+        <p:nvSpPr>
+          <p:cNvPr id="152" name="" descr="{&quot;isTemplate&quot;:true,&quot;type&quot;:&quot;text&quot;}"/>
           <p:cNvSpPr txBox="1"/>
           <p:nvPr/>
         </p:nvSpPr>
@@ -4620,15 +5898,15 @@
                 <a:latin typeface="Inter"/>
                 <a:ea typeface="Inter"/>
               </a:rPr>
-              <a:t>Acted on, not just recommended</a:t>
-            </a:r>
-            <a:endParaRPr/>
-          </a:p>
-        </p:txBody>
-      </p:sp>
-      <p:sp>
-        <p:nvSpPr>
-          <p:cNvPr id="116" name="" descr="{&quot;isTemplate&quot;:true,&quot;type&quot;:&quot;text&quot;}"/>
+              <a:t>Demo and verification</a:t>
+            </a:r>
+            <a:endParaRPr/>
+          </a:p>
+        </p:txBody>
+      </p:sp>
+      <p:sp>
+        <p:nvSpPr>
+          <p:cNvPr id="153" name="" descr="{&quot;isTemplate&quot;:true,&quot;type&quot;:&quot;text&quot;}"/>
           <p:cNvSpPr txBox="1"/>
           <p:nvPr/>
         </p:nvSpPr>
@@ -4657,15 +5935,15 @@
                 <a:latin typeface="Inter"/>
                 <a:ea typeface="Inter"/>
               </a:rPr>
-              <a:t>The demo run ends with a verdict, an operation log entry, and a read-back that proves the write landed.</a:t>
-            </a:r>
-            <a:endParaRPr/>
-          </a:p>
-        </p:txBody>
-      </p:sp>
-      <p:sp>
-        <p:nvSpPr>
-          <p:cNvPr id="117" name=""/>
+              <a:t>The browser demo uses simulated cluster state. Offline scripts reproduce the rule score and exercise tool execution, fallback and approval boundaries.</a:t>
+            </a:r>
+            <a:endParaRPr/>
+          </a:p>
+        </p:txBody>
+      </p:sp>
+      <p:sp>
+        <p:nvSpPr>
+          <p:cNvPr id="154" name=""/>
           <p:cNvSpPr/>
           <p:nvPr/>
         </p:nvSpPr>
@@ -4686,21 +5964,18 @@
         </p:spPr>
         <p:txBody>
           <a:bodyPr/>
-          <a:p>
-            <a:pPr/>
-            <a:endParaRPr/>
-          </a:p>
-        </p:txBody>
-      </p:sp>
-      <p:sp>
-        <p:nvSpPr>
-          <p:cNvPr id="118" name="" descr="{&quot;isTemplate&quot;:true,&quot;type&quot;:&quot;text&quot;}"/>
-          <p:cNvSpPr txBox="1"/>
-          <p:nvPr/>
-        </p:nvSpPr>
-        <p:spPr>
-          <a:xfrm rot="0" flipH="0" flipV="0">
-            <a:off x="1828800" y="4133850"/>
+          <a:p/>
+        </p:txBody>
+      </p:sp>
+      <p:sp>
+        <p:nvSpPr>
+          <p:cNvPr id="155" name="" descr="{&quot;isTemplate&quot;:true,&quot;type&quot;:&quot;text&quot;}"/>
+          <p:cNvSpPr txBox="1"/>
+          <p:nvPr/>
+        </p:nvSpPr>
+        <p:spPr>
+          <a:xfrm rot="0" flipH="0" flipV="0">
+            <a:off x="1666875" y="4133850"/>
             <a:ext cx="2581275" cy="228600"/>
           </a:xfrm>
           <a:prstGeom prst="rect"/>
@@ -4731,13 +6006,13 @@
       </p:sp>
       <p:sp>
         <p:nvSpPr>
-          <p:cNvPr id="119" name="" descr="{&quot;isTemplate&quot;:true,&quot;type&quot;:&quot;text&quot;}"/>
-          <p:cNvSpPr txBox="1"/>
-          <p:nvPr/>
-        </p:nvSpPr>
-        <p:spPr>
-          <a:xfrm rot="0" flipH="0" flipV="0">
-            <a:off x="1828800" y="4419600"/>
+          <p:cNvPr id="156" name="" descr="{&quot;isTemplate&quot;:true,&quot;type&quot;:&quot;text&quot;}"/>
+          <p:cNvSpPr txBox="1"/>
+          <p:nvPr/>
+        </p:nvSpPr>
+        <p:spPr>
+          <a:xfrm rot="0" flipH="0" flipV="0">
+            <a:off x="1666875" y="4419600"/>
             <a:ext cx="2581275" cy="257175"/>
           </a:xfrm>
           <a:prstGeom prst="rect"/>
@@ -4766,13 +6041,13 @@
       </p:sp>
       <p:sp>
         <p:nvSpPr>
-          <p:cNvPr id="120" name=""/>
+          <p:cNvPr id="157" name=""/>
           <p:cNvSpPr/>
           <p:nvPr/>
         </p:nvSpPr>
         <p:spPr>
           <a:xfrm rot="0" flipH="0" flipV="0">
-            <a:off x="4733925" y="4133850"/>
+            <a:off x="4572000" y="4133850"/>
             <a:ext cx="9525" cy="704850"/>
           </a:xfrm>
           <a:prstGeom prst="rect">
@@ -4787,22 +6062,19 @@
         </p:spPr>
         <p:txBody>
           <a:bodyPr/>
-          <a:p>
-            <a:pPr/>
-            <a:endParaRPr/>
-          </a:p>
-        </p:txBody>
-      </p:sp>
-      <p:sp>
-        <p:nvSpPr>
-          <p:cNvPr id="121" name="" descr="{&quot;isTemplate&quot;:true,&quot;type&quot;:&quot;text&quot;}"/>
-          <p:cNvSpPr txBox="1"/>
-          <p:nvPr/>
-        </p:nvSpPr>
-        <p:spPr>
-          <a:xfrm rot="0" flipH="0" flipV="0">
-            <a:off x="5067300" y="4133850"/>
-            <a:ext cx="5305425" cy="228600"/>
+          <a:p/>
+        </p:txBody>
+      </p:sp>
+      <p:sp>
+        <p:nvSpPr>
+          <p:cNvPr id="158" name="" descr="{&quot;isTemplate&quot;:true,&quot;type&quot;:&quot;text&quot;}"/>
+          <p:cNvSpPr txBox="1"/>
+          <p:nvPr/>
+        </p:nvSpPr>
+        <p:spPr>
+          <a:xfrm rot="0" flipH="0" flipV="0">
+            <a:off x="4905375" y="4133850"/>
+            <a:ext cx="5629275" cy="228600"/>
           </a:xfrm>
           <a:prstGeom prst="rect"/>
         </p:spPr>
@@ -4824,22 +6096,22 @@
                 <a:latin typeface="JetBrains Mono"/>
                 <a:ea typeface="JetBrains Mono"/>
               </a:rPr>
-              <a:t>rerun the numbers</a:t>
-            </a:r>
-            <a:endParaRPr/>
-          </a:p>
-        </p:txBody>
-      </p:sp>
-      <p:sp>
-        <p:nvSpPr>
-          <p:cNvPr id="122" name="" descr="{&quot;isTemplate&quot;:true,&quot;type&quot;:&quot;text&quot;}"/>
-          <p:cNvSpPr txBox="1"/>
-          <p:nvPr/>
-        </p:nvSpPr>
-        <p:spPr>
-          <a:xfrm rot="0" flipH="0" flipV="0">
-            <a:off x="5067300" y="4419600"/>
-            <a:ext cx="5305425" cy="257175"/>
+              <a:t>verification scripts</a:t>
+            </a:r>
+            <a:endParaRPr/>
+          </a:p>
+        </p:txBody>
+      </p:sp>
+      <p:sp>
+        <p:nvSpPr>
+          <p:cNvPr id="159" name="" descr="{&quot;isTemplate&quot;:true,&quot;type&quot;:&quot;text&quot;}"/>
+          <p:cNvSpPr txBox="1"/>
+          <p:nvPr/>
+        </p:nvSpPr>
+        <p:spPr>
+          <a:xfrm rot="0" flipH="0" flipV="0">
+            <a:off x="4905375" y="4419600"/>
+            <a:ext cx="5629275" cy="257175"/>
           </a:xfrm>
           <a:prstGeom prst="rect"/>
         </p:spPr>
@@ -4889,14 +6161,14 @@
       </p:sp>
       <p:sp>
         <p:nvSpPr>
-          <p:cNvPr id="123" name="" descr="{&quot;isTemplate&quot;:true,&quot;type&quot;:&quot;text&quot;}"/>
-          <p:cNvSpPr txBox="1"/>
-          <p:nvPr/>
-        </p:nvSpPr>
-        <p:spPr>
-          <a:xfrm rot="0" flipH="0" flipV="0">
-            <a:off x="5067300" y="4733925"/>
-            <a:ext cx="5305425" cy="257175"/>
+          <p:cNvPr id="160" name="" descr="{&quot;isTemplate&quot;:true,&quot;type&quot;:&quot;text&quot;}"/>
+          <p:cNvSpPr txBox="1"/>
+          <p:nvPr/>
+        </p:nvSpPr>
+        <p:spPr>
+          <a:xfrm rot="0" flipH="0" flipV="0">
+            <a:off x="4905375" y="4733925"/>
+            <a:ext cx="5629275" cy="257175"/>
           </a:xfrm>
           <a:prstGeom prst="rect"/>
         </p:spPr>
@@ -4938,22 +6210,22 @@
                 <a:latin typeface="JetBrains Mono"/>
                 <a:ea typeface="JetBrains Mono"/>
               </a:rPr>
-              <a:t>81 / 81, fake transport and in-memory cluster</a:t>
-            </a:r>
-            <a:endParaRPr/>
-          </a:p>
-        </p:txBody>
-      </p:sp>
-      <p:sp>
-        <p:nvSpPr>
-          <p:cNvPr id="124" name="" descr="{&quot;isTemplate&quot;:true,&quot;type&quot;:&quot;text&quot;}"/>
-          <p:cNvSpPr txBox="1"/>
-          <p:nvPr/>
-        </p:nvSpPr>
-        <p:spPr>
-          <a:xfrm rot="0" flipH="0" flipV="0">
-            <a:off x="5067300" y="5048250"/>
-            <a:ext cx="5305425" cy="257175"/>
+              <a:t>81 / 81, scripted transport and in-memory cluster</a:t>
+            </a:r>
+            <a:endParaRPr/>
+          </a:p>
+        </p:txBody>
+      </p:sp>
+      <p:sp>
+        <p:nvSpPr>
+          <p:cNvPr id="161" name="" descr="{&quot;isTemplate&quot;:true,&quot;type&quot;:&quot;text&quot;}"/>
+          <p:cNvSpPr txBox="1"/>
+          <p:nvPr/>
+        </p:nvSpPr>
+        <p:spPr>
+          <a:xfrm rot="0" flipH="0" flipV="0">
+            <a:off x="4905375" y="5048250"/>
+            <a:ext cx="5629275" cy="257175"/>
           </a:xfrm>
           <a:prstGeom prst="rect"/>
         </p:spPr>
@@ -4995,22 +6267,22 @@
                 <a:latin typeface="JetBrains Mono"/>
                 <a:ea typeface="JetBrains Mono"/>
               </a:rPr>
-              <a:t>31 / 31, real Chrome against real Firestore</a:t>
-            </a:r>
-            <a:endParaRPr/>
-          </a:p>
-        </p:txBody>
-      </p:sp>
-      <p:sp>
-        <p:nvSpPr>
-          <p:cNvPr id="125" name="" descr="{&quot;isTemplate&quot;:true,&quot;type&quot;:&quot;text&quot;}"/>
+              <a:t>31 / 31 in the earlier recorded browser check</a:t>
+            </a:r>
+            <a:endParaRPr/>
+          </a:p>
+        </p:txBody>
+      </p:sp>
+      <p:sp>
+        <p:nvSpPr>
+          <p:cNvPr id="162" name="" descr="{&quot;isTemplate&quot;:true,&quot;type&quot;:&quot;text&quot;}"/>
           <p:cNvSpPr txBox="1"/>
           <p:nvPr/>
         </p:nvSpPr>
         <p:spPr>
           <a:xfrm rot="0" flipH="0" flipV="0">
             <a:off x="685800" y="6010275"/>
-            <a:ext cx="2609850" cy="161925"/>
+            <a:ext cx="2571750" cy="161925"/>
           </a:xfrm>
           <a:prstGeom prst="rect"/>
         </p:spPr>
@@ -5032,15 +6304,15 @@
                 <a:latin typeface="Inter"/>
                 <a:ea typeface="Inter"/>
               </a:rPr>
-              <a:t>Training Failure Triage · AI Builder Cup 2026</a:t>
-            </a:r>
-            <a:endParaRPr/>
-          </a:p>
-        </p:txBody>
-      </p:sp>
-      <p:sp>
-        <p:nvSpPr>
-          <p:cNvPr id="126" name="" descr="{&quot;isTemplate&quot;:true,&quot;type&quot;:&quot;text&quot;}"/>
+              <a:t>Training Failure Triage, AI Builder Cup 2026</a:t>
+            </a:r>
+            <a:endParaRPr/>
+          </a:p>
+        </p:txBody>
+      </p:sp>
+      <p:sp>
+        <p:nvSpPr>
+          <p:cNvPr id="163" name="" descr="{&quot;isTemplate&quot;:true,&quot;type&quot;:&quot;text&quot;}"/>
           <p:cNvSpPr txBox="1"/>
           <p:nvPr/>
         </p:nvSpPr>
@@ -5069,7 +6341,7 @@
                 <a:latin typeface="JetBrains Mono"/>
                 <a:ea typeface="JetBrains Mono"/>
               </a:rPr>
-              <a:t>14 / 14</a:t>
+              <a:t>15 / 15</a:t>
             </a:r>
             <a:endParaRPr/>
           </a:p>
@@ -5085,7 +6357,7 @@
   <p:cSld>
     <p:spTree>
       <p:nvGrpSpPr>
-        <p:cNvPr id="127" name=""/>
+        <p:cNvPr id="164" name="" descr="// 02: overview with three chapter rows.&#10;const FONT = 'Inter, &quot;Helvetica Neue&quot;, Arial, sans-serif';&#10;const MONO = '&quot;JetBrains Mono&quot;, &quot;SF Mono&quot;, Menlo, monospace';&#10;const INK = '#0B1220';&#10;const BLUE = '#2F6BFF';&#10;const DIM = '#64748B';&#10;&#10;const CHAPTERS = [&#10;    { no: '01', title: 'The problem', desc: 'Hardware escalation depends on error frequency and ECC trends', range: '03 - 05' },&#10;    { no: '02', title: 'Application workflow', desc: 'Cluster inspection and action approval with state verification', range: '06 - 10' },&#10;    { no: '03', title: 'Evidence and limits', desc: 'Rule baseline of 11/14 and the unsupported artifact tier', range: '11 - 15' },&#10;];&#10;&#10;&lt;Slide style={{ width: 1280, height: 720, padding: '18px 72px', background: '#FFFFFF', fontFamily: FONT }}&gt;&#10;    &lt;Box style={{ width: 1136, height: 92, flexDirection: 'row', justifyContent: 'space-between', alignItems: 'flex-end' }}&gt;&#10;        &lt;Text style={{ fontSize: 34, fontWeight: 700, color: INK, lineHeight: 1.3 }}&gt;Submission overview&lt;/Text&gt;&#10;        &lt;Text style={{ fontFamily: MONO, fontSize: 14, color: DIM, lineHeight: 1.45 }}&gt;Roadmap&lt;/Text&gt;&#10;    &lt;/Box&gt;&#10;&#10;    &lt;Box style={{ width: 1136, height: 544, flexDirection: 'row', gap: 40 }}&gt;&#10;        &lt;Box style={{ width: 340, justifyContent: 'flex-start', gap: 18 }}&gt;&#10;            &lt;Box style={{ width: 3, height: 62, background: BLUE }} /&gt;&#10;            &lt;Text style={{ fontSize: 22, fontWeight: 600, color: INK, lineHeight: 1.5 }}&gt;&#10;                Training failure diagnosis and controlled actions&#10;            &lt;/Text&gt;&#10;            &lt;Text style={{ fontSize: 16, color: DIM, lineHeight: 1.6 }}&gt;&#10;                The deck covers the Xid 94 contrast, the browser application, and a reproducible rule benchmark.&#10;                Historical patrol measurements describe individual runs.&#10;            &lt;/Text&gt;&#10;            &lt;Text style={{ fontFamily: MONO, fontSize: 14, color: DIM, lineHeight: 1.6, marginTop: 6 }}&gt;&#10;                Six simulated nodes. Human approval for medium and high risk actions.&#10;            &lt;/Text&gt;&#10;        &lt;/Box&gt;&#10;&#10;        &lt;Box style={{ width: 756 }}&gt;&#10;            {CHAPTERS.map((c, i) =&gt; (&#10;                &lt;Box key={i} style={{&#10;                    width: 756, height: 180, flexDirection: 'row', alignItems: 'center', gap: 24,&#10;                    borderBottom: i &lt; 2 ? '1px solid #E6EBF3' : 'none',&#10;                }}&gt;&#10;                    &lt;Text style={{ fontFamily: MONO, fontSize: 40, fontWeight: 700, color: BLUE, width: 74 }}&gt;{c.no}&lt;/Text&gt;&#10;                    &lt;Box style={{ flex: 1 }}&gt;&#10;                        &lt;Text style={{ fontSize: 26, fontWeight: 600, color: INK, lineHeight: 1.4 }}&gt;{c.title}&lt;/Text&gt;&#10;                        &lt;Text style={{ fontSize: 15, color: DIM, lineHeight: 1.55, marginTop: 4 }}&gt;{c.desc}&lt;/Text&gt;&#10;                    &lt;/Box&gt;&#10;                    &lt;Text style={{ fontFamily: MONO, fontSize: 14, color: DIM }}&gt;{c.range}&lt;/Text&gt;&#10;                &lt;/Box&gt;&#10;            ))}&#10;        &lt;/Box&gt;&#10;    &lt;/Box&gt;&#10;&#10;    &lt;Box style={{ width: 1136, height: 48, flexDirection: 'row', justifyContent: 'space-between', alignItems: 'center' }}&gt;&#10;        &lt;Text style={{ fontSize: 14, color: DIM }}&gt;Training Failure Triage, AI Builder Cup 2026&lt;/Text&gt;&#10;        &lt;Text style={{ fontFamily: MONO, fontSize: 14, color: DIM }}&gt;02 / 15&lt;/Text&gt;&#10;    &lt;/Box&gt;&#10;&lt;/Slide&gt;&#10;"/>
         <p:cNvGrpSpPr/>
         <p:nvPr/>
       </p:nvGrpSpPr>
@@ -5099,7 +6371,7 @@
       </p:grpSpPr>
       <p:sp>
         <p:nvSpPr>
-          <p:cNvPr id="128" name=""/>
+          <p:cNvPr id="165" name=""/>
           <p:cNvSpPr/>
           <p:nvPr/>
         </p:nvSpPr>
@@ -5118,22 +6390,19 @@
         </p:spPr>
         <p:txBody>
           <a:bodyPr/>
-          <a:p>
-            <a:pPr/>
-            <a:endParaRPr/>
-          </a:p>
-        </p:txBody>
-      </p:sp>
-      <p:sp>
-        <p:nvSpPr>
-          <p:cNvPr id="129" name="" descr="{&quot;isTemplate&quot;:true,&quot;type&quot;:&quot;text&quot;}"/>
+          <a:p/>
+        </p:txBody>
+      </p:sp>
+      <p:sp>
+        <p:nvSpPr>
+          <p:cNvPr id="166" name="" descr="{&quot;isTemplate&quot;:true,&quot;type&quot;:&quot;text&quot;}"/>
           <p:cNvSpPr txBox="1"/>
           <p:nvPr/>
         </p:nvSpPr>
         <p:spPr>
           <a:xfrm rot="0" flipH="0" flipV="0">
             <a:off x="685800" y="533400"/>
-            <a:ext cx="2333625" cy="514350"/>
+            <a:ext cx="3276600" cy="514350"/>
           </a:xfrm>
           <a:prstGeom prst="rect"/>
         </p:spPr>
@@ -5153,15 +6422,15 @@
                 <a:latin typeface="Inter"/>
                 <a:ea typeface="Inter"/>
               </a:rPr>
-              <a:t>Three chapters</a:t>
-            </a:r>
-            <a:endParaRPr/>
-          </a:p>
-        </p:txBody>
-      </p:sp>
-      <p:sp>
-        <p:nvSpPr>
-          <p:cNvPr id="130" name="" descr="{&quot;isTemplate&quot;:true,&quot;type&quot;:&quot;text&quot;}"/>
+              <a:t>Submission overview</a:t>
+            </a:r>
+            <a:endParaRPr/>
+          </a:p>
+        </p:txBody>
+      </p:sp>
+      <p:sp>
+        <p:nvSpPr>
+          <p:cNvPr id="167" name="" descr="{&quot;isTemplate&quot;:true,&quot;type&quot;:&quot;text&quot;}"/>
           <p:cNvSpPr txBox="1"/>
           <p:nvPr/>
         </p:nvSpPr>
@@ -5196,7 +6465,7 @@
       </p:sp>
       <p:sp>
         <p:nvSpPr>
-          <p:cNvPr id="131" name=""/>
+          <p:cNvPr id="168" name=""/>
           <p:cNvSpPr/>
           <p:nvPr/>
         </p:nvSpPr>
@@ -5215,15 +6484,12 @@
         </p:spPr>
         <p:txBody>
           <a:bodyPr/>
-          <a:p>
-            <a:pPr/>
-            <a:endParaRPr/>
-          </a:p>
-        </p:txBody>
-      </p:sp>
-      <p:sp>
-        <p:nvSpPr>
-          <p:cNvPr id="132" name="" descr="{&quot;isTemplate&quot;:true,&quot;type&quot;:&quot;text&quot;}"/>
+          <a:p/>
+        </p:txBody>
+      </p:sp>
+      <p:sp>
+        <p:nvSpPr>
+          <p:cNvPr id="169" name="" descr="{&quot;isTemplate&quot;:true,&quot;type&quot;:&quot;text&quot;}"/>
           <p:cNvSpPr txBox="1"/>
           <p:nvPr/>
         </p:nvSpPr>
@@ -5252,15 +6518,15 @@
                 <a:latin typeface="Inter"/>
                 <a:ea typeface="Inter"/>
               </a:rPr>
-              <a:t>Each chapter ends on a number you can rerun.</a:t>
-            </a:r>
-            <a:endParaRPr/>
-          </a:p>
-        </p:txBody>
-      </p:sp>
-      <p:sp>
-        <p:nvSpPr>
-          <p:cNvPr id="133" name="" descr="{&quot;isTemplate&quot;:true,&quot;type&quot;:&quot;text&quot;}"/>
+              <a:t>Training failure diagnosis and controlled actions</a:t>
+            </a:r>
+            <a:endParaRPr/>
+          </a:p>
+        </p:txBody>
+      </p:sp>
+      <p:sp>
+        <p:nvSpPr>
+          <p:cNvPr id="170" name="" descr="{&quot;isTemplate&quot;:true,&quot;type&quot;:&quot;text&quot;}"/>
           <p:cNvSpPr txBox="1"/>
           <p:nvPr/>
         </p:nvSpPr>
@@ -5289,15 +6555,15 @@
                 <a:latin typeface="Inter"/>
                 <a:ea typeface="Inter"/>
               </a:rPr>
-              <a:t>A benchmark score, a tool-call count, an operation log. Where a number was never measured, the page shows a blank instead of a plausible value.</a:t>
-            </a:r>
-            <a:endParaRPr/>
-          </a:p>
-        </p:txBody>
-      </p:sp>
-      <p:sp>
-        <p:nvSpPr>
-          <p:cNvPr id="134" name="" descr="{&quot;isTemplate&quot;:true,&quot;type&quot;:&quot;text&quot;}"/>
+              <a:t>The deck covers the Xid 94 contrast, the browser application, and a reproducible rule benchmark. Historical patrol measurements describe individual runs.</a:t>
+            </a:r>
+            <a:endParaRPr/>
+          </a:p>
+        </p:txBody>
+      </p:sp>
+      <p:sp>
+        <p:nvSpPr>
+          <p:cNvPr id="171" name="" descr="{&quot;isTemplate&quot;:true,&quot;type&quot;:&quot;text&quot;}"/>
           <p:cNvSpPr txBox="1"/>
           <p:nvPr/>
         </p:nvSpPr>
@@ -5326,15 +6592,15 @@
                 <a:latin typeface="JetBrains Mono"/>
                 <a:ea typeface="JetBrains Mono"/>
               </a:rPr>
-              <a:t>detect → collect evidence → diagnose &amp; plan → act, notify, verify</a:t>
-            </a:r>
-            <a:endParaRPr/>
-          </a:p>
-        </p:txBody>
-      </p:sp>
-      <p:sp>
-        <p:nvSpPr>
-          <p:cNvPr id="135" name=""/>
+              <a:t>Six simulated nodes. Human approval for medium and high risk actions.</a:t>
+            </a:r>
+            <a:endParaRPr/>
+          </a:p>
+        </p:txBody>
+      </p:sp>
+      <p:sp>
+        <p:nvSpPr>
+          <p:cNvPr id="172" name=""/>
           <p:cNvSpPr/>
           <p:nvPr/>
         </p:nvSpPr>
@@ -5369,15 +6635,12 @@
         </p:spPr>
         <p:txBody>
           <a:bodyPr/>
-          <a:p>
-            <a:pPr/>
-            <a:endParaRPr/>
-          </a:p>
-        </p:txBody>
-      </p:sp>
-      <p:sp>
-        <p:nvSpPr>
-          <p:cNvPr id="136" name="" descr="{&quot;isTemplate&quot;:true,&quot;type&quot;:&quot;text&quot;}"/>
+          <a:p/>
+        </p:txBody>
+      </p:sp>
+      <p:sp>
+        <p:nvSpPr>
+          <p:cNvPr id="173" name="" descr="{&quot;isTemplate&quot;:true,&quot;type&quot;:&quot;text&quot;}"/>
           <p:cNvSpPr txBox="1"/>
           <p:nvPr/>
         </p:nvSpPr>
@@ -5412,7 +6675,7 @@
       </p:sp>
       <p:sp>
         <p:nvSpPr>
-          <p:cNvPr id="137" name="" descr="{&quot;isTemplate&quot;:true,&quot;type&quot;:&quot;text&quot;}"/>
+          <p:cNvPr id="174" name="" descr="{&quot;isTemplate&quot;:true,&quot;type&quot;:&quot;text&quot;}"/>
           <p:cNvSpPr txBox="1"/>
           <p:nvPr/>
         </p:nvSpPr>
@@ -5447,7 +6710,7 @@
       </p:sp>
       <p:sp>
         <p:nvSpPr>
-          <p:cNvPr id="138" name="" descr="{&quot;isTemplate&quot;:true,&quot;type&quot;:&quot;text&quot;}"/>
+          <p:cNvPr id="175" name="" descr="{&quot;isTemplate&quot;:true,&quot;type&quot;:&quot;text&quot;}"/>
           <p:cNvSpPr txBox="1"/>
           <p:nvPr/>
         </p:nvSpPr>
@@ -5474,15 +6737,15 @@
                 <a:latin typeface="Inter"/>
                 <a:ea typeface="Inter"/>
               </a:rPr>
-              <a:t>One error code, two opposite readings, both expensive</a:t>
-            </a:r>
-            <a:endParaRPr/>
-          </a:p>
-        </p:txBody>
-      </p:sp>
-      <p:sp>
-        <p:nvSpPr>
-          <p:cNvPr id="139" name="" descr="{&quot;isTemplate&quot;:true,&quot;type&quot;:&quot;text&quot;}"/>
+              <a:t>Hardware escalation depends on error frequency and ECC trends</a:t>
+            </a:r>
+            <a:endParaRPr/>
+          </a:p>
+        </p:txBody>
+      </p:sp>
+      <p:sp>
+        <p:nvSpPr>
+          <p:cNvPr id="176" name="" descr="{&quot;isTemplate&quot;:true,&quot;type&quot;:&quot;text&quot;}"/>
           <p:cNvSpPr txBox="1"/>
           <p:nvPr/>
         </p:nvSpPr>
@@ -5509,15 +6772,15 @@
                 <a:latin typeface="JetBrains Mono"/>
                 <a:ea typeface="JetBrains Mono"/>
               </a:rPr>
-              <a:t>03 – 05</a:t>
-            </a:r>
-            <a:endParaRPr/>
-          </a:p>
-        </p:txBody>
-      </p:sp>
-      <p:sp>
-        <p:nvSpPr>
-          <p:cNvPr id="140" name=""/>
+              <a:t>03 - 05</a:t>
+            </a:r>
+            <a:endParaRPr/>
+          </a:p>
+        </p:txBody>
+      </p:sp>
+      <p:sp>
+        <p:nvSpPr>
+          <p:cNvPr id="177" name=""/>
           <p:cNvSpPr/>
           <p:nvPr/>
         </p:nvSpPr>
@@ -5552,15 +6815,12 @@
         </p:spPr>
         <p:txBody>
           <a:bodyPr/>
-          <a:p>
-            <a:pPr/>
-            <a:endParaRPr/>
-          </a:p>
-        </p:txBody>
-      </p:sp>
-      <p:sp>
-        <p:nvSpPr>
-          <p:cNvPr id="141" name="" descr="{&quot;isTemplate&quot;:true,&quot;type&quot;:&quot;text&quot;}"/>
+          <a:p/>
+        </p:txBody>
+      </p:sp>
+      <p:sp>
+        <p:nvSpPr>
+          <p:cNvPr id="178" name="" descr="{&quot;isTemplate&quot;:true,&quot;type&quot;:&quot;text&quot;}"/>
           <p:cNvSpPr txBox="1"/>
           <p:nvPr/>
         </p:nvSpPr>
@@ -5595,7 +6855,7 @@
       </p:sp>
       <p:sp>
         <p:nvSpPr>
-          <p:cNvPr id="142" name="" descr="{&quot;isTemplate&quot;:true,&quot;type&quot;:&quot;text&quot;}"/>
+          <p:cNvPr id="179" name="" descr="{&quot;isTemplate&quot;:true,&quot;type&quot;:&quot;text&quot;}"/>
           <p:cNvSpPr txBox="1"/>
           <p:nvPr/>
         </p:nvSpPr>
@@ -5622,15 +6882,15 @@
                 <a:latin typeface="Inter"/>
                 <a:ea typeface="Inter"/>
               </a:rPr>
-              <a:t>What we built</a:t>
-            </a:r>
-            <a:endParaRPr/>
-          </a:p>
-        </p:txBody>
-      </p:sp>
-      <p:sp>
-        <p:nvSpPr>
-          <p:cNvPr id="143" name="" descr="{&quot;isTemplate&quot;:true,&quot;type&quot;:&quot;text&quot;}"/>
+              <a:t>Application workflow</a:t>
+            </a:r>
+            <a:endParaRPr/>
+          </a:p>
+        </p:txBody>
+      </p:sp>
+      <p:sp>
+        <p:nvSpPr>
+          <p:cNvPr id="180" name="" descr="{&quot;isTemplate&quot;:true,&quot;type&quot;:&quot;text&quot;}"/>
           <p:cNvSpPr txBox="1"/>
           <p:nvPr/>
         </p:nvSpPr>
@@ -5657,15 +6917,15 @@
                 <a:latin typeface="Inter"/>
                 <a:ea typeface="Inter"/>
               </a:rPr>
-              <a:t>The agent reads the cluster, decides, acts, then reads back</a:t>
-            </a:r>
-            <a:endParaRPr/>
-          </a:p>
-        </p:txBody>
-      </p:sp>
-      <p:sp>
-        <p:nvSpPr>
-          <p:cNvPr id="144" name="" descr="{&quot;isTemplate&quot;:true,&quot;type&quot;:&quot;text&quot;}"/>
+              <a:t>Cluster inspection and action approval with state verification</a:t>
+            </a:r>
+            <a:endParaRPr/>
+          </a:p>
+        </p:txBody>
+      </p:sp>
+      <p:sp>
+        <p:nvSpPr>
+          <p:cNvPr id="181" name="" descr="{&quot;isTemplate&quot;:true,&quot;type&quot;:&quot;text&quot;}"/>
           <p:cNvSpPr txBox="1"/>
           <p:nvPr/>
         </p:nvSpPr>
@@ -5692,15 +6952,15 @@
                 <a:latin typeface="JetBrains Mono"/>
                 <a:ea typeface="JetBrains Mono"/>
               </a:rPr>
-              <a:t>06 – 10</a:t>
-            </a:r>
-            <a:endParaRPr/>
-          </a:p>
-        </p:txBody>
-      </p:sp>
-      <p:sp>
-        <p:nvSpPr>
-          <p:cNvPr id="145" name="" descr="{&quot;isTemplate&quot;:true,&quot;type&quot;:&quot;text&quot;}"/>
+              <a:t>06 - 10</a:t>
+            </a:r>
+            <a:endParaRPr/>
+          </a:p>
+        </p:txBody>
+      </p:sp>
+      <p:sp>
+        <p:nvSpPr>
+          <p:cNvPr id="182" name="" descr="{&quot;isTemplate&quot;:true,&quot;type&quot;:&quot;text&quot;}"/>
           <p:cNvSpPr txBox="1"/>
           <p:nvPr/>
         </p:nvSpPr>
@@ -5735,7 +6995,7 @@
       </p:sp>
       <p:sp>
         <p:nvSpPr>
-          <p:cNvPr id="146" name="" descr="{&quot;isTemplate&quot;:true,&quot;type&quot;:&quot;text&quot;}"/>
+          <p:cNvPr id="183" name="" descr="{&quot;isTemplate&quot;:true,&quot;type&quot;:&quot;text&quot;}"/>
           <p:cNvSpPr txBox="1"/>
           <p:nvPr/>
         </p:nvSpPr>
@@ -5762,15 +7022,15 @@
                 <a:latin typeface="Inter"/>
                 <a:ea typeface="Inter"/>
               </a:rPr>
-              <a:t>Evidence &amp; boundaries</a:t>
-            </a:r>
-            <a:endParaRPr/>
-          </a:p>
-        </p:txBody>
-      </p:sp>
-      <p:sp>
-        <p:nvSpPr>
-          <p:cNvPr id="147" name="" descr="{&quot;isTemplate&quot;:true,&quot;type&quot;:&quot;text&quot;}"/>
+              <a:t>Evidence and limits</a:t>
+            </a:r>
+            <a:endParaRPr/>
+          </a:p>
+        </p:txBody>
+      </p:sp>
+      <p:sp>
+        <p:nvSpPr>
+          <p:cNvPr id="184" name="" descr="{&quot;isTemplate&quot;:true,&quot;type&quot;:&quot;text&quot;}"/>
           <p:cNvSpPr txBox="1"/>
           <p:nvPr/>
         </p:nvSpPr>
@@ -5797,15 +7057,15 @@
                 <a:latin typeface="Inter"/>
                 <a:ea typeface="Inter"/>
               </a:rPr>
-              <a:t>The rule baseline scores 11 of 14; the 3 misses are listed</a:t>
-            </a:r>
-            <a:endParaRPr/>
-          </a:p>
-        </p:txBody>
-      </p:sp>
-      <p:sp>
-        <p:nvSpPr>
-          <p:cNvPr id="148" name="" descr="{&quot;isTemplate&quot;:true,&quot;type&quot;:&quot;text&quot;}"/>
+              <a:t>Rule baseline of 11/14 and the unsupported artifact tier</a:t>
+            </a:r>
+            <a:endParaRPr/>
+          </a:p>
+        </p:txBody>
+      </p:sp>
+      <p:sp>
+        <p:nvSpPr>
+          <p:cNvPr id="185" name="" descr="{&quot;isTemplate&quot;:true,&quot;type&quot;:&quot;text&quot;}"/>
           <p:cNvSpPr txBox="1"/>
           <p:nvPr/>
         </p:nvSpPr>
@@ -5832,22 +7092,22 @@
                 <a:latin typeface="JetBrains Mono"/>
                 <a:ea typeface="JetBrains Mono"/>
               </a:rPr>
-              <a:t>11 – 14</a:t>
-            </a:r>
-            <a:endParaRPr/>
-          </a:p>
-        </p:txBody>
-      </p:sp>
-      <p:sp>
-        <p:nvSpPr>
-          <p:cNvPr id="149" name="" descr="{&quot;isTemplate&quot;:true,&quot;type&quot;:&quot;text&quot;}"/>
+              <a:t>11 - 15</a:t>
+            </a:r>
+            <a:endParaRPr/>
+          </a:p>
+        </p:txBody>
+      </p:sp>
+      <p:sp>
+        <p:nvSpPr>
+          <p:cNvPr id="186" name="" descr="{&quot;isTemplate&quot;:true,&quot;type&quot;:&quot;text&quot;}"/>
           <p:cNvSpPr txBox="1"/>
           <p:nvPr/>
         </p:nvSpPr>
         <p:spPr>
           <a:xfrm rot="0" flipH="0" flipV="0">
             <a:off x="685800" y="6381750"/>
-            <a:ext cx="2609850" cy="161925"/>
+            <a:ext cx="2571750" cy="161925"/>
           </a:xfrm>
           <a:prstGeom prst="rect"/>
         </p:spPr>
@@ -5867,15 +7127,15 @@
                 <a:latin typeface="Inter"/>
                 <a:ea typeface="Inter"/>
               </a:rPr>
-              <a:t>Training Failure Triage · AI Builder Cup 2026</a:t>
-            </a:r>
-            <a:endParaRPr/>
-          </a:p>
-        </p:txBody>
-      </p:sp>
-      <p:sp>
-        <p:nvSpPr>
-          <p:cNvPr id="150" name="" descr="{&quot;isTemplate&quot;:true,&quot;type&quot;:&quot;text&quot;}"/>
+              <a:t>Training Failure Triage, AI Builder Cup 2026</a:t>
+            </a:r>
+            <a:endParaRPr/>
+          </a:p>
+        </p:txBody>
+      </p:sp>
+      <p:sp>
+        <p:nvSpPr>
+          <p:cNvPr id="187" name="" descr="{&quot;isTemplate&quot;:true,&quot;type&quot;:&quot;text&quot;}"/>
           <p:cNvSpPr txBox="1"/>
           <p:nvPr/>
         </p:nvSpPr>
@@ -5902,7 +7162,7 @@
                 <a:latin typeface="JetBrains Mono"/>
                 <a:ea typeface="JetBrains Mono"/>
               </a:rPr>
-              <a:t>02 / 14</a:t>
+              <a:t>02 / 15</a:t>
             </a:r>
             <a:endParaRPr/>
           </a:p>
@@ -5918,7 +7178,7 @@
   <p:cSld>
     <p:spTree>
       <p:nvGrpSpPr>
-        <p:cNvPr id="151" name=""/>
+        <p:cNvPr id="188" name="" descr="// 03: problem section, preserving the large Xid 94.&#10;const FONT = 'Inter, &quot;Helvetica Neue&quot;, Arial, sans-serif';&#10;const MONO = '&quot;JetBrains Mono&quot;, &quot;SF Mono&quot;, Menlo, monospace';&#10;const BLUE = '#2F6BFF';&#10;const DEEP = 'linear-gradient(160deg, #0B1220 0%, #131E33 62%, #0B1220 100%)';&#10;&#10;const GRID_X = [0, 71, 142, 213, 284, 355, 426, 497, 568, 639, 710, 781, 852, 923, 994, 1065, 1136];&#10;const GRID_Y = [0, 64, 128, 192, 256, 320, 384, 448, 512, 576];&#10;&#10;&lt;Slide style={{ width: 1280, height: 720, padding: '72px', background: DEEP, fontFamily: FONT }}&gt;&#10;    &lt;Box style={{ position: 'relative', width: 1136, height: 576 }}&gt;&#10;&#10;        &lt;Box style={{ position: 'absolute', left: 0, top: 0, width: 1136, height: 576 }}&gt;&#10;            &lt;svg width={1136} height={576} viewBox='0 0 1136 576'&gt;&#10;                {GRID_X.map((x, i) =&gt; (&#10;                    &lt;line key={'gx' + i} x1={x} y1={0} x2={x} y2={576} stroke='rgba(255,255,255,0.045)' strokeWidth={1} /&gt;&#10;                ))}&#10;                {GRID_Y.map((y, i) =&gt; (&#10;                    &lt;line key={'gy' + i} x1={0} y1={y} x2={1136} y2={y} stroke='rgba(255,255,255,0.045)' strokeWidth={1} /&gt;&#10;                ))}&#10;            &lt;/svg&gt;&#10;        &lt;/Box&gt;&#10;&#10;        &lt;Box style={{ position: 'absolute', right: 0, top: 118, width: 620, alignItems: 'flex-end' }}&gt;&#10;            &lt;Text style={{ fontFamily: MONO, fontSize: 300, fontWeight: 700, color: 'rgba(229,72,77,0.15)', lineHeight: 1 }}&gt;94&lt;/Text&gt;&#10;        &lt;/Box&gt;&#10;&#10;        &lt;Box style={{ position: 'relative', width: 820, height: 576, justifyContent: 'center', gap: 18 }}&gt;&#10;            &lt;Text style={{ fontFamily: MONO, fontSize: 14, color: BLUE, letterSpacing: 3 }}&gt;CHAPTER 01&lt;/Text&gt;&#10;            &lt;Text style={{ fontSize: 64, fontWeight: 700, color: '#FFFFFF', lineHeight: 1.1 }}&gt;The problem&lt;/Text&gt;&#10;            &lt;Text style={{ fontSize: 24, color: '#94A3B8', lineHeight: 1.5 }}&gt;Hardware escalation after a training failure&lt;/Text&gt;&#10;            &lt;Box style={{ width: 88, height: 3, background: 'rgba(255,255,255,0.28)', marginTop: 14 }} /&gt;&#10;            &lt;Text style={{ fontSize: 18, color: '#C7D2E0', lineHeight: 1.65, width: 760 }}&gt;&#10;                Unnecessary repair removes a working GPU from the pool. Missed hardware deterioration can&#10;                cause repeated training failures. Error frequency and ECC history help distinguish these cases.&#10;            &lt;/Text&gt;&#10;        &lt;/Box&gt;&#10;&#10;        &lt;Box style={{ position: 'absolute', left: 0, bottom: 0, width: 1136, flexDirection: 'row', justifyContent: 'flex-end' }}&gt;&#10;            &lt;Text style={{ fontFamily: MONO, fontSize: 14, color: 'rgba(255,255,255,0.45)' }}&gt;03 / 15&lt;/Text&gt;&#10;        &lt;/Box&gt;&#10;&#10;    &lt;/Box&gt;&#10;&lt;/Slide&gt;&#10;"/>
         <p:cNvGrpSpPr/>
         <p:nvPr/>
       </p:nvGrpSpPr>
@@ -5932,7 +7192,7 @@
       </p:grpSpPr>
       <p:sp>
         <p:nvSpPr>
-          <p:cNvPr id="152" name=""/>
+          <p:cNvPr id="189" name=""/>
           <p:cNvSpPr/>
           <p:nvPr/>
         </p:nvSpPr>
@@ -5962,15 +7222,12 @@
         </p:spPr>
         <p:txBody>
           <a:bodyPr/>
-          <a:p>
-            <a:pPr/>
-            <a:endParaRPr/>
-          </a:p>
+          <a:p/>
         </p:txBody>
       </p:sp>
       <p:pic>
         <p:nvPicPr>
-          <p:cNvPr id="153" name=""/>
+          <p:cNvPr id="190" name=""/>
           <p:cNvPicPr>
             <a:picLocks noChangeAspect="1"/>
           </p:cNvPicPr>
@@ -6001,7 +7258,7 @@
       </p:pic>
       <p:sp>
         <p:nvSpPr>
-          <p:cNvPr id="154" name="" descr="{&quot;isTemplate&quot;:true,&quot;type&quot;:&quot;text&quot;}"/>
+          <p:cNvPr id="191" name="" descr="{&quot;isTemplate&quot;:true,&quot;type&quot;:&quot;text&quot;}"/>
           <p:cNvSpPr txBox="1"/>
           <p:nvPr/>
         </p:nvSpPr>
@@ -6038,13 +7295,13 @@
       </p:sp>
       <p:sp>
         <p:nvSpPr>
-          <p:cNvPr id="155" name="" descr="{&quot;isTemplate&quot;:true,&quot;type&quot;:&quot;text&quot;}"/>
-          <p:cNvSpPr txBox="1"/>
-          <p:nvPr/>
-        </p:nvSpPr>
-        <p:spPr>
-          <a:xfrm rot="0" flipH="0" flipV="0">
-            <a:off x="685800" y="1800225"/>
+          <p:cNvPr id="192" name="" descr="{&quot;isTemplate&quot;:true,&quot;type&quot;:&quot;text&quot;}"/>
+          <p:cNvSpPr txBox="1"/>
+          <p:nvPr/>
+        </p:nvSpPr>
+        <p:spPr>
+          <a:xfrm rot="0" flipH="0" flipV="0">
+            <a:off x="685800" y="1971675"/>
             <a:ext cx="7810500" cy="161925"/>
           </a:xfrm>
           <a:prstGeom prst="rect"/>
@@ -6073,13 +7330,13 @@
       </p:sp>
       <p:sp>
         <p:nvSpPr>
-          <p:cNvPr id="156" name="" descr="{&quot;isTemplate&quot;:true,&quot;type&quot;:&quot;text&quot;}"/>
-          <p:cNvSpPr txBox="1"/>
-          <p:nvPr/>
-        </p:nvSpPr>
-        <p:spPr>
-          <a:xfrm rot="0" flipH="0" flipV="0">
-            <a:off x="685800" y="2133600"/>
+          <p:cNvPr id="193" name="" descr="{&quot;isTemplate&quot;:true,&quot;type&quot;:&quot;text&quot;}"/>
+          <p:cNvSpPr txBox="1"/>
+          <p:nvPr/>
+        </p:nvSpPr>
+        <p:spPr>
+          <a:xfrm rot="0" flipH="0" flipV="0">
+            <a:off x="685800" y="2305050"/>
             <a:ext cx="7810500" cy="809625"/>
           </a:xfrm>
           <a:prstGeom prst="rect"/>
@@ -6108,13 +7365,13 @@
       </p:sp>
       <p:sp>
         <p:nvSpPr>
-          <p:cNvPr id="157" name="" descr="{&quot;isTemplate&quot;:true,&quot;type&quot;:&quot;text&quot;}"/>
-          <p:cNvSpPr txBox="1"/>
-          <p:nvPr/>
-        </p:nvSpPr>
-        <p:spPr>
-          <a:xfrm rot="0" flipH="0" flipV="0">
-            <a:off x="685800" y="3114675"/>
+          <p:cNvPr id="194" name="" descr="{&quot;isTemplate&quot;:true,&quot;type&quot;:&quot;text&quot;}"/>
+          <p:cNvSpPr txBox="1"/>
+          <p:nvPr/>
+        </p:nvSpPr>
+        <p:spPr>
+          <a:xfrm rot="0" flipH="0" flipV="0">
+            <a:off x="685800" y="3286125"/>
             <a:ext cx="7810500" cy="419100"/>
           </a:xfrm>
           <a:prstGeom prst="rect"/>
@@ -6135,21 +7392,21 @@
                 <a:latin typeface="Inter"/>
                 <a:ea typeface="Inter"/>
               </a:rPr>
-              <a:t>The same error code, two opposite mistakes</a:t>
-            </a:r>
-            <a:endParaRPr/>
-          </a:p>
-        </p:txBody>
-      </p:sp>
-      <p:sp>
-        <p:nvSpPr>
-          <p:cNvPr id="158" name=""/>
+              <a:t>Hardware escalation after a training failure</a:t>
+            </a:r>
+            <a:endParaRPr/>
+          </a:p>
+        </p:txBody>
+      </p:sp>
+      <p:sp>
+        <p:nvSpPr>
+          <p:cNvPr id="195" name=""/>
           <p:cNvSpPr/>
           <p:nvPr/>
         </p:nvSpPr>
         <p:spPr>
           <a:xfrm rot="0" flipH="0" flipV="0">
-            <a:off x="685800" y="3838575"/>
+            <a:off x="685800" y="4010025"/>
             <a:ext cx="838200" cy="28575"/>
           </a:xfrm>
           <a:prstGeom prst="rect">
@@ -6164,22 +7421,19 @@
         </p:spPr>
         <p:txBody>
           <a:bodyPr/>
-          <a:p>
-            <a:pPr/>
-            <a:endParaRPr/>
-          </a:p>
-        </p:txBody>
-      </p:sp>
-      <p:sp>
-        <p:nvSpPr>
-          <p:cNvPr id="159" name="" descr="{&quot;isTemplate&quot;:true,&quot;type&quot;:&quot;text&quot;}"/>
-          <p:cNvSpPr txBox="1"/>
-          <p:nvPr/>
-        </p:nvSpPr>
-        <p:spPr>
-          <a:xfrm rot="0" flipH="0" flipV="0">
-            <a:off x="685800" y="4038600"/>
-            <a:ext cx="7239000" cy="1019175"/>
+          <a:p/>
+        </p:txBody>
+      </p:sp>
+      <p:sp>
+        <p:nvSpPr>
+          <p:cNvPr id="196" name="" descr="{&quot;isTemplate&quot;:true,&quot;type&quot;:&quot;text&quot;}"/>
+          <p:cNvSpPr txBox="1"/>
+          <p:nvPr/>
+        </p:nvSpPr>
+        <p:spPr>
+          <a:xfrm rot="0" flipH="0" flipV="0">
+            <a:off x="685800" y="4210050"/>
+            <a:ext cx="7239000" cy="685800"/>
           </a:xfrm>
           <a:prstGeom prst="rect"/>
         </p:spPr>
@@ -6201,15 +7455,15 @@
                 <a:latin typeface="Inter"/>
                 <a:ea typeface="Inter"/>
               </a:rPr>
-              <a:t>Calling a dying card healthy burns weeks of compute on it. Calling a healthy card dying pulls a working GPU out of the pool. Both are expensive, and telling the two apart is the whole problem.</a:t>
-            </a:r>
-            <a:endParaRPr/>
-          </a:p>
-        </p:txBody>
-      </p:sp>
-      <p:sp>
-        <p:nvSpPr>
-          <p:cNvPr id="160" name="" descr="{&quot;isTemplate&quot;:true,&quot;type&quot;:&quot;text&quot;}"/>
+              <a:t>Unnecessary repair removes a working GPU from the pool. Missed hardware deterioration can cause repeated training failures. Error frequency and ECC history help distinguish these cases.</a:t>
+            </a:r>
+            <a:endParaRPr/>
+          </a:p>
+        </p:txBody>
+      </p:sp>
+      <p:sp>
+        <p:nvSpPr>
+          <p:cNvPr id="197" name="" descr="{&quot;isTemplate&quot;:true,&quot;type&quot;:&quot;text&quot;}"/>
           <p:cNvSpPr txBox="1"/>
           <p:nvPr/>
         </p:nvSpPr>
@@ -6238,7 +7492,7 @@
                 <a:latin typeface="JetBrains Mono"/>
                 <a:ea typeface="JetBrains Mono"/>
               </a:rPr>
-              <a:t>03 / 14</a:t>
+              <a:t>03 / 15</a:t>
             </a:r>
             <a:endParaRPr/>
           </a:p>
@@ -6254,7 +7508,7 @@
   <p:cSld>
     <p:spTree>
       <p:nvGrpSpPr>
-        <p:cNvPr id="161" name=""/>
+        <p:cNvPr id="198" name="" descr="// 04: asymmetric comparison of escalation errors.&#10;const FONT = 'Inter, &quot;Helvetica Neue&quot;, Arial, sans-serif';&#10;const MONO = '&quot;JetBrains Mono&quot;, &quot;SF Mono&quot;, Menlo, monospace';&#10;const INK = '#0B1220';&#10;const BLUE = '#2F6BFF';&#10;const RED = '#E5484D';&#10;const PANEL = '#F1F4FA';&#10;const DIM = '#64748B';&#10;const BODY = '#1A2434';&#10;&#10;const WHY = [&#10;    'Xid 94 reports a contained memory error. The code alone does not establish whether hardware repair is required.',&#10;    'The two nodes differ in their 30-day Xid count and the direction of correctable ECC.',&#10;    'The rule baseline uses weighted signature matches. These cases also require an assessment of severity over time.',&#10;];&#10;&#10;&lt;Slide style={{ width: 1280, height: 720, padding: '18px 72px', background: '#FFFFFF', fontFamily: FONT }}&gt;&#10;    &lt;Box style={{ width: 1136, height: 92, flexDirection: 'row', justifyContent: 'space-between', alignItems: 'flex-end' }}&gt;&#10;        &lt;Text style={{ fontSize: 34, fontWeight: 700, color: INK, lineHeight: 1.3 }}&gt;Xid 94 escalation errors&lt;/Text&gt;&#10;        &lt;Text style={{ fontFamily: MONO, fontSize: 14, color: DIM, lineHeight: 1.45 }}&gt;Xid taxonomy, 24 codes&lt;/Text&gt;&#10;    &lt;/Box&gt;&#10;&#10;    &lt;Box style={{ width: 1136, height: 544, flexDirection: 'row', gap: 36, alignItems: 'center' }}&gt;&#10;&#10;        &lt;Box style={{ width: 660 }}&gt;&#10;            &lt;Text style={{ fontSize: 13, color: DIM, textAlign: 'center', width: 660, lineHeight: 1.5 }}&gt;An error code without its history&lt;/Text&gt;&#10;&#10;            &lt;Box style={{ width: 660, alignItems: 'center', marginTop: 8 }}&gt;&#10;                &lt;Box style={{ paddingTop: 8, paddingBottom: 8, paddingLeft: 18, paddingRight: 18, borderRadius: 6, background: INK }}&gt;&#10;                    &lt;Text style={{ fontFamily: MONO, fontSize: 22, fontWeight: 600, color: '#FFFFFF' }}&gt;Xid 94&lt;/Text&gt;&#10;                &lt;/Box&gt;&#10;            &lt;/Box&gt;&#10;&#10;            &lt;svg width={660} height={78} viewBox='0 0 660 78'&gt;&#10;                &lt;line x1={330} y1={2} x2={330} y2={36} stroke='#B6C2D4' strokeWidth={2} /&gt;&#10;                &lt;line x1={170} y1={36} x2={510} y2={36} stroke='#B6C2D4' strokeWidth={2} /&gt;&#10;                &lt;line x1={170} y1={36} x2={170} y2={66} stroke='#B6C2D4' strokeWidth={2} /&gt;&#10;                &lt;line x1={510} y1={36} x2={510} y2={66} stroke='#B6C2D4' strokeWidth={2} /&gt;&#10;                &lt;path d='M164 62 L170 76 L176 62 Z' fill='#B6C2D4' /&gt;&#10;                &lt;path d='M504 62 L510 76 L516 62 Z' fill='#B6C2D4' /&gt;&#10;            &lt;/svg&gt;&#10;&#10;            &lt;Box style={{ width: 660, flexDirection: 'row', gap: 20 }}&gt;&#10;                &lt;Box style={{ width: 340, padding: 18, borderRadius: 8, background: '#FDF3F3', borderLeft: '4px solid ' + RED }}&gt;&#10;                    &lt;Text style={{ fontSize: 19, fontWeight: 600, color: INK, lineHeight: 1.4 }}&gt;Unnecessary escalation&lt;/Text&gt;&#10;                    &lt;Text style={{ fontFamily: MONO, fontSize: 14, color: BODY, lineHeight: 1.6, marginTop: 8 }}&gt;cordon and request repair&lt;/Text&gt;&#10;                    &lt;Box style={{ width: 300, height: 1, background: '#E9C4C6', marginTop: 12, marginBottom: 12 }} /&gt;&#10;                    &lt;Text style={{ fontSize: 15, color: DIM, lineHeight: 1.55 }}&gt;Cost:&lt;/Text&gt;&#10;                    &lt;Text style={{ fontSize: 16, color: RED, lineHeight: 1.55, fontWeight: 600 }}&gt;A working GPU leaves the scheduling pool during repair.&lt;/Text&gt;&#10;                &lt;/Box&gt;&#10;                &lt;Box style={{ width: 300, padding: 18, borderRadius: 8, background: PANEL, borderLeft: '4px solid ' + BLUE }}&gt;&#10;                    &lt;Text style={{ fontSize: 19, fontWeight: 600, color: INK, lineHeight: 1.4 }}&gt;Missed deterioration&lt;/Text&gt;&#10;                    &lt;Text style={{ fontFamily: MONO, fontSize: 14, color: BODY, lineHeight: 1.6, marginTop: 8 }}&gt;retry without escalation&lt;/Text&gt;&#10;                    &lt;Box style={{ width: 260, height: 1, background: '#CBD8EC', marginTop: 12, marginBottom: 12 }} /&gt;&#10;                    &lt;Text style={{ fontSize: 15, color: DIM, lineHeight: 1.55 }}&gt;Cost:&lt;/Text&gt;&#10;                    &lt;Text style={{ fontSize: 16, color: BLUE, lineHeight: 1.55, fontWeight: 600 }}&gt;Training continues on a deteriorating GPU, with a risk of Xid 95.&lt;/Text&gt;&#10;                &lt;/Box&gt;&#10;            &lt;/Box&gt;&#10;        &lt;/Box&gt;&#10;&#10;        &lt;Box style={{ width: 440, gap: 16 }}&gt;&#10;            &lt;Text style={{ fontSize: 20, fontWeight: 600, color: INK, lineHeight: 1.45 }}&gt;Evidence needed for escalation&lt;/Text&gt;&#10;            {WHY.map((t, i) =&gt; (&#10;                &lt;Box key={i} style={{ flexDirection: 'row', gap: 12 }}&gt;&#10;                    &lt;Box style={{ width: 6, height: 6, borderRadius: 3, background: BLUE, marginTop: 10 }} /&gt;&#10;                    &lt;Text style={{ fontSize: 16, color: BODY, lineHeight: 1.62, width: 418 }}&gt;{t}&lt;/Text&gt;&#10;                &lt;/Box&gt;&#10;            ))}&#10;            &lt;Box style={{ width: 440, height: 1, background: '#E6EBF3', marginTop: 6, marginBottom: 6 }} /&gt;&#10;            &lt;Text style={{ fontSize: 20, fontWeight: 700, color: INK, lineHeight: 1.45 }}&gt;The 30-day history changes the repair assessment&lt;/Text&gt;&#10;        &lt;/Box&gt;&#10;&#10;    &lt;/Box&gt;&#10;&#10;    &lt;Box style={{ width: 1136, height: 48, flexDirection: 'row', justifyContent: 'space-between', alignItems: 'center' }}&gt;&#10;        &lt;Text style={{ fontSize: 14, color: DIM }}&gt;Training Failure Triage, AI Builder Cup 2026&lt;/Text&gt;&#10;        &lt;Text style={{ fontFamily: MONO, fontSize: 14, color: DIM }}&gt;04 / 15&lt;/Text&gt;&#10;    &lt;/Box&gt;&#10;&lt;/Slide&gt;&#10;"/>
         <p:cNvGrpSpPr/>
         <p:nvPr/>
       </p:nvGrpSpPr>
@@ -6268,7 +7522,7 @@
       </p:grpSpPr>
       <p:sp>
         <p:nvSpPr>
-          <p:cNvPr id="162" name=""/>
+          <p:cNvPr id="199" name=""/>
           <p:cNvSpPr/>
           <p:nvPr/>
         </p:nvSpPr>
@@ -6287,22 +7541,19 @@
         </p:spPr>
         <p:txBody>
           <a:bodyPr/>
-          <a:p>
-            <a:pPr/>
-            <a:endParaRPr/>
-          </a:p>
-        </p:txBody>
-      </p:sp>
-      <p:sp>
-        <p:nvSpPr>
-          <p:cNvPr id="163" name="" descr="{&quot;isTemplate&quot;:true,&quot;type&quot;:&quot;text&quot;}"/>
+          <a:p/>
+        </p:txBody>
+      </p:sp>
+      <p:sp>
+        <p:nvSpPr>
+          <p:cNvPr id="200" name="" descr="{&quot;isTemplate&quot;:true,&quot;type&quot;:&quot;text&quot;}"/>
           <p:cNvSpPr txBox="1"/>
           <p:nvPr/>
         </p:nvSpPr>
         <p:spPr>
           <a:xfrm rot="0" flipH="0" flipV="0">
             <a:off x="685800" y="533400"/>
-            <a:ext cx="5172075" cy="514350"/>
+            <a:ext cx="3648075" cy="514350"/>
           </a:xfrm>
           <a:prstGeom prst="rect"/>
         </p:spPr>
@@ -6322,22 +7573,22 @@
                 <a:latin typeface="Inter"/>
                 <a:ea typeface="Inter"/>
               </a:rPr>
-              <a:t>One code, two opposite mistakes</a:t>
-            </a:r>
-            <a:endParaRPr/>
-          </a:p>
-        </p:txBody>
-      </p:sp>
-      <p:sp>
-        <p:nvSpPr>
-          <p:cNvPr id="164" name="" descr="{&quot;isTemplate&quot;:true,&quot;type&quot;:&quot;text&quot;}"/>
-          <p:cNvSpPr txBox="1"/>
-          <p:nvPr/>
-        </p:nvSpPr>
-        <p:spPr>
-          <a:xfrm rot="0" flipH="0" flipV="0">
-            <a:off x="9658350" y="809625"/>
-            <a:ext cx="1847850" cy="238125"/>
+              <a:t>Xid 94 escalation errors</a:t>
+            </a:r>
+            <a:endParaRPr/>
+          </a:p>
+        </p:txBody>
+      </p:sp>
+      <p:sp>
+        <p:nvSpPr>
+          <p:cNvPr id="201" name="" descr="{&quot;isTemplate&quot;:true,&quot;type&quot;:&quot;text&quot;}"/>
+          <p:cNvSpPr txBox="1"/>
+          <p:nvPr/>
+        </p:nvSpPr>
+        <p:spPr>
+          <a:xfrm rot="0" flipH="0" flipV="0">
+            <a:off x="9734550" y="809625"/>
+            <a:ext cx="1771650" cy="238125"/>
           </a:xfrm>
           <a:prstGeom prst="rect"/>
         </p:spPr>
@@ -6357,15 +7608,15 @@
                 <a:latin typeface="JetBrains Mono"/>
                 <a:ea typeface="JetBrains Mono"/>
               </a:rPr>
-              <a:t>Xid taxonomy · 24 codes</a:t>
-            </a:r>
-            <a:endParaRPr/>
-          </a:p>
-        </p:txBody>
-      </p:sp>
-      <p:sp>
-        <p:nvSpPr>
-          <p:cNvPr id="165" name="" descr="{&quot;isTemplate&quot;:true,&quot;type&quot;:&quot;text&quot;}"/>
+              <a:t>Xid taxonomy, 24 codes</a:t>
+            </a:r>
+            <a:endParaRPr/>
+          </a:p>
+        </p:txBody>
+      </p:sp>
+      <p:sp>
+        <p:nvSpPr>
+          <p:cNvPr id="202" name="" descr="{&quot;isTemplate&quot;:true,&quot;type&quot;:&quot;text&quot;}"/>
           <p:cNvSpPr txBox="1"/>
           <p:nvPr/>
         </p:nvSpPr>
@@ -6392,15 +7643,15 @@
                 <a:latin typeface="Inter"/>
                 <a:ea typeface="Inter"/>
               </a:rPr>
-              <a:t>the operator sees exactly this</a:t>
-            </a:r>
-            <a:endParaRPr/>
-          </a:p>
-        </p:txBody>
-      </p:sp>
-      <p:sp>
-        <p:nvSpPr>
-          <p:cNvPr id="166" name=""/>
+              <a:t>An error code without its history</a:t>
+            </a:r>
+            <a:endParaRPr/>
+          </a:p>
+        </p:txBody>
+      </p:sp>
+      <p:sp>
+        <p:nvSpPr>
+          <p:cNvPr id="203" name=""/>
           <p:cNvSpPr/>
           <p:nvPr/>
         </p:nvSpPr>
@@ -6421,15 +7672,12 @@
         </p:spPr>
         <p:txBody>
           <a:bodyPr/>
-          <a:p>
-            <a:pPr/>
-            <a:endParaRPr/>
-          </a:p>
-        </p:txBody>
-      </p:sp>
-      <p:sp>
-        <p:nvSpPr>
-          <p:cNvPr id="167" name="" descr="{&quot;isTemplate&quot;:true,&quot;type&quot;:&quot;text&quot;}"/>
+          <a:p/>
+        </p:txBody>
+      </p:sp>
+      <p:sp>
+        <p:nvSpPr>
+          <p:cNvPr id="204" name="" descr="{&quot;isTemplate&quot;:true,&quot;type&quot;:&quot;text&quot;}"/>
           <p:cNvSpPr txBox="1"/>
           <p:nvPr/>
         </p:nvSpPr>
@@ -6464,7 +7712,7 @@
       </p:sp>
       <p:pic>
         <p:nvPicPr>
-          <p:cNvPr id="168" name=""/>
+          <p:cNvPr id="205" name=""/>
           <p:cNvPicPr>
             <a:picLocks noChangeAspect="1"/>
           </p:cNvPicPr>
@@ -6495,7 +7743,7 @@
       </p:pic>
       <p:sp>
         <p:nvSpPr>
-          <p:cNvPr id="169" name=""/>
+          <p:cNvPr id="206" name=""/>
           <p:cNvSpPr/>
           <p:nvPr/>
         </p:nvSpPr>
@@ -6516,15 +7764,12 @@
         </p:spPr>
         <p:txBody>
           <a:bodyPr/>
-          <a:p>
-            <a:pPr/>
-            <a:endParaRPr/>
-          </a:p>
-        </p:txBody>
-      </p:sp>
-      <p:sp>
-        <p:nvSpPr>
-          <p:cNvPr id="170" name=""/>
+          <a:p/>
+        </p:txBody>
+      </p:sp>
+      <p:sp>
+        <p:nvSpPr>
+          <p:cNvPr id="207" name=""/>
           <p:cNvSpPr/>
           <p:nvPr/>
         </p:nvSpPr>
@@ -6576,15 +7821,12 @@
         </p:spPr>
         <p:txBody>
           <a:bodyPr/>
-          <a:p>
-            <a:pPr/>
-            <a:endParaRPr/>
-          </a:p>
-        </p:txBody>
-      </p:sp>
-      <p:sp>
-        <p:nvSpPr>
-          <p:cNvPr id="171" name="" descr="{&quot;isTemplate&quot;:true,&quot;type&quot;:&quot;text&quot;}"/>
+          <a:p/>
+        </p:txBody>
+      </p:sp>
+      <p:sp>
+        <p:nvSpPr>
+          <p:cNvPr id="208" name="" descr="{&quot;isTemplate&quot;:true,&quot;type&quot;:&quot;text&quot;}"/>
           <p:cNvSpPr txBox="1"/>
           <p:nvPr/>
         </p:nvSpPr>
@@ -6611,15 +7853,15 @@
                 <a:latin typeface="Inter"/>
                 <a:ea typeface="Inter"/>
               </a:rPr>
-              <a:t>Read as hardware</a:t>
-            </a:r>
-            <a:endParaRPr/>
-          </a:p>
-        </p:txBody>
-      </p:sp>
-      <p:sp>
-        <p:nvSpPr>
-          <p:cNvPr id="172" name="" descr="{&quot;isTemplate&quot;:true,&quot;type&quot;:&quot;text&quot;}"/>
+              <a:t>Unnecessary escalation</a:t>
+            </a:r>
+            <a:endParaRPr/>
+          </a:p>
+        </p:txBody>
+      </p:sp>
+      <p:sp>
+        <p:nvSpPr>
+          <p:cNvPr id="209" name="" descr="{&quot;isTemplate&quot;:true,&quot;type&quot;:&quot;text&quot;}"/>
           <p:cNvSpPr txBox="1"/>
           <p:nvPr/>
         </p:nvSpPr>
@@ -6646,15 +7888,15 @@
                 <a:latin typeface="JetBrains Mono"/>
                 <a:ea typeface="JetBrains Mono"/>
               </a:rPr>
-              <a:t>cordon · file the RMA</a:t>
-            </a:r>
-            <a:endParaRPr/>
-          </a:p>
-        </p:txBody>
-      </p:sp>
-      <p:sp>
-        <p:nvSpPr>
-          <p:cNvPr id="173" name=""/>
+              <a:t>cordon and request repair</a:t>
+            </a:r>
+            <a:endParaRPr/>
+          </a:p>
+        </p:txBody>
+      </p:sp>
+      <p:sp>
+        <p:nvSpPr>
+          <p:cNvPr id="210" name=""/>
           <p:cNvSpPr/>
           <p:nvPr/>
         </p:nvSpPr>
@@ -6673,15 +7915,12 @@
         </p:spPr>
         <p:txBody>
           <a:bodyPr/>
-          <a:p>
-            <a:pPr/>
-            <a:endParaRPr/>
-          </a:p>
-        </p:txBody>
-      </p:sp>
-      <p:sp>
-        <p:nvSpPr>
-          <p:cNvPr id="174" name="" descr="{&quot;isTemplate&quot;:true,&quot;type&quot;:&quot;text&quot;}"/>
+          <a:p/>
+        </p:txBody>
+      </p:sp>
+      <p:sp>
+        <p:nvSpPr>
+          <p:cNvPr id="211" name="" descr="{&quot;isTemplate&quot;:true,&quot;type&quot;:&quot;text&quot;}"/>
           <p:cNvSpPr txBox="1"/>
           <p:nvPr/>
         </p:nvSpPr>
@@ -6716,7 +7955,7 @@
       </p:sp>
       <p:sp>
         <p:nvSpPr>
-          <p:cNvPr id="175" name="" descr="{&quot;isTemplate&quot;:true,&quot;type&quot;:&quot;text&quot;}"/>
+          <p:cNvPr id="212" name="" descr="{&quot;isTemplate&quot;:true,&quot;type&quot;:&quot;text&quot;}"/>
           <p:cNvSpPr txBox="1"/>
           <p:nvPr/>
         </p:nvSpPr>
@@ -6745,15 +7984,15 @@
                 <a:latin typeface="Inter"/>
                 <a:ea typeface="Inter"/>
               </a:rPr>
-              <a:t>a healthy card is offline for weeks, and the capacity is gone with it.</a:t>
-            </a:r>
-            <a:endParaRPr/>
-          </a:p>
-        </p:txBody>
-      </p:sp>
-      <p:sp>
-        <p:nvSpPr>
-          <p:cNvPr id="176" name=""/>
+              <a:t>A working GPU leaves the scheduling pool during repair.</a:t>
+            </a:r>
+            <a:endParaRPr/>
+          </a:p>
+        </p:txBody>
+      </p:sp>
+      <p:sp>
+        <p:nvSpPr>
+          <p:cNvPr id="213" name=""/>
           <p:cNvSpPr/>
           <p:nvPr/>
         </p:nvSpPr>
@@ -6774,15 +8013,12 @@
         </p:spPr>
         <p:txBody>
           <a:bodyPr/>
-          <a:p>
-            <a:pPr/>
-            <a:endParaRPr/>
-          </a:p>
-        </p:txBody>
-      </p:sp>
-      <p:sp>
-        <p:nvSpPr>
-          <p:cNvPr id="177" name=""/>
+          <a:p/>
+        </p:txBody>
+      </p:sp>
+      <p:sp>
+        <p:nvSpPr>
+          <p:cNvPr id="214" name=""/>
           <p:cNvSpPr/>
           <p:nvPr/>
         </p:nvSpPr>
@@ -6834,15 +8070,12 @@
         </p:spPr>
         <p:txBody>
           <a:bodyPr/>
-          <a:p>
-            <a:pPr/>
-            <a:endParaRPr/>
-          </a:p>
-        </p:txBody>
-      </p:sp>
-      <p:sp>
-        <p:nvSpPr>
-          <p:cNvPr id="178" name="" descr="{&quot;isTemplate&quot;:true,&quot;type&quot;:&quot;text&quot;}"/>
+          <a:p/>
+        </p:txBody>
+      </p:sp>
+      <p:sp>
+        <p:nvSpPr>
+          <p:cNvPr id="215" name="" descr="{&quot;isTemplate&quot;:true,&quot;type&quot;:&quot;text&quot;}"/>
           <p:cNvSpPr txBox="1"/>
           <p:nvPr/>
         </p:nvSpPr>
@@ -6869,15 +8102,15 @@
                 <a:latin typeface="Inter"/>
                 <a:ea typeface="Inter"/>
               </a:rPr>
-              <a:t>Read as software</a:t>
-            </a:r>
-            <a:endParaRPr/>
-          </a:p>
-        </p:txBody>
-      </p:sp>
-      <p:sp>
-        <p:nvSpPr>
-          <p:cNvPr id="179" name="" descr="{&quot;isTemplate&quot;:true,&quot;type&quot;:&quot;text&quot;}"/>
+              <a:t>Missed deterioration</a:t>
+            </a:r>
+            <a:endParaRPr/>
+          </a:p>
+        </p:txBody>
+      </p:sp>
+      <p:sp>
+        <p:nvSpPr>
+          <p:cNvPr id="216" name="" descr="{&quot;isTemplate&quot;:true,&quot;type&quot;:&quot;text&quot;}"/>
           <p:cNvSpPr txBox="1"/>
           <p:nvPr/>
         </p:nvSpPr>
@@ -6904,15 +8137,15 @@
                 <a:latin typeface="JetBrains Mono"/>
                 <a:ea typeface="JetBrains Mono"/>
               </a:rPr>
-              <a:t>retry · move on</a:t>
-            </a:r>
-            <a:endParaRPr/>
-          </a:p>
-        </p:txBody>
-      </p:sp>
-      <p:sp>
-        <p:nvSpPr>
-          <p:cNvPr id="180" name=""/>
+              <a:t>retry without escalation</a:t>
+            </a:r>
+            <a:endParaRPr/>
+          </a:p>
+        </p:txBody>
+      </p:sp>
+      <p:sp>
+        <p:nvSpPr>
+          <p:cNvPr id="217" name=""/>
           <p:cNvSpPr/>
           <p:nvPr/>
         </p:nvSpPr>
@@ -6931,15 +8164,12 @@
         </p:spPr>
         <p:txBody>
           <a:bodyPr/>
-          <a:p>
-            <a:pPr/>
-            <a:endParaRPr/>
-          </a:p>
-        </p:txBody>
-      </p:sp>
-      <p:sp>
-        <p:nvSpPr>
-          <p:cNvPr id="181" name="" descr="{&quot;isTemplate&quot;:true,&quot;type&quot;:&quot;text&quot;}"/>
+          <a:p/>
+        </p:txBody>
+      </p:sp>
+      <p:sp>
+        <p:nvSpPr>
+          <p:cNvPr id="218" name="" descr="{&quot;isTemplate&quot;:true,&quot;type&quot;:&quot;text&quot;}"/>
           <p:cNvSpPr txBox="1"/>
           <p:nvPr/>
         </p:nvSpPr>
@@ -6974,7 +8204,7 @@
       </p:sp>
       <p:sp>
         <p:nvSpPr>
-          <p:cNvPr id="182" name="" descr="{&quot;isTemplate&quot;:true,&quot;type&quot;:&quot;text&quot;}"/>
+          <p:cNvPr id="219" name="" descr="{&quot;isTemplate&quot;:true,&quot;type&quot;:&quot;text&quot;}"/>
           <p:cNvSpPr txBox="1"/>
           <p:nvPr/>
         </p:nvSpPr>
@@ -7003,21 +8233,21 @@
                 <a:latin typeface="Inter"/>
                 <a:ea typeface="Inter"/>
               </a:rPr>
-              <a:t>you keep training on a degrading card until the error turns uncorrectable (Xid 95).</a:t>
-            </a:r>
-            <a:endParaRPr/>
-          </a:p>
-        </p:txBody>
-      </p:sp>
-      <p:sp>
-        <p:nvSpPr>
-          <p:cNvPr id="183" name="" descr="{&quot;isTemplate&quot;:true,&quot;type&quot;:&quot;text&quot;}"/>
-          <p:cNvSpPr txBox="1"/>
-          <p:nvPr/>
-        </p:nvSpPr>
-        <p:spPr>
-          <a:xfrm rot="0" flipH="0" flipV="0">
-            <a:off x="7315200" y="1504950"/>
+              <a:t>Training continues on a deteriorating GPU, with a risk of Xid 95.</a:t>
+            </a:r>
+            <a:endParaRPr/>
+          </a:p>
+        </p:txBody>
+      </p:sp>
+      <p:sp>
+        <p:nvSpPr>
+          <p:cNvPr id="220" name="" descr="{&quot;isTemplate&quot;:true,&quot;type&quot;:&quot;text&quot;}"/>
+          <p:cNvSpPr txBox="1"/>
+          <p:nvPr/>
+        </p:nvSpPr>
+        <p:spPr>
+          <a:xfrm rot="0" flipH="0" flipV="0">
+            <a:off x="7315200" y="1800225"/>
             <a:ext cx="4191000" cy="333375"/>
           </a:xfrm>
           <a:prstGeom prst="rect"/>
@@ -7038,21 +8268,21 @@
                 <a:latin typeface="Inter"/>
                 <a:ea typeface="Inter"/>
               </a:rPr>
-              <a:t>Why the code cannot be the rule</a:t>
-            </a:r>
-            <a:endParaRPr/>
-          </a:p>
-        </p:txBody>
-      </p:sp>
-      <p:sp>
-        <p:nvSpPr>
-          <p:cNvPr id="184" name=""/>
+              <a:t>Evidence needed for escalation</a:t>
+            </a:r>
+            <a:endParaRPr/>
+          </a:p>
+        </p:txBody>
+      </p:sp>
+      <p:sp>
+        <p:nvSpPr>
+          <p:cNvPr id="221" name=""/>
           <p:cNvSpPr/>
           <p:nvPr/>
         </p:nvSpPr>
         <p:spPr>
           <a:xfrm rot="0" flipH="0" flipV="0">
-            <a:off x="7315200" y="2085975"/>
+            <a:off x="7315200" y="2381250"/>
             <a:ext cx="57150" cy="57150"/>
           </a:xfrm>
           <a:prstGeom prst="roundRect">
@@ -7067,21 +8297,18 @@
         </p:spPr>
         <p:txBody>
           <a:bodyPr/>
-          <a:p>
-            <a:pPr/>
-            <a:endParaRPr/>
-          </a:p>
-        </p:txBody>
-      </p:sp>
-      <p:sp>
-        <p:nvSpPr>
-          <p:cNvPr id="185" name="" descr="{&quot;isTemplate&quot;:true,&quot;type&quot;:&quot;text&quot;}"/>
-          <p:cNvSpPr txBox="1"/>
-          <p:nvPr/>
-        </p:nvSpPr>
-        <p:spPr>
-          <a:xfrm rot="0" flipH="0" flipV="0">
-            <a:off x="7486650" y="1990725"/>
+          <a:p/>
+        </p:txBody>
+      </p:sp>
+      <p:sp>
+        <p:nvSpPr>
+          <p:cNvPr id="222" name="" descr="{&quot;isTemplate&quot;:true,&quot;type&quot;:&quot;text&quot;}"/>
+          <p:cNvSpPr txBox="1"/>
+          <p:nvPr/>
+        </p:nvSpPr>
+        <p:spPr>
+          <a:xfrm rot="0" flipH="0" flipV="0">
+            <a:off x="7486650" y="2286000"/>
             <a:ext cx="3981450" cy="600075"/>
           </a:xfrm>
           <a:prstGeom prst="rect"/>
@@ -7104,21 +8331,21 @@
                 <a:latin typeface="Inter"/>
                 <a:ea typeface="Inter"/>
               </a:rPr>
-              <a:t>Xid 94 is a correctable ECC error. It tells you something went wrong; it does not tell you what to do.</a:t>
-            </a:r>
-            <a:endParaRPr/>
-          </a:p>
-        </p:txBody>
-      </p:sp>
-      <p:sp>
-        <p:nvSpPr>
-          <p:cNvPr id="186" name=""/>
+              <a:t>Xid 94 reports a contained memory error. The code alone does not establish whether hardware repair is required.</a:t>
+            </a:r>
+            <a:endParaRPr/>
+          </a:p>
+        </p:txBody>
+      </p:sp>
+      <p:sp>
+        <p:nvSpPr>
+          <p:cNvPr id="223" name=""/>
           <p:cNvSpPr/>
           <p:nvPr/>
         </p:nvSpPr>
         <p:spPr>
           <a:xfrm rot="0" flipH="0" flipV="0">
-            <a:off x="7315200" y="2838450"/>
+            <a:off x="7315200" y="3133725"/>
             <a:ext cx="57150" cy="57150"/>
           </a:xfrm>
           <a:prstGeom prst="roundRect">
@@ -7133,22 +8360,19 @@
         </p:spPr>
         <p:txBody>
           <a:bodyPr/>
-          <a:p>
-            <a:pPr/>
-            <a:endParaRPr/>
-          </a:p>
-        </p:txBody>
-      </p:sp>
-      <p:sp>
-        <p:nvSpPr>
-          <p:cNvPr id="187" name="" descr="{&quot;isTemplate&quot;:true,&quot;type&quot;:&quot;text&quot;}"/>
-          <p:cNvSpPr txBox="1"/>
-          <p:nvPr/>
-        </p:nvSpPr>
-        <p:spPr>
-          <a:xfrm rot="0" flipH="0" flipV="0">
-            <a:off x="7486650" y="2743200"/>
-            <a:ext cx="3981450" cy="895350"/>
+          <a:p/>
+        </p:txBody>
+      </p:sp>
+      <p:sp>
+        <p:nvSpPr>
+          <p:cNvPr id="224" name="" descr="{&quot;isTemplate&quot;:true,&quot;type&quot;:&quot;text&quot;}"/>
+          <p:cNvSpPr txBox="1"/>
+          <p:nvPr/>
+        </p:nvSpPr>
+        <p:spPr>
+          <a:xfrm rot="0" flipH="0" flipV="0">
+            <a:off x="7486650" y="3038475"/>
+            <a:ext cx="3981450" cy="600075"/>
           </a:xfrm>
           <a:prstGeom prst="rect"/>
         </p:spPr>
@@ -7170,15 +8394,15 @@
                 <a:latin typeface="Inter"/>
                 <a:ea typeface="Inter"/>
               </a:rPr>
-              <a:t>What separates the two nodes is how often the code fired in 30 days, and whether correctable ECC is rising at the same time.</a:t>
-            </a:r>
-            <a:endParaRPr/>
-          </a:p>
-        </p:txBody>
-      </p:sp>
-      <p:sp>
-        <p:nvSpPr>
-          <p:cNvPr id="188" name=""/>
+              <a:t>The two nodes differ in their 30-day Xid count and the direction of correctable ECC.</a:t>
+            </a:r>
+            <a:endParaRPr/>
+          </a:p>
+        </p:txBody>
+      </p:sp>
+      <p:sp>
+        <p:nvSpPr>
+          <p:cNvPr id="225" name=""/>
           <p:cNvSpPr/>
           <p:nvPr/>
         </p:nvSpPr>
@@ -7199,22 +8423,19 @@
         </p:spPr>
         <p:txBody>
           <a:bodyPr/>
-          <a:p>
-            <a:pPr/>
-            <a:endParaRPr/>
-          </a:p>
-        </p:txBody>
-      </p:sp>
-      <p:sp>
-        <p:nvSpPr>
-          <p:cNvPr id="189" name="" descr="{&quot;isTemplate&quot;:true,&quot;type&quot;:&quot;text&quot;}"/>
+          <a:p/>
+        </p:txBody>
+      </p:sp>
+      <p:sp>
+        <p:nvSpPr>
+          <p:cNvPr id="226" name="" descr="{&quot;isTemplate&quot;:true,&quot;type&quot;:&quot;text&quot;}"/>
           <p:cNvSpPr txBox="1"/>
           <p:nvPr/>
         </p:nvSpPr>
         <p:spPr>
           <a:xfrm rot="0" flipH="0" flipV="0">
             <a:off x="7486650" y="3790950"/>
-            <a:ext cx="3981450" cy="895350"/>
+            <a:ext cx="3981450" cy="600075"/>
           </a:xfrm>
           <a:prstGeom prst="rect"/>
         </p:spPr>
@@ -7236,21 +8457,21 @@
                 <a:latin typeface="Inter"/>
                 <a:ea typeface="Inter"/>
               </a:rPr>
-              <a:t>A lookup table maps one code to one verdict. Comparing a count against a trend needs something that can hold two numbers at once.</a:t>
-            </a:r>
-            <a:endParaRPr/>
-          </a:p>
-        </p:txBody>
-      </p:sp>
-      <p:sp>
-        <p:nvSpPr>
-          <p:cNvPr id="190" name=""/>
+              <a:t>The rule baseline uses weighted signature matches. These cases also require an assessment of severity over time.</a:t>
+            </a:r>
+            <a:endParaRPr/>
+          </a:p>
+        </p:txBody>
+      </p:sp>
+      <p:sp>
+        <p:nvSpPr>
+          <p:cNvPr id="227" name=""/>
           <p:cNvSpPr/>
           <p:nvPr/>
         </p:nvSpPr>
         <p:spPr>
           <a:xfrm rot="0" flipH="0" flipV="0">
-            <a:off x="7315200" y="4895850"/>
+            <a:off x="7315200" y="4600575"/>
             <a:ext cx="4191000" cy="9525"/>
           </a:xfrm>
           <a:prstGeom prst="rect">
@@ -7263,21 +8484,18 @@
         </p:spPr>
         <p:txBody>
           <a:bodyPr/>
-          <a:p>
-            <a:pPr/>
-            <a:endParaRPr/>
-          </a:p>
-        </p:txBody>
-      </p:sp>
-      <p:sp>
-        <p:nvSpPr>
-          <p:cNvPr id="191" name="" descr="{&quot;isTemplate&quot;:true,&quot;type&quot;:&quot;text&quot;}"/>
-          <p:cNvSpPr txBox="1"/>
-          <p:nvPr/>
-        </p:nvSpPr>
-        <p:spPr>
-          <a:xfrm rot="0" flipH="0" flipV="0">
-            <a:off x="7315200" y="5114925"/>
+          <a:p/>
+        </p:txBody>
+      </p:sp>
+      <p:sp>
+        <p:nvSpPr>
+          <p:cNvPr id="228" name="" descr="{&quot;isTemplate&quot;:true,&quot;type&quot;:&quot;text&quot;}"/>
+          <p:cNvSpPr txBox="1"/>
+          <p:nvPr/>
+        </p:nvSpPr>
+        <p:spPr>
+          <a:xfrm rot="0" flipH="0" flipV="0">
+            <a:off x="7315200" y="4819650"/>
             <a:ext cx="4191000" cy="666750"/>
           </a:xfrm>
           <a:prstGeom prst="rect"/>
@@ -7300,22 +8518,22 @@
                 <a:latin typeface="Inter"/>
                 <a:ea typeface="Inter"/>
               </a:rPr>
-              <a:t>The code alone cannot choose between them. The 30-day trend can.</a:t>
-            </a:r>
-            <a:endParaRPr/>
-          </a:p>
-        </p:txBody>
-      </p:sp>
-      <p:sp>
-        <p:nvSpPr>
-          <p:cNvPr id="192" name="" descr="{&quot;isTemplate&quot;:true,&quot;type&quot;:&quot;text&quot;}"/>
+              <a:t>The 30-day history changes the repair assessment</a:t>
+            </a:r>
+            <a:endParaRPr/>
+          </a:p>
+        </p:txBody>
+      </p:sp>
+      <p:sp>
+        <p:nvSpPr>
+          <p:cNvPr id="229" name="" descr="{&quot;isTemplate&quot;:true,&quot;type&quot;:&quot;text&quot;}"/>
           <p:cNvSpPr txBox="1"/>
           <p:nvPr/>
         </p:nvSpPr>
         <p:spPr>
           <a:xfrm rot="0" flipH="0" flipV="0">
             <a:off x="685800" y="6381750"/>
-            <a:ext cx="2609850" cy="161925"/>
+            <a:ext cx="2571750" cy="161925"/>
           </a:xfrm>
           <a:prstGeom prst="rect"/>
         </p:spPr>
@@ -7335,15 +8553,15 @@
                 <a:latin typeface="Inter"/>
                 <a:ea typeface="Inter"/>
               </a:rPr>
-              <a:t>Training Failure Triage · AI Builder Cup 2026</a:t>
-            </a:r>
-            <a:endParaRPr/>
-          </a:p>
-        </p:txBody>
-      </p:sp>
-      <p:sp>
-        <p:nvSpPr>
-          <p:cNvPr id="193" name="" descr="{&quot;isTemplate&quot;:true,&quot;type&quot;:&quot;text&quot;}"/>
+              <a:t>Training Failure Triage, AI Builder Cup 2026</a:t>
+            </a:r>
+            <a:endParaRPr/>
+          </a:p>
+        </p:txBody>
+      </p:sp>
+      <p:sp>
+        <p:nvSpPr>
+          <p:cNvPr id="230" name="" descr="{&quot;isTemplate&quot;:true,&quot;type&quot;:&quot;text&quot;}"/>
           <p:cNvSpPr txBox="1"/>
           <p:nvPr/>
         </p:nvSpPr>
@@ -7370,7 +8588,7 @@
                 <a:latin typeface="JetBrains Mono"/>
                 <a:ea typeface="JetBrains Mono"/>
               </a:rPr>
-              <a:t>04 / 14</a:t>
+              <a:t>04 / 15</a:t>
             </a:r>
             <a:endParaRPr/>
           </a:p>
@@ -7386,7 +8604,7 @@
   <p:cSld>
     <p:spTree>
       <p:nvGrpSpPr>
-        <p:cNvPr id="194" name="" descr="// 05 · 同一个码，相反的结论 —— 巨型数字 + 全宽证据条&#10;const FONT = 'Inter, &quot;Helvetica Neue&quot;, Arial, sans-serif';&#10;const MONO = '&quot;JetBrains Mono&quot;, &quot;SF Mono&quot;, Menlo, monospace';&#10;const INK = '#0B1220';&#10;const RED = '#E5484D';&#10;const GREEN = '#16B981';&#10;const DIM = '#64748B';&#10;const BODY = '#1A2434';&#10;&#10;const PAIR = [&#10;    {&#10;        big: '1', node: 'lyg2103', tint: 'rgba(22,185,129,0.07)', bar: GREEN, color: GREEN,&#10;        l1: 'Xid 94 in the last 30 days', l2: '1 correctable ECC event, flat', chip: 'hardware_watch · no RMA',&#10;    },&#10;    {&#10;        big: '53', node: 'lyg2112', tint: 'rgba(229,72,77,0.07)', bar: RED, color: RED,&#10;        l1: 'Xid 94 in the last 30 days', l2: '118 correctable ECC events, still rising', chip: 'hardware · RMA filed',&#10;    },&#10;];&#10;&#10;&lt;Slide style={{ width: 1280, height: 720, padding: '18px 72px', background: '#FFFFFF', fontFamily: FONT }}&gt;&#10;    &lt;Box style={{ width: 1136, height: 92, flexDirection: 'row', justifyContent: 'space-between', alignItems: 'flex-end' }}&gt;&#10;        &lt;Text style={{ fontSize: 34, fontWeight: 700, color: INK, lineHeight: 1.3 }}&gt;Same code. Opposite conclusions.&lt;/Text&gt;&#10;        &lt;Text style={{ fontFamily: MONO, fontSize: 14, color: DIM, lineHeight: 1.45 }}&gt;lyg2103 vs lyg2112 · 30-day window&lt;/Text&gt;&#10;    &lt;/Box&gt;&#10;&#10;    &lt;Box style={{ width: 1136, height: 544 }}&gt;&#10;&#10;        &lt;Box style={{ width: 1136, height: 175, flexDirection: 'row', gap: 24 }}&gt;&#10;            &lt;Box style={{ width: 489, padding: 16, borderRadius: 8, background: PAIR[0].tint, borderLeft: '4px solid ' + PAIR[0].bar, flexDirection: 'row', alignItems: 'center', gap: 18 }}&gt;&#10;                &lt;Text style={{ fontFamily: MONO, fontSize: 104, fontWeight: 700, color: PAIR[0].color, lineHeight: 1 }}&gt;{PAIR[0].big}&lt;/Text&gt;&#10;                &lt;Box style={{ gap: 4 }}&gt;&#10;                    &lt;Text style={{ fontFamily: MONO, fontSize: 18, fontWeight: 700, color: INK, lineHeight: 1.4 }}&gt;{PAIR[0].node}&lt;/Text&gt;&#10;                    &lt;Text style={{ fontSize: 14, color: DIM, lineHeight: 1.5 }}&gt;{PAIR[0].l1}&lt;/Text&gt;&#10;                    &lt;Text style={{ fontSize: 14, color: DIM, lineHeight: 1.5 }}&gt;{PAIR[0].l2}&lt;/Text&gt;&#10;                    &lt;Box style={{ marginTop: 6, paddingTop: 4, paddingBottom: 4, paddingLeft: 10, paddingRight: 10, borderRadius: 4, background: PAIR[0].bar }}&gt;&#10;                        &lt;Text style={{ fontFamily: MONO, fontSize: 13, color: '#FFFFFF' }}&gt;{PAIR[0].chip}&lt;/Text&gt;&#10;                    &lt;/Box&gt;&#10;                &lt;/Box&gt;&#10;            &lt;/Box&gt;&#10;&#10;            &lt;Box style={{ width: 623, padding: 16, borderRadius: 8, background: PAIR[1].tint, borderLeft: '4px solid ' + PAIR[1].bar, flexDirection: 'row', alignItems: 'center', gap: 18 }}&gt;&#10;                &lt;Text style={{ fontFamily: MONO, fontSize: 104, fontWeight: 700, color: PAIR[1].color, lineHeight: 1 }}&gt;{PAIR[1].big}&lt;/Text&gt;&#10;                &lt;Box style={{ gap: 4 }}&gt;&#10;                    &lt;Text style={{ fontFamily: MONO, fontSize: 18, fontWeight: 700, color: INK, lineHeight: 1.4 }}&gt;{PAIR[1].node}&lt;/Text&gt;&#10;                    &lt;Text style={{ fontSize: 14, color: DIM, lineHeight: 1.5 }}&gt;{PAIR[1].l1}&lt;/Text&gt;&#10;                    &lt;Text style={{ fontSize: 14, color: DIM, lineHeight: 1.5 }}&gt;{PAIR[1].l2}&lt;/Text&gt;&#10;                    &lt;Box style={{ marginTop: 6, paddingTop: 4, paddingBottom: 4, paddingLeft: 10, paddingRight: 10, borderRadius: 4, background: PAIR[1].bar }}&gt;&#10;                        &lt;Text style={{ fontFamily: MONO, fontSize: 13, color: '#FFFFFF' }}&gt;{PAIR[1].chip}&lt;/Text&gt;&#10;                    &lt;/Box&gt;&#10;                &lt;/Box&gt;&#10;            &lt;/Box&gt;&#10;        &lt;/Box&gt;&#10;&#10;        {/* 05 · 两行各自的裁图，中间明写省略了哪两行。&#10;            原来是「前五行」一张宽条 —— 那一版节点是并排的小卡片，五行只要 268px 高；&#10;            现在的值班页改成单栏后，每行要放名字 / 规格 / 状态 / 任务 / 异常信号，&#10;            五行有 551px 高，塞不进这个 3.85:1 的条里。&#10;            所以改成各裁一行、上下摆开，并**说清楚中间跳过了两行** ——&#10;            把 lyg2103 与 lyg2112 拼成相邻的两行，是拿画面造一个不存在的相邻关系。 */}&#10;        &lt;Box style={{ width: 1136, height: 291, marginTop: 16, alignItems: 'center' }}&gt;&#10;            &lt;Image src='assets/crop-node-lyg2103.png' style={{ width: 1120, height: 116, border: '1px solid #E9EDF4' }} /&gt;&#10;            &lt;Box style={{ width: 1120, height: 15, justifyContent: 'center' }}&gt;&#10;                &lt;Text style={{ fontSize: 11, color: DIM, lineHeight: 1.3 }}&gt;&#10;                    two rows in between (lyg2107, lyg2108), omitted — both rows above are from the same list&#10;                &lt;/Text&gt;&#10;            &lt;/Box&gt;&#10;            &lt;Image src='assets/crop-node-lyg2112.png' style={{ width: 1120, height: 158, border: '1px solid #E9EDF4' }} /&gt;&#10;        &lt;/Box&gt;&#10;&#10;        &lt;Box style={{ width: 1136, height: 46, marginTop: 16, justifyContent: 'center' }}&gt;&#10;            &lt;Text style={{ fontSize: 20, fontWeight: 600, color: BODY, lineHeight: 1.45 }}&gt;&#10;                Both nodes reported Xid 94. What separated them was &lt;span style={{ color: INK }}&gt;how often it fired, and whether the count was still climbing&lt;/span&gt;.&#10;            &lt;/Text&gt;&#10;        &lt;/Box&gt;&#10;&#10;    &lt;/Box&gt;&#10;&#10;    &lt;Box style={{ width: 1136, height: 48, flexDirection: 'row', justifyContent: 'space-between', alignItems: 'center' }}&gt;&#10;        &lt;Text style={{ fontSize: 14, color: DIM }}&gt;Both rows read live from the cluster tab, over the same 30-day window&lt;/Text&gt;&#10;        &lt;Text style={{ fontFamily: MONO, fontSize: 14, color: DIM }}&gt;05 / 14&lt;/Text&gt;&#10;    &lt;/Box&gt;&#10;&lt;/Slide&gt;&#10;"/>
+        <p:cNvPr id="231" name="" descr="// 05: large event counts and separate node-row evidence.&#10;const FONT = 'Inter, &quot;Helvetica Neue&quot;, Arial, sans-serif';&#10;const MONO = '&quot;JetBrains Mono&quot;, &quot;SF Mono&quot;, Menlo, monospace';&#10;const INK = '#0B1220';&#10;const RED = '#E5484D';&#10;const GREEN = '#16B981';&#10;const DIM = '#64748B';&#10;const BODY = '#1A2434';&#10;&#10;const PAIR = [&#10;    {&#10;        big: '1', node: 'lyg2103', tint: 'rgba(22,185,129,0.07)', bar: GREEN, color: GREEN,&#10;        l1: 'Xid 94 in the last 30 days', l2: 'Correctable ECC 1, flat trend', chip: 'hardware_watch, no RMA',&#10;    },&#10;    {&#10;        big: '53', node: 'lyg2112', tint: 'rgba(229,72,77,0.07)', bar: RED, color: RED,&#10;        l1: 'Xid 94 in the last 30 days', l2: 'Correctable ECC 118, rising trend', chip: 'hardware, RMA recommended',&#10;    },&#10;];&#10;&#10;&lt;Slide style={{ width: 1280, height: 720, padding: '18px 72px', background: '#FFFFFF', fontFamily: FONT }}&gt;&#10;    &lt;Box style={{ width: 1136, height: 92, flexDirection: 'row', justifyContent: 'space-between', alignItems: 'flex-end' }}&gt;&#10;        &lt;Text style={{ fontSize: 34, fontWeight: 700, color: INK, lineHeight: 1.3 }}&gt;Xid 94 frequency and ECC trends&lt;/Text&gt;&#10;        &lt;Text style={{ fontFamily: MONO, fontSize: 14, color: DIM, lineHeight: 1.45 }}&gt;lyg2103 vs lyg2112, 30-day window&lt;/Text&gt;&#10;    &lt;/Box&gt;&#10;&#10;    &lt;Box style={{ width: 1136, height: 544 }}&gt;&#10;&#10;        &lt;Box style={{ width: 1136, height: 175, flexDirection: 'row', gap: 24 }}&gt;&#10;            &lt;Box style={{ width: 489, padding: 16, borderRadius: 8, background: PAIR[0].tint, borderLeft: '4px solid ' + PAIR[0].bar, flexDirection: 'row', alignItems: 'center', gap: 18 }}&gt;&#10;                &lt;Text style={{ fontFamily: MONO, fontSize: 104, fontWeight: 700, color: PAIR[0].color, lineHeight: 1 }}&gt;{PAIR[0].big}&lt;/Text&gt;&#10;                &lt;Box style={{ gap: 4 }}&gt;&#10;                    &lt;Text style={{ fontFamily: MONO, fontSize: 18, fontWeight: 700, color: INK, lineHeight: 1.4 }}&gt;{PAIR[0].node}&lt;/Text&gt;&#10;                    &lt;Text style={{ fontSize: 14, color: DIM, lineHeight: 1.5 }}&gt;{PAIR[0].l1}&lt;/Text&gt;&#10;                    &lt;Text style={{ fontSize: 14, color: DIM, lineHeight: 1.5 }}&gt;{PAIR[0].l2}&lt;/Text&gt;&#10;                    &lt;Box style={{ marginTop: 6, paddingTop: 4, paddingBottom: 4, paddingLeft: 10, paddingRight: 10, borderRadius: 4, background: PAIR[0].bar }}&gt;&#10;                        &lt;Text style={{ fontFamily: MONO, fontSize: 13, color: '#FFFFFF' }}&gt;{PAIR[0].chip}&lt;/Text&gt;&#10;                    &lt;/Box&gt;&#10;                &lt;/Box&gt;&#10;            &lt;/Box&gt;&#10;&#10;            &lt;Box style={{ width: 623, padding: 16, borderRadius: 8, background: PAIR[1].tint, borderLeft: '4px solid ' + PAIR[1].bar, flexDirection: 'row', alignItems: 'center', gap: 18 }}&gt;&#10;                &lt;Text style={{ fontFamily: MONO, fontSize: 104, fontWeight: 700, color: PAIR[1].color, lineHeight: 1 }}&gt;{PAIR[1].big}&lt;/Text&gt;&#10;                &lt;Box style={{ gap: 4 }}&gt;&#10;                    &lt;Text style={{ fontFamily: MONO, fontSize: 18, fontWeight: 700, color: INK, lineHeight: 1.4 }}&gt;{PAIR[1].node}&lt;/Text&gt;&#10;                    &lt;Text style={{ fontSize: 14, color: DIM, lineHeight: 1.5 }}&gt;{PAIR[1].l1}&lt;/Text&gt;&#10;                    &lt;Text style={{ fontSize: 14, color: DIM, lineHeight: 1.5 }}&gt;{PAIR[1].l2}&lt;/Text&gt;&#10;                    &lt;Box style={{ marginTop: 6, paddingTop: 4, paddingBottom: 4, paddingLeft: 10, paddingRight: 10, borderRadius: 4, background: PAIR[1].bar }}&gt;&#10;                        &lt;Text style={{ fontFamily: MONO, fontSize: 13, color: '#FFFFFF' }}&gt;{PAIR[1].chip}&lt;/Text&gt;&#10;                    &lt;/Box&gt;&#10;                &lt;/Box&gt;&#10;            &lt;/Box&gt;&#10;        &lt;/Box&gt;&#10;&#10;        {/* Separate crops retain the source rows and identify the omitted intervening rows. */}&#10;        &lt;Box style={{ width: 1136, height: 291, marginTop: 16, alignItems: 'center' }}&gt;&#10;            &lt;Image src='assets/crop-node-lyg2103.png' style={{ width: 1120, height: 116, border: '1px solid #E9EDF4' }} /&gt;&#10;            &lt;Box style={{ width: 1120, height: 15, justifyContent: 'center' }}&gt;&#10;                &lt;Text style={{ fontSize: 11, color: DIM, lineHeight: 1.3 }}&gt;&#10;                    The source list has two intervening rows, lyg2107 and lyg2108, omitted here&#10;                &lt;/Text&gt;&#10;            &lt;/Box&gt;&#10;            &lt;Image src='assets/crop-node-lyg2112.png' style={{ width: 1120, height: 158, border: '1px solid #E9EDF4' }} /&gt;&#10;        &lt;/Box&gt;&#10;&#10;        &lt;Box style={{ width: 1136, height: 46, marginTop: 16, justifyContent: 'center' }}&gt;&#10;            &lt;Text style={{ fontSize: 20, fontWeight: 600, color: BODY, lineHeight: 1.45 }}&gt;&#10;                Both nodes report Xid 94. &lt;span style={{ color: INK }}&gt;lyg2112 has more frequent events and rising correctable ECC&lt;/span&gt;.&#10;            &lt;/Text&gt;&#10;        &lt;/Box&gt;&#10;&#10;    &lt;/Box&gt;&#10;&#10;    &lt;Box style={{ width: 1136, height: 48, flexDirection: 'row', justifyContent: 'space-between', alignItems: 'center' }}&gt;&#10;        &lt;Text style={{ fontSize: 14, color: DIM }}&gt;English UI capture from the local seed replay, using the same 30-day window&lt;/Text&gt;&#10;        &lt;Text style={{ fontFamily: MONO, fontSize: 14, color: DIM }}&gt;05 / 15&lt;/Text&gt;&#10;    &lt;/Box&gt;&#10;&lt;/Slide&gt;&#10;"/>
         <p:cNvGrpSpPr/>
         <p:nvPr/>
       </p:nvGrpSpPr>
@@ -7400,7 +8618,7 @@
       </p:grpSpPr>
       <p:sp>
         <p:nvSpPr>
-          <p:cNvPr id="195" name=""/>
+          <p:cNvPr id="232" name=""/>
           <p:cNvSpPr/>
           <p:nvPr/>
         </p:nvSpPr>
@@ -7424,14 +8642,14 @@
       </p:sp>
       <p:sp>
         <p:nvSpPr>
-          <p:cNvPr id="196" name="" descr="{&quot;isTemplate&quot;:true,&quot;type&quot;:&quot;text&quot;}"/>
+          <p:cNvPr id="233" name="" descr="{&quot;isTemplate&quot;:true,&quot;type&quot;:&quot;text&quot;}"/>
           <p:cNvSpPr txBox="1"/>
           <p:nvPr/>
         </p:nvSpPr>
         <p:spPr>
           <a:xfrm rot="0" flipH="0" flipV="0">
             <a:off x="685800" y="533400"/>
-            <a:ext cx="5362575" cy="514350"/>
+            <a:ext cx="5095875" cy="514350"/>
           </a:xfrm>
           <a:prstGeom prst="rect"/>
         </p:spPr>
@@ -7451,22 +8669,22 @@
                 <a:latin typeface="Inter"/>
                 <a:ea typeface="Inter"/>
               </a:rPr>
-              <a:t>Same code. Opposite conclusions.</a:t>
-            </a:r>
-            <a:endParaRPr/>
-          </a:p>
-        </p:txBody>
-      </p:sp>
-      <p:sp>
-        <p:nvSpPr>
-          <p:cNvPr id="197" name="" descr="{&quot;isTemplate&quot;:true,&quot;type&quot;:&quot;text&quot;}"/>
-          <p:cNvSpPr txBox="1"/>
-          <p:nvPr/>
-        </p:nvSpPr>
-        <p:spPr>
-          <a:xfrm rot="0" flipH="0" flipV="0">
-            <a:off x="8772525" y="809625"/>
-            <a:ext cx="2733675" cy="238125"/>
+              <a:t>Xid 94 frequency and ECC trends</a:t>
+            </a:r>
+            <a:endParaRPr/>
+          </a:p>
+        </p:txBody>
+      </p:sp>
+      <p:sp>
+        <p:nvSpPr>
+          <p:cNvPr id="234" name="" descr="{&quot;isTemplate&quot;:true,&quot;type&quot;:&quot;text&quot;}"/>
+          <p:cNvSpPr txBox="1"/>
+          <p:nvPr/>
+        </p:nvSpPr>
+        <p:spPr>
+          <a:xfrm rot="0" flipH="0" flipV="0">
+            <a:off x="8848725" y="809625"/>
+            <a:ext cx="2657475" cy="238125"/>
           </a:xfrm>
           <a:prstGeom prst="rect"/>
         </p:spPr>
@@ -7486,15 +8704,15 @@
                 <a:latin typeface="JetBrains Mono"/>
                 <a:ea typeface="JetBrains Mono"/>
               </a:rPr>
-              <a:t>lyg2103 vs lyg2112 · 30-day window</a:t>
-            </a:r>
-            <a:endParaRPr/>
-          </a:p>
-        </p:txBody>
-      </p:sp>
-      <p:sp>
-        <p:nvSpPr>
-          <p:cNvPr id="198" name=""/>
+              <a:t>lyg2103 vs lyg2112, 30-day window</a:t>
+            </a:r>
+            <a:endParaRPr/>
+          </a:p>
+        </p:txBody>
+      </p:sp>
+      <p:sp>
+        <p:nvSpPr>
+          <p:cNvPr id="235" name=""/>
           <p:cNvSpPr/>
           <p:nvPr/>
         </p:nvSpPr>
@@ -7522,7 +8740,7 @@
       </p:sp>
       <p:sp>
         <p:nvSpPr>
-          <p:cNvPr id="199" name=""/>
+          <p:cNvPr id="236" name=""/>
           <p:cNvSpPr/>
           <p:nvPr/>
         </p:nvSpPr>
@@ -7579,7 +8797,7 @@
       </p:sp>
       <p:sp>
         <p:nvSpPr>
-          <p:cNvPr id="200" name="" descr="{&quot;isTemplate&quot;:true,&quot;type&quot;:&quot;text&quot;}"/>
+          <p:cNvPr id="237" name="" descr="{&quot;isTemplate&quot;:true,&quot;type&quot;:&quot;text&quot;}"/>
           <p:cNvSpPr txBox="1"/>
           <p:nvPr/>
         </p:nvSpPr>
@@ -7614,14 +8832,14 @@
       </p:sp>
       <p:sp>
         <p:nvSpPr>
-          <p:cNvPr id="201" name="" descr="{&quot;isTemplate&quot;:true,&quot;type&quot;:&quot;text&quot;}"/>
+          <p:cNvPr id="238" name="" descr="{&quot;isTemplate&quot;:true,&quot;type&quot;:&quot;text&quot;}"/>
           <p:cNvSpPr txBox="1"/>
           <p:nvPr/>
         </p:nvSpPr>
         <p:spPr>
           <a:xfrm rot="0" flipH="0" flipV="0">
             <a:off x="1647825" y="1285875"/>
-            <a:ext cx="1914525" cy="295275"/>
+            <a:ext cx="1838325" cy="295275"/>
           </a:xfrm>
           <a:prstGeom prst="rect"/>
         </p:spPr>
@@ -7649,14 +8867,14 @@
       </p:sp>
       <p:sp>
         <p:nvSpPr>
-          <p:cNvPr id="202" name="" descr="{&quot;isTemplate&quot;:true,&quot;type&quot;:&quot;text&quot;}"/>
+          <p:cNvPr id="239" name="" descr="{&quot;isTemplate&quot;:true,&quot;type&quot;:&quot;text&quot;}"/>
           <p:cNvSpPr txBox="1"/>
           <p:nvPr/>
         </p:nvSpPr>
         <p:spPr>
           <a:xfrm rot="0" flipH="0" flipV="0">
             <a:off x="1647825" y="1619250"/>
-            <a:ext cx="1914525" cy="247650"/>
+            <a:ext cx="1838325" cy="247650"/>
           </a:xfrm>
           <a:prstGeom prst="rect"/>
         </p:spPr>
@@ -7684,14 +8902,14 @@
       </p:sp>
       <p:sp>
         <p:nvSpPr>
-          <p:cNvPr id="203" name="" descr="{&quot;isTemplate&quot;:true,&quot;type&quot;:&quot;text&quot;}"/>
+          <p:cNvPr id="240" name="" descr="{&quot;isTemplate&quot;:true,&quot;type&quot;:&quot;text&quot;}"/>
           <p:cNvSpPr txBox="1"/>
           <p:nvPr/>
         </p:nvSpPr>
         <p:spPr>
           <a:xfrm rot="0" flipH="0" flipV="0">
             <a:off x="1647825" y="1905000"/>
-            <a:ext cx="1914525" cy="247650"/>
+            <a:ext cx="1838325" cy="247650"/>
           </a:xfrm>
           <a:prstGeom prst="rect"/>
         </p:spPr>
@@ -7711,22 +8929,22 @@
                 <a:latin typeface="Inter"/>
                 <a:ea typeface="Inter"/>
               </a:rPr>
-              <a:t>1 correctable ECC event, flat</a:t>
-            </a:r>
-            <a:endParaRPr/>
-          </a:p>
-        </p:txBody>
-      </p:sp>
-      <p:sp>
-        <p:nvSpPr>
-          <p:cNvPr id="204" name=""/>
+              <a:t>Correctable ECC 1, flat trend</a:t>
+            </a:r>
+            <a:endParaRPr/>
+          </a:p>
+        </p:txBody>
+      </p:sp>
+      <p:sp>
+        <p:nvSpPr>
+          <p:cNvPr id="241" name=""/>
           <p:cNvSpPr/>
           <p:nvPr/>
         </p:nvSpPr>
         <p:spPr>
           <a:xfrm rot="0" flipH="0" flipV="0">
             <a:off x="1647825" y="2247900"/>
-            <a:ext cx="1914525" cy="228600"/>
+            <a:ext cx="1838325" cy="228600"/>
           </a:xfrm>
           <a:prstGeom prst="roundRect">
             <a:avLst>
@@ -7745,14 +8963,14 @@
       </p:sp>
       <p:sp>
         <p:nvSpPr>
-          <p:cNvPr id="205" name="" descr="{&quot;isTemplate&quot;:true,&quot;type&quot;:&quot;text&quot;}"/>
+          <p:cNvPr id="242" name="" descr="{&quot;isTemplate&quot;:true,&quot;type&quot;:&quot;text&quot;}"/>
           <p:cNvSpPr txBox="1"/>
           <p:nvPr/>
         </p:nvSpPr>
         <p:spPr>
           <a:xfrm rot="0" flipH="0" flipV="0">
             <a:off x="1743075" y="2286000"/>
-            <a:ext cx="1724025" cy="152400"/>
+            <a:ext cx="1647825" cy="152400"/>
           </a:xfrm>
           <a:prstGeom prst="rect"/>
         </p:spPr>
@@ -7772,15 +8990,15 @@
                 <a:latin typeface="JetBrains Mono"/>
                 <a:ea typeface="JetBrains Mono"/>
               </a:rPr>
-              <a:t>hardware_watch · no RMA</a:t>
-            </a:r>
-            <a:endParaRPr/>
-          </a:p>
-        </p:txBody>
-      </p:sp>
-      <p:sp>
-        <p:nvSpPr>
-          <p:cNvPr id="206" name=""/>
+              <a:t>hardware_watch, no RMA</a:t>
+            </a:r>
+            <a:endParaRPr/>
+          </a:p>
+        </p:txBody>
+      </p:sp>
+      <p:sp>
+        <p:nvSpPr>
+          <p:cNvPr id="243" name=""/>
           <p:cNvSpPr/>
           <p:nvPr/>
         </p:nvSpPr>
@@ -7808,7 +9026,7 @@
       </p:sp>
       <p:sp>
         <p:nvSpPr>
-          <p:cNvPr id="207" name=""/>
+          <p:cNvPr id="244" name=""/>
           <p:cNvSpPr/>
           <p:nvPr/>
         </p:nvSpPr>
@@ -7865,7 +9083,7 @@
       </p:sp>
       <p:sp>
         <p:nvSpPr>
-          <p:cNvPr id="208" name="" descr="{&quot;isTemplate&quot;:true,&quot;type&quot;:&quot;text&quot;}"/>
+          <p:cNvPr id="245" name="" descr="{&quot;isTemplate&quot;:true,&quot;type&quot;:&quot;text&quot;}"/>
           <p:cNvSpPr txBox="1"/>
           <p:nvPr/>
         </p:nvSpPr>
@@ -7900,14 +9118,14 @@
       </p:sp>
       <p:sp>
         <p:nvSpPr>
-          <p:cNvPr id="209" name="" descr="{&quot;isTemplate&quot;:true,&quot;type&quot;:&quot;text&quot;}"/>
+          <p:cNvPr id="246" name="" descr="{&quot;isTemplate&quot;:true,&quot;type&quot;:&quot;text&quot;}"/>
           <p:cNvSpPr txBox="1"/>
           <p:nvPr/>
         </p:nvSpPr>
         <p:spPr>
           <a:xfrm rot="0" flipH="0" flipV="0">
             <a:off x="7134225" y="1285875"/>
-            <a:ext cx="2305050" cy="295275"/>
+            <a:ext cx="2057400" cy="295275"/>
           </a:xfrm>
           <a:prstGeom prst="rect"/>
         </p:spPr>
@@ -7935,14 +9153,14 @@
       </p:sp>
       <p:sp>
         <p:nvSpPr>
-          <p:cNvPr id="210" name="" descr="{&quot;isTemplate&quot;:true,&quot;type&quot;:&quot;text&quot;}"/>
+          <p:cNvPr id="247" name="" descr="{&quot;isTemplate&quot;:true,&quot;type&quot;:&quot;text&quot;}"/>
           <p:cNvSpPr txBox="1"/>
           <p:nvPr/>
         </p:nvSpPr>
         <p:spPr>
           <a:xfrm rot="0" flipH="0" flipV="0">
             <a:off x="7134225" y="1619250"/>
-            <a:ext cx="2305050" cy="247650"/>
+            <a:ext cx="2057400" cy="247650"/>
           </a:xfrm>
           <a:prstGeom prst="rect"/>
         </p:spPr>
@@ -7970,14 +9188,14 @@
       </p:sp>
       <p:sp>
         <p:nvSpPr>
-          <p:cNvPr id="211" name="" descr="{&quot;isTemplate&quot;:true,&quot;type&quot;:&quot;text&quot;}"/>
+          <p:cNvPr id="248" name="" descr="{&quot;isTemplate&quot;:true,&quot;type&quot;:&quot;text&quot;}"/>
           <p:cNvSpPr txBox="1"/>
           <p:nvPr/>
         </p:nvSpPr>
         <p:spPr>
           <a:xfrm rot="0" flipH="0" flipV="0">
             <a:off x="7134225" y="1905000"/>
-            <a:ext cx="2305050" cy="247650"/>
+            <a:ext cx="2057400" cy="247650"/>
           </a:xfrm>
           <a:prstGeom prst="rect"/>
         </p:spPr>
@@ -7997,22 +9215,22 @@
                 <a:latin typeface="Inter"/>
                 <a:ea typeface="Inter"/>
               </a:rPr>
-              <a:t>118 correctable ECC events, still rising</a:t>
-            </a:r>
-            <a:endParaRPr/>
-          </a:p>
-        </p:txBody>
-      </p:sp>
-      <p:sp>
-        <p:nvSpPr>
-          <p:cNvPr id="212" name=""/>
+              <a:t>Correctable ECC 118, rising trend</a:t>
+            </a:r>
+            <a:endParaRPr/>
+          </a:p>
+        </p:txBody>
+      </p:sp>
+      <p:sp>
+        <p:nvSpPr>
+          <p:cNvPr id="249" name=""/>
           <p:cNvSpPr/>
           <p:nvPr/>
         </p:nvSpPr>
         <p:spPr>
           <a:xfrm rot="0" flipH="0" flipV="0">
             <a:off x="7134225" y="2247900"/>
-            <a:ext cx="2305050" cy="228600"/>
+            <a:ext cx="2057400" cy="228600"/>
           </a:xfrm>
           <a:prstGeom prst="roundRect">
             <a:avLst>
@@ -8031,14 +9249,14 @@
       </p:sp>
       <p:sp>
         <p:nvSpPr>
-          <p:cNvPr id="213" name="" descr="{&quot;isTemplate&quot;:true,&quot;type&quot;:&quot;text&quot;}"/>
+          <p:cNvPr id="250" name="" descr="{&quot;isTemplate&quot;:true,&quot;type&quot;:&quot;text&quot;}"/>
           <p:cNvSpPr txBox="1"/>
           <p:nvPr/>
         </p:nvSpPr>
         <p:spPr>
           <a:xfrm rot="0" flipH="0" flipV="0">
             <a:off x="7229475" y="2286000"/>
-            <a:ext cx="2114550" cy="152400"/>
+            <a:ext cx="1866900" cy="152400"/>
           </a:xfrm>
           <a:prstGeom prst="rect"/>
         </p:spPr>
@@ -8058,15 +9276,15 @@
                 <a:latin typeface="JetBrains Mono"/>
                 <a:ea typeface="JetBrains Mono"/>
               </a:rPr>
-              <a:t>hardware · RMA filed</a:t>
-            </a:r>
-            <a:endParaRPr/>
-          </a:p>
-        </p:txBody>
-      </p:sp>
-      <p:sp>
-        <p:nvSpPr>
-          <p:cNvPr id="214" name=""/>
+              <a:t>hardware, RMA recommended</a:t>
+            </a:r>
+            <a:endParaRPr/>
+          </a:p>
+        </p:txBody>
+      </p:sp>
+      <p:sp>
+        <p:nvSpPr>
+          <p:cNvPr id="251" name=""/>
           <p:cNvSpPr/>
           <p:nvPr/>
         </p:nvSpPr>
@@ -8092,7 +9310,7 @@
       </p:sp>
       <p:pic>
         <p:nvPicPr>
-          <p:cNvPr id="215" name=""/>
+          <p:cNvPr id="252" name=""/>
           <p:cNvPicPr>
             <a:picLocks noChangeAspect="1"/>
           </p:cNvPicPr>
@@ -8117,7 +9335,7 @@
       </p:pic>
       <p:sp>
         <p:nvSpPr>
-          <p:cNvPr id="216" name="" descr="{&quot;isTemplate&quot;:true,&quot;type&quot;:&quot;text&quot;}"/>
+          <p:cNvPr id="253" name="" descr="{&quot;isTemplate&quot;:true,&quot;type&quot;:&quot;text&quot;}"/>
           <p:cNvSpPr txBox="1"/>
           <p:nvPr/>
         </p:nvSpPr>
@@ -8144,15 +9362,15 @@
                 <a:latin typeface="Inter"/>
                 <a:ea typeface="Inter"/>
               </a:rPr>
-              <a:t>two rows in between (lyg2107, lyg2108), omitted — both rows above are from the same list</a:t>
-            </a:r>
-            <a:endParaRPr/>
-          </a:p>
-        </p:txBody>
-      </p:sp>
-      <p:sp>
-        <p:nvSpPr>
-          <p:cNvPr id="217" name=""/>
+              <a:t>The source list has two intervening rows, lyg2107 and lyg2108, omitted here</a:t>
+            </a:r>
+            <a:endParaRPr/>
+          </a:p>
+        </p:txBody>
+      </p:sp>
+      <p:sp>
+        <p:nvSpPr>
+          <p:cNvPr id="254" name=""/>
           <p:cNvSpPr/>
           <p:nvPr/>
         </p:nvSpPr>
@@ -8178,7 +9396,7 @@
       </p:sp>
       <p:pic>
         <p:nvPicPr>
-          <p:cNvPr id="218" name=""/>
+          <p:cNvPr id="255" name=""/>
           <p:cNvPicPr>
             <a:picLocks noChangeAspect="1"/>
           </p:cNvPicPr>
@@ -8203,7 +9421,7 @@
       </p:pic>
       <p:sp>
         <p:nvSpPr>
-          <p:cNvPr id="219" name="" descr="{&quot;isTemplate&quot;:true,&quot;type&quot;:&quot;text&quot;}"/>
+          <p:cNvPr id="256" name="" descr="{&quot;isTemplate&quot;:true,&quot;type&quot;:&quot;text&quot;}"/>
           <p:cNvSpPr txBox="1"/>
           <p:nvPr/>
         </p:nvSpPr>
@@ -8230,7 +9448,7 @@
                 <a:latin typeface="Inter"/>
                 <a:ea typeface="Inter"/>
               </a:rPr>
-              <a:t xml:space="preserve">Both nodes reported Xid 94. What separated them was </a:t>
+              <a:t xml:space="preserve">Both nodes report Xid 94. </a:t>
             </a:r>
             <a:r>
               <a:rPr lang="en-US" sz="1500" b="1">
@@ -8240,7 +9458,7 @@
                 <a:latin typeface="Inter"/>
                 <a:ea typeface="Inter"/>
               </a:rPr>
-              <a:t>how often it fired, and whether the count was still climbing</a:t>
+              <a:t>lyg2112 has more frequent events and rising correctable ECC</a:t>
             </a:r>
             <a:r>
               <a:rPr lang="en-US" sz="1500" b="1">
@@ -8258,14 +9476,14 @@
       </p:sp>
       <p:sp>
         <p:nvSpPr>
-          <p:cNvPr id="220" name="" descr="{&quot;isTemplate&quot;:true,&quot;type&quot;:&quot;text&quot;}"/>
+          <p:cNvPr id="257" name="" descr="{&quot;isTemplate&quot;:true,&quot;type&quot;:&quot;text&quot;}"/>
           <p:cNvSpPr txBox="1"/>
           <p:nvPr/>
         </p:nvSpPr>
         <p:spPr>
           <a:xfrm rot="0" flipH="0" flipV="0">
             <a:off x="685800" y="6381750"/>
-            <a:ext cx="4219575" cy="161925"/>
+            <a:ext cx="4591050" cy="161925"/>
           </a:xfrm>
           <a:prstGeom prst="rect"/>
         </p:spPr>
@@ -8285,15 +9503,15 @@
                 <a:latin typeface="Inter"/>
                 <a:ea typeface="Inter"/>
               </a:rPr>
-              <a:t>Both rows read live from the cluster tab, over the same 30-day window</a:t>
-            </a:r>
-            <a:endParaRPr/>
-          </a:p>
-        </p:txBody>
-      </p:sp>
-      <p:sp>
-        <p:nvSpPr>
-          <p:cNvPr id="221" name="" descr="{&quot;isTemplate&quot;:true,&quot;type&quot;:&quot;text&quot;}"/>
+              <a:t>English UI capture from the local seed replay, using the same 30-day window</a:t>
+            </a:r>
+            <a:endParaRPr/>
+          </a:p>
+        </p:txBody>
+      </p:sp>
+      <p:sp>
+        <p:nvSpPr>
+          <p:cNvPr id="258" name="" descr="{&quot;isTemplate&quot;:true,&quot;type&quot;:&quot;text&quot;}"/>
           <p:cNvSpPr txBox="1"/>
           <p:nvPr/>
         </p:nvSpPr>
@@ -8320,7 +9538,7 @@
                 <a:latin typeface="JetBrains Mono"/>
                 <a:ea typeface="JetBrains Mono"/>
               </a:rPr>
-              <a:t>05 / 14</a:t>
+              <a:t>05 / 15</a:t>
             </a:r>
             <a:endParaRPr/>
           </a:p>
@@ -8336,7 +9554,7 @@
   <p:cSld>
     <p:spTree>
       <p:nvGrpSpPr>
-        <p:cNvPr id="222" name=""/>
+        <p:cNvPr id="259" name="" descr="// 06: workflow section with the historical 17-call patrol measurement.&#10;const FONT = 'Inter, &quot;Helvetica Neue&quot;, Arial, sans-serif';&#10;const MONO = '&quot;JetBrains Mono&quot;, &quot;SF Mono&quot;, Menlo, monospace';&#10;const BLUE = '#2F6BFF';&#10;const DEEP = 'linear-gradient(160deg, #0B1220 0%, #131E33 62%, #0B1220 100%)';&#10;&#10;const GRID_X = [0, 71, 142, 213, 284, 355, 426, 497, 568, 639, 710, 781, 852, 923, 994, 1065, 1136];&#10;const GRID_Y = [0, 64, 128, 192, 256, 320, 384, 448, 512, 576];&#10;&#10;&lt;Slide style={{ width: 1280, height: 720, padding: '72px', background: DEEP, fontFamily: FONT }}&gt;&#10;    &lt;Box style={{ position: 'relative', width: 1136, height: 576 }}&gt;&#10;&#10;        &lt;Box style={{ position: 'absolute', left: 0, top: 0, width: 1136, height: 576 }}&gt;&#10;            &lt;svg width={1136} height={576} viewBox='0 0 1136 576'&gt;&#10;                {GRID_X.map((x, i) =&gt; (&#10;                    &lt;line key={'gx' + i} x1={x} y1={0} x2={x} y2={576} stroke='rgba(255,255,255,0.045)' strokeWidth={1} /&gt;&#10;                ))}&#10;                {GRID_Y.map((y, i) =&gt; (&#10;                    &lt;line key={'gy' + i} x1={0} y1={y} x2={1136} y2={y} stroke='rgba(255,255,255,0.045)' strokeWidth={1} /&gt;&#10;                ))}&#10;            &lt;/svg&gt;&#10;        &lt;/Box&gt;&#10;&#10;        &lt;Box style={{ position: 'absolute', right: 0, top: 118, width: 620, alignItems: 'flex-end' }}&gt;&#10;            &lt;Text style={{ fontFamily: MONO, fontSize: 300, fontWeight: 700, color: 'rgba(47,107,255,0.17)', lineHeight: 1 }}&gt;17&lt;/Text&gt;&#10;        &lt;/Box&gt;&#10;&#10;        &lt;Box style={{ position: 'relative', width: 840, height: 576, justifyContent: 'center', gap: 18 }}&gt;&#10;            &lt;Text style={{ fontFamily: MONO, fontSize: 14, color: BLUE, letterSpacing: 3 }}&gt;CHAPTER 02&lt;/Text&gt;&#10;            &lt;Text style={{ fontSize: 64, fontWeight: 700, color: '#FFFFFF', lineHeight: 1.1 }}&gt;Application workflow&lt;/Text&gt;&#10;            &lt;Text style={{ fontSize: 24, color: '#94A3B8', lineHeight: 1.5 }}&gt;A patrol starts with a human click&lt;/Text&gt;&#10;            &lt;Box style={{ width: 88, height: 3, background: 'rgba(255,255,255,0.28)', marginTop: 14 }} /&gt;&#10;            &lt;Text style={{ fontSize: 18, color: '#C7D2E0', lineHeight: 1.65, width: 780 }}&gt;&#10;                The recorded demo patrol made &lt;span style={{ fontFamily: MONO, color: '#FFFFFF' }}&gt;17&lt;/span&gt; tool calls.&#10;                It inspected six nodes and consulted the knowledge base before taking low risk actions.&#10;                Tickets remain drafts and notifications remain queued. Each model attempt allows up to 12 turns,&#10;                and fallback carries completed calls into the next attempt.&#10;            &lt;/Text&gt;&#10;        &lt;/Box&gt;&#10;&#10;        &lt;Box style={{ position: 'absolute', left: 0, bottom: 0, width: 1136, flexDirection: 'row', justifyContent: 'flex-end' }}&gt;&#10;            &lt;Text style={{ fontFamily: MONO, fontSize: 14, color: 'rgba(255,255,255,0.45)' }}&gt;06 / 15&lt;/Text&gt;&#10;        &lt;/Box&gt;&#10;&#10;    &lt;/Box&gt;&#10;&lt;/Slide&gt;&#10;"/>
         <p:cNvGrpSpPr/>
         <p:nvPr/>
       </p:nvGrpSpPr>
@@ -8350,7 +9568,7 @@
       </p:grpSpPr>
       <p:sp>
         <p:nvSpPr>
-          <p:cNvPr id="223" name=""/>
+          <p:cNvPr id="260" name=""/>
           <p:cNvSpPr/>
           <p:nvPr/>
         </p:nvSpPr>
@@ -8380,15 +9598,12 @@
         </p:spPr>
         <p:txBody>
           <a:bodyPr/>
-          <a:p>
-            <a:pPr/>
-            <a:endParaRPr/>
-          </a:p>
+          <a:p/>
         </p:txBody>
       </p:sp>
       <p:pic>
         <p:nvPicPr>
-          <p:cNvPr id="224" name=""/>
+          <p:cNvPr id="261" name=""/>
           <p:cNvPicPr>
             <a:picLocks noChangeAspect="1"/>
           </p:cNvPicPr>
@@ -8419,7 +9634,7 @@
       </p:pic>
       <p:sp>
         <p:nvSpPr>
-          <p:cNvPr id="225" name="" descr="{&quot;isTemplate&quot;:true,&quot;type&quot;:&quot;text&quot;}"/>
+          <p:cNvPr id="262" name="" descr="{&quot;isTemplate&quot;:true,&quot;type&quot;:&quot;text&quot;}"/>
           <p:cNvSpPr txBox="1"/>
           <p:nvPr/>
         </p:nvSpPr>
@@ -8456,13 +9671,13 @@
       </p:sp>
       <p:sp>
         <p:nvSpPr>
-          <p:cNvPr id="226" name="" descr="{&quot;isTemplate&quot;:true,&quot;type&quot;:&quot;text&quot;}"/>
-          <p:cNvSpPr txBox="1"/>
-          <p:nvPr/>
-        </p:nvSpPr>
-        <p:spPr>
-          <a:xfrm rot="0" flipH="0" flipV="0">
-            <a:off x="685800" y="1800225"/>
+          <p:cNvPr id="263" name="" descr="{&quot;isTemplate&quot;:true,&quot;type&quot;:&quot;text&quot;}"/>
+          <p:cNvSpPr txBox="1"/>
+          <p:nvPr/>
+        </p:nvSpPr>
+        <p:spPr>
+          <a:xfrm rot="0" flipH="0" flipV="0">
+            <a:off x="685800" y="1628775"/>
             <a:ext cx="8001000" cy="161925"/>
           </a:xfrm>
           <a:prstGeom prst="rect"/>
@@ -8491,13 +9706,13 @@
       </p:sp>
       <p:sp>
         <p:nvSpPr>
-          <p:cNvPr id="227" name="" descr="{&quot;isTemplate&quot;:true,&quot;type&quot;:&quot;text&quot;}"/>
-          <p:cNvSpPr txBox="1"/>
-          <p:nvPr/>
-        </p:nvSpPr>
-        <p:spPr>
-          <a:xfrm rot="0" flipH="0" flipV="0">
-            <a:off x="685800" y="2133600"/>
+          <p:cNvPr id="264" name="" descr="{&quot;isTemplate&quot;:true,&quot;type&quot;:&quot;text&quot;}"/>
+          <p:cNvSpPr txBox="1"/>
+          <p:nvPr/>
+        </p:nvSpPr>
+        <p:spPr>
+          <a:xfrm rot="0" flipH="0" flipV="0">
+            <a:off x="685800" y="1962150"/>
             <a:ext cx="8001000" cy="809625"/>
           </a:xfrm>
           <a:prstGeom prst="rect"/>
@@ -8518,21 +9733,21 @@
                 <a:latin typeface="Inter"/>
                 <a:ea typeface="Inter"/>
               </a:rPr>
-              <a:t>What we built</a:t>
-            </a:r>
-            <a:endParaRPr/>
-          </a:p>
-        </p:txBody>
-      </p:sp>
-      <p:sp>
-        <p:nvSpPr>
-          <p:cNvPr id="228" name="" descr="{&quot;isTemplate&quot;:true,&quot;type&quot;:&quot;text&quot;}"/>
-          <p:cNvSpPr txBox="1"/>
-          <p:nvPr/>
-        </p:nvSpPr>
-        <p:spPr>
-          <a:xfrm rot="0" flipH="0" flipV="0">
-            <a:off x="685800" y="3114675"/>
+              <a:t>Application workflow</a:t>
+            </a:r>
+            <a:endParaRPr/>
+          </a:p>
+        </p:txBody>
+      </p:sp>
+      <p:sp>
+        <p:nvSpPr>
+          <p:cNvPr id="265" name="" descr="{&quot;isTemplate&quot;:true,&quot;type&quot;:&quot;text&quot;}"/>
+          <p:cNvSpPr txBox="1"/>
+          <p:nvPr/>
+        </p:nvSpPr>
+        <p:spPr>
+          <a:xfrm rot="0" flipH="0" flipV="0">
+            <a:off x="685800" y="2943225"/>
             <a:ext cx="8001000" cy="419100"/>
           </a:xfrm>
           <a:prstGeom prst="rect"/>
@@ -8553,21 +9768,21 @@
                 <a:latin typeface="Inter"/>
                 <a:ea typeface="Inter"/>
               </a:rPr>
-              <a:t>An agent that runs a whole shift from a single click</a:t>
-            </a:r>
-            <a:endParaRPr/>
-          </a:p>
-        </p:txBody>
-      </p:sp>
-      <p:sp>
-        <p:nvSpPr>
-          <p:cNvPr id="229" name=""/>
+              <a:t>A patrol starts with a human click</a:t>
+            </a:r>
+            <a:endParaRPr/>
+          </a:p>
+        </p:txBody>
+      </p:sp>
+      <p:sp>
+        <p:nvSpPr>
+          <p:cNvPr id="266" name=""/>
           <p:cNvSpPr/>
           <p:nvPr/>
         </p:nvSpPr>
         <p:spPr>
           <a:xfrm rot="0" flipH="0" flipV="0">
-            <a:off x="685800" y="3838575"/>
+            <a:off x="685800" y="3667125"/>
             <a:ext cx="838200" cy="28575"/>
           </a:xfrm>
           <a:prstGeom prst="rect">
@@ -8582,22 +9797,19 @@
         </p:spPr>
         <p:txBody>
           <a:bodyPr/>
-          <a:p>
-            <a:pPr/>
-            <a:endParaRPr/>
-          </a:p>
-        </p:txBody>
-      </p:sp>
-      <p:sp>
-        <p:nvSpPr>
-          <p:cNvPr id="230" name="" descr="{&quot;isTemplate&quot;:true,&quot;type&quot;:&quot;text&quot;}"/>
-          <p:cNvSpPr txBox="1"/>
-          <p:nvPr/>
-        </p:nvSpPr>
-        <p:spPr>
-          <a:xfrm rot="0" flipH="0" flipV="0">
-            <a:off x="685800" y="4038600"/>
-            <a:ext cx="7429500" cy="1019175"/>
+          <a:p/>
+        </p:txBody>
+      </p:sp>
+      <p:sp>
+        <p:nvSpPr>
+          <p:cNvPr id="267" name="" descr="{&quot;isTemplate&quot;:true,&quot;type&quot;:&quot;text&quot;}"/>
+          <p:cNvSpPr txBox="1"/>
+          <p:nvPr/>
+        </p:nvSpPr>
+        <p:spPr>
+          <a:xfrm rot="0" flipH="0" flipV="0">
+            <a:off x="685800" y="3867150"/>
+            <a:ext cx="7429500" cy="1362075"/>
           </a:xfrm>
           <a:prstGeom prst="rect"/>
         </p:spPr>
@@ -8619,7 +9831,7 @@
                 <a:latin typeface="Inter"/>
                 <a:ea typeface="Inter"/>
               </a:rPr>
-              <a:t xml:space="preserve">The shift recorded for our demo video made </a:t>
+              <a:t xml:space="preserve">The recorded demo patrol made </a:t>
             </a:r>
             <a:r>
               <a:rPr lang="en-US" sz="1350">
@@ -8639,15 +9851,15 @@
                 <a:latin typeface="Inter"/>
                 <a:ea typeface="Inter"/>
               </a:rPr>
-              <a:t xml:space="preserve"> tool calls: one cluster scan, six node reads, the knowledge-base lookups, then the write, the ticket and the notification. The loop is capped at 12 turns, so a shift that runs long is continued from the calls already made instead of restarted.</a:t>
-            </a:r>
-            <a:endParaRPr/>
-          </a:p>
-        </p:txBody>
-      </p:sp>
-      <p:sp>
-        <p:nvSpPr>
-          <p:cNvPr id="231" name="" descr="{&quot;isTemplate&quot;:true,&quot;type&quot;:&quot;text&quot;}"/>
+              <a:t xml:space="preserve"> tool calls. It inspected six nodes and consulted the knowledge base before taking low risk actions. Tickets remain drafts and notifications remain queued. Each model attempt allows up to 12 turns, and fallback carries completed calls into the next attempt.</a:t>
+            </a:r>
+            <a:endParaRPr/>
+          </a:p>
+        </p:txBody>
+      </p:sp>
+      <p:sp>
+        <p:nvSpPr>
+          <p:cNvPr id="268" name="" descr="{&quot;isTemplate&quot;:true,&quot;type&quot;:&quot;text&quot;}"/>
           <p:cNvSpPr txBox="1"/>
           <p:nvPr/>
         </p:nvSpPr>
@@ -8676,7 +9888,7 @@
                 <a:latin typeface="JetBrains Mono"/>
                 <a:ea typeface="JetBrains Mono"/>
               </a:rPr>
-              <a:t>06 / 14</a:t>
+              <a:t>06 / 15</a:t>
             </a:r>
             <a:endParaRPr/>
           </a:p>
@@ -8692,7 +9904,7 @@
   <p:cSld>
     <p:spTree>
       <p:nvGrpSpPr>
-        <p:cNvPr id="232" name=""/>
+        <p:cNvPr id="269" name="" descr="// 07: cluster capture at left and seed readings at right.&#10;const FONT = 'Inter, &quot;Helvetica Neue&quot;, Arial, sans-serif';&#10;const MONO = '&quot;JetBrains Mono&quot;, &quot;SF Mono&quot;, Menlo, monospace';&#10;const INK = '#0B1220';&#10;const BLUE = '#2F6BFF';&#10;const RED = '#E5484D';&#10;const GREEN = '#16B981';&#10;const DIM = '#64748B';&#10;const BODY = '#1A2434';&#10;&#10;const READOUT = [&#10;    { n: '6', c: INK, t: 'nodes in the constructed demo cluster' },&#10;    { n: '4', c: RED, t: 'nodes with anomaly signals in the seed' },&#10;    { n: '0', c: GREEN, t: 'log lines pasted for a patrol' },&#10;];&#10;&#10;&lt;Slide style={{ width: 1280, height: 720, padding: '18px 72px', background: '#FFFFFF', fontFamily: FONT }}&gt;&#10;    &lt;Box style={{ width: 1136, height: 92, flexDirection: 'row', justifyContent: 'space-between', alignItems: 'flex-end' }}&gt;&#10;        &lt;Text style={{ fontSize: 34, fontWeight: 700, color: INK, lineHeight: 1.3 }}&gt;Cluster inspection&lt;/Text&gt;&#10;        &lt;Text style={{ fontFamily: MONO, fontSize: 14, color: DIM, lineHeight: 1.45 }}&gt;English UI, local seed replay&lt;/Text&gt;&#10;    &lt;/Box&gt;&#10;&#10;    &lt;Box style={{ width: 1136, height: 544, flexDirection: 'row', gap: 36 }}&gt;&#10;&#10;        &lt;Box style={{ width: 659, justifyContent: 'center' }}&gt;&#10;            {/* Keep the supplied cluster screenshot frame and measured crop ratio. */}&#10;            &lt;Image src='assets/crop-cluster-card.png' style={{ width: 659, height: 422, border: '1px solid #E9EDF4' }} /&gt;&#10;            &lt;Text style={{ fontSize: 13, color: DIM, lineHeight: 1.5, marginTop: 14, width: 659 }}&gt;&#10;                The English application renders six seed nodes with four anomaly signals.&#10;                This capture uses local Firestore response fixtures and makes no external writes.&#10;            &lt;/Text&gt;&#10;        &lt;/Box&gt;&#10;&#10;        &lt;Box style={{ width: 441 }}&gt;&#10;            &lt;Text style={{ fontSize: 20, fontWeight: 600, color: INK, lineHeight: 1.45 }}&gt;Initial simulated state&lt;/Text&gt;&#10;            &lt;Box style={{ width: 441, height: 1, background: '#E6EBF3', marginTop: 14, marginBottom: 14 }} /&gt;&#10;&#10;            {READOUT.map((r, i) =&gt; (&#10;                &lt;Box key={i} style={{ width: 441, height: 88, flexDirection: 'row', alignItems: 'center', gap: 20, borderBottom: '1px solid #EEF2F8' }}&gt;&#10;                    &lt;Text style={{ fontFamily: MONO, fontSize: 42, fontWeight: 700, color: r.c, width: 62, lineHeight: 1.1 }}&gt;{r.n}&lt;/Text&gt;&#10;                    &lt;Text style={{ fontSize: 16, color: BODY, lineHeight: 1.5, width: 350 }}&gt;{r.t}&lt;/Text&gt;&#10;                &lt;/Box&gt;&#10;            ))}&#10;&#10;            &lt;Text style={{ fontSize: 16, color: BODY, lineHeight: 1.6, marginTop: 20 }}&gt;&#10;                The deployed application reads simulated node documents from Cloud Firestore.&#10;                A human starts each patrol. Scheduled operation would require a scheduler integration.&#10;            &lt;/Text&gt;&#10;        &lt;/Box&gt;&#10;&#10;    &lt;/Box&gt;&#10;&#10;    &lt;Box style={{ width: 1136, height: 48, flexDirection: 'row', justifyContent: 'space-between', alignItems: 'center' }}&gt;&#10;        &lt;Text style={{ fontSize: 14, color: DIM }}&gt;Local English capture preserves the initial clean state&lt;/Text&gt;&#10;        &lt;Text style={{ fontFamily: MONO, fontSize: 14, color: DIM }}&gt;07 / 15&lt;/Text&gt;&#10;    &lt;/Box&gt;&#10;&lt;/Slide&gt;&#10;"/>
         <p:cNvGrpSpPr/>
         <p:nvPr/>
       </p:nvGrpSpPr>
@@ -8706,7 +9918,7 @@
       </p:grpSpPr>
       <p:sp>
         <p:nvSpPr>
-          <p:cNvPr id="233" name=""/>
+          <p:cNvPr id="270" name=""/>
           <p:cNvSpPr/>
           <p:nvPr/>
         </p:nvSpPr>
@@ -8725,22 +9937,19 @@
         </p:spPr>
         <p:txBody>
           <a:bodyPr/>
-          <a:p>
-            <a:pPr/>
-            <a:endParaRPr/>
-          </a:p>
-        </p:txBody>
-      </p:sp>
-      <p:sp>
-        <p:nvSpPr>
-          <p:cNvPr id="234" name="" descr="{&quot;isTemplate&quot;:true,&quot;type&quot;:&quot;text&quot;}"/>
+          <a:p/>
+        </p:txBody>
+      </p:sp>
+      <p:sp>
+        <p:nvSpPr>
+          <p:cNvPr id="271" name="" descr="{&quot;isTemplate&quot;:true,&quot;type&quot;:&quot;text&quot;}"/>
           <p:cNvSpPr txBox="1"/>
           <p:nvPr/>
         </p:nvSpPr>
         <p:spPr>
           <a:xfrm rot="0" flipH="0" flipV="0">
             <a:off x="685800" y="533400"/>
-            <a:ext cx="3238500" cy="514350"/>
+            <a:ext cx="2819400" cy="514350"/>
           </a:xfrm>
           <a:prstGeom prst="rect"/>
         </p:spPr>
@@ -8760,22 +9969,22 @@
                 <a:latin typeface="Inter"/>
                 <a:ea typeface="Inter"/>
               </a:rPr>
-              <a:t>No log was pasted in</a:t>
-            </a:r>
-            <a:endParaRPr/>
-          </a:p>
-        </p:txBody>
-      </p:sp>
-      <p:sp>
-        <p:nvSpPr>
-          <p:cNvPr id="235" name="" descr="{&quot;isTemplate&quot;:true,&quot;type&quot;:&quot;text&quot;}"/>
-          <p:cNvSpPr txBox="1"/>
-          <p:nvPr/>
-        </p:nvSpPr>
-        <p:spPr>
-          <a:xfrm rot="0" flipH="0" flipV="0">
-            <a:off x="8448675" y="809625"/>
-            <a:ext cx="3057525" cy="238125"/>
+              <a:t>Cluster inspection</a:t>
+            </a:r>
+            <a:endParaRPr/>
+          </a:p>
+        </p:txBody>
+      </p:sp>
+      <p:sp>
+        <p:nvSpPr>
+          <p:cNvPr id="272" name="" descr="{&quot;isTemplate&quot;:true,&quot;type&quot;:&quot;text&quot;}"/>
+          <p:cNvSpPr txBox="1"/>
+          <p:nvPr/>
+        </p:nvSpPr>
+        <p:spPr>
+          <a:xfrm rot="0" flipH="0" flipV="0">
+            <a:off x="9172575" y="809625"/>
+            <a:ext cx="2333625" cy="238125"/>
           </a:xfrm>
           <a:prstGeom prst="rect"/>
         </p:spPr>
@@ -8795,21 +10004,21 @@
                 <a:latin typeface="JetBrains Mono"/>
                 <a:ea typeface="JetBrains Mono"/>
               </a:rPr>
-              <a:t>Cluster tab · read live from Firestore</a:t>
-            </a:r>
-            <a:endParaRPr/>
-          </a:p>
-        </p:txBody>
-      </p:sp>
-      <p:sp>
-        <p:nvSpPr>
-          <p:cNvPr id="236" name=""/>
+              <a:t>English UI, local seed replay</a:t>
+            </a:r>
+            <a:endParaRPr/>
+          </a:p>
+        </p:txBody>
+      </p:sp>
+      <p:sp>
+        <p:nvSpPr>
+          <p:cNvPr id="273" name=""/>
           <p:cNvSpPr/>
           <p:nvPr/>
         </p:nvSpPr>
         <p:spPr>
           <a:xfrm rot="0" flipH="0" flipV="0">
-            <a:off x="685800" y="1228725"/>
+            <a:off x="685800" y="1343025"/>
             <a:ext cx="6276975" cy="4019550"/>
           </a:xfrm>
           <a:prstGeom prst="rect">
@@ -8824,15 +10033,12 @@
         </p:spPr>
         <p:txBody>
           <a:bodyPr/>
-          <a:p>
-            <a:pPr/>
-            <a:endParaRPr/>
-          </a:p>
+          <a:p/>
         </p:txBody>
       </p:sp>
       <p:pic>
         <p:nvPicPr>
-          <p:cNvPr id="237" name=""/>
+          <p:cNvPr id="274" name=""/>
           <p:cNvPicPr>
             <a:picLocks noChangeAspect="1"/>
           </p:cNvPicPr>
@@ -8846,7 +10052,7 @@
         </p:blipFill>
         <p:spPr>
           <a:xfrm rot="0" flipH="0" flipV="0">
-            <a:off x="685800" y="1228725"/>
+            <a:off x="685800" y="1343025"/>
             <a:ext cx="6276975" cy="4019550"/>
           </a:xfrm>
           <a:prstGeom prst="rect">
@@ -8857,14 +10063,14 @@
       </p:pic>
       <p:sp>
         <p:nvSpPr>
-          <p:cNvPr id="238" name="" descr="{&quot;isTemplate&quot;:true,&quot;type&quot;:&quot;text&quot;}"/>
-          <p:cNvSpPr txBox="1"/>
-          <p:nvPr/>
-        </p:nvSpPr>
-        <p:spPr>
-          <a:xfrm rot="0" flipH="0" flipV="0">
-            <a:off x="685800" y="5381625"/>
-            <a:ext cx="6276975" cy="676275"/>
+          <p:cNvPr id="275" name="" descr="{&quot;isTemplate&quot;:true,&quot;type&quot;:&quot;text&quot;}"/>
+          <p:cNvSpPr txBox="1"/>
+          <p:nvPr/>
+        </p:nvSpPr>
+        <p:spPr>
+          <a:xfrm rot="0" flipH="0" flipV="0">
+            <a:off x="685800" y="5495925"/>
+            <a:ext cx="6276975" cy="447675"/>
           </a:xfrm>
           <a:prstGeom prst="rect"/>
         </p:spPr>
@@ -8886,15 +10092,15 @@
                 <a:latin typeface="Inter"/>
                 <a:ea typeface="Inter"/>
               </a:rPr>
-              <a:t>The cluster tab as it renders on load. The header reads: 6 nodes, 4 of them showing an anomaly, read live from Cloud Firestore. The interface is in Chinese because the on-call team is Chinese-speaking; every reading used in this deck is translated on the right.</a:t>
-            </a:r>
-            <a:endParaRPr/>
-          </a:p>
-        </p:txBody>
-      </p:sp>
-      <p:sp>
-        <p:nvSpPr>
-          <p:cNvPr id="239" name="" descr="{&quot;isTemplate&quot;:true,&quot;type&quot;:&quot;text&quot;}"/>
+              <a:t>The English application renders six seed nodes with four anomaly signals. This capture uses local Firestore response fixtures and makes no external writes.</a:t>
+            </a:r>
+            <a:endParaRPr/>
+          </a:p>
+        </p:txBody>
+      </p:sp>
+      <p:sp>
+        <p:nvSpPr>
+          <p:cNvPr id="276" name="" descr="{&quot;isTemplate&quot;:true,&quot;type&quot;:&quot;text&quot;}"/>
           <p:cNvSpPr txBox="1"/>
           <p:nvPr/>
         </p:nvSpPr>
@@ -8921,15 +10127,15 @@
                 <a:latin typeface="Inter"/>
                 <a:ea typeface="Inter"/>
               </a:rPr>
-              <a:t>Where those numbers come from</a:t>
-            </a:r>
-            <a:endParaRPr/>
-          </a:p>
-        </p:txBody>
-      </p:sp>
-      <p:sp>
-        <p:nvSpPr>
-          <p:cNvPr id="240" name=""/>
+              <a:t>Initial simulated state</a:t>
+            </a:r>
+            <a:endParaRPr/>
+          </a:p>
+        </p:txBody>
+      </p:sp>
+      <p:sp>
+        <p:nvSpPr>
+          <p:cNvPr id="277" name=""/>
           <p:cNvSpPr/>
           <p:nvPr/>
         </p:nvSpPr>
@@ -8948,15 +10154,12 @@
         </p:spPr>
         <p:txBody>
           <a:bodyPr/>
-          <a:p>
-            <a:pPr/>
-            <a:endParaRPr/>
-          </a:p>
-        </p:txBody>
-      </p:sp>
-      <p:sp>
-        <p:nvSpPr>
-          <p:cNvPr id="241" name=""/>
+          <a:p/>
+        </p:txBody>
+      </p:sp>
+      <p:sp>
+        <p:nvSpPr>
+          <p:cNvPr id="278" name=""/>
           <p:cNvSpPr/>
           <p:nvPr/>
         </p:nvSpPr>
@@ -8991,15 +10194,12 @@
         </p:spPr>
         <p:txBody>
           <a:bodyPr/>
-          <a:p>
-            <a:pPr/>
-            <a:endParaRPr/>
-          </a:p>
-        </p:txBody>
-      </p:sp>
-      <p:sp>
-        <p:nvSpPr>
-          <p:cNvPr id="242" name="" descr="{&quot;isTemplate&quot;:true,&quot;type&quot;:&quot;text&quot;}"/>
+          <a:p/>
+        </p:txBody>
+      </p:sp>
+      <p:sp>
+        <p:nvSpPr>
+          <p:cNvPr id="279" name="" descr="{&quot;isTemplate&quot;:true,&quot;type&quot;:&quot;text&quot;}"/>
           <p:cNvSpPr txBox="1"/>
           <p:nvPr/>
         </p:nvSpPr>
@@ -9034,7 +10234,7 @@
       </p:sp>
       <p:sp>
         <p:nvSpPr>
-          <p:cNvPr id="243" name="" descr="{&quot;isTemplate&quot;:true,&quot;type&quot;:&quot;text&quot;}"/>
+          <p:cNvPr id="280" name="" descr="{&quot;isTemplate&quot;:true,&quot;type&quot;:&quot;text&quot;}"/>
           <p:cNvSpPr txBox="1"/>
           <p:nvPr/>
         </p:nvSpPr>
@@ -9061,15 +10261,15 @@
                 <a:latin typeface="Inter"/>
                 <a:ea typeface="Inter"/>
               </a:rPr>
-              <a:t>nodes in the demo cluster</a:t>
-            </a:r>
-            <a:endParaRPr/>
-          </a:p>
-        </p:txBody>
-      </p:sp>
-      <p:sp>
-        <p:nvSpPr>
-          <p:cNvPr id="244" name=""/>
+              <a:t>nodes in the constructed demo cluster</a:t>
+            </a:r>
+            <a:endParaRPr/>
+          </a:p>
+        </p:txBody>
+      </p:sp>
+      <p:sp>
+        <p:nvSpPr>
+          <p:cNvPr id="281" name=""/>
           <p:cNvSpPr/>
           <p:nvPr/>
         </p:nvSpPr>
@@ -9104,15 +10304,12 @@
         </p:spPr>
         <p:txBody>
           <a:bodyPr/>
-          <a:p>
-            <a:pPr/>
-            <a:endParaRPr/>
-          </a:p>
-        </p:txBody>
-      </p:sp>
-      <p:sp>
-        <p:nvSpPr>
-          <p:cNvPr id="245" name="" descr="{&quot;isTemplate&quot;:true,&quot;type&quot;:&quot;text&quot;}"/>
+          <a:p/>
+        </p:txBody>
+      </p:sp>
+      <p:sp>
+        <p:nvSpPr>
+          <p:cNvPr id="282" name="" descr="{&quot;isTemplate&quot;:true,&quot;type&quot;:&quot;text&quot;}"/>
           <p:cNvSpPr txBox="1"/>
           <p:nvPr/>
         </p:nvSpPr>
@@ -9147,7 +10344,7 @@
       </p:sp>
       <p:sp>
         <p:nvSpPr>
-          <p:cNvPr id="246" name="" descr="{&quot;isTemplate&quot;:true,&quot;type&quot;:&quot;text&quot;}"/>
+          <p:cNvPr id="283" name="" descr="{&quot;isTemplate&quot;:true,&quot;type&quot;:&quot;text&quot;}"/>
           <p:cNvSpPr txBox="1"/>
           <p:nvPr/>
         </p:nvSpPr>
@@ -9174,15 +10371,15 @@
                 <a:latin typeface="Inter"/>
                 <a:ea typeface="Inter"/>
               </a:rPr>
-              <a:t>of them showing an anomaly right now</a:t>
-            </a:r>
-            <a:endParaRPr/>
-          </a:p>
-        </p:txBody>
-      </p:sp>
-      <p:sp>
-        <p:nvSpPr>
-          <p:cNvPr id="247" name=""/>
+              <a:t>nodes with anomaly signals in the seed</a:t>
+            </a:r>
+            <a:endParaRPr/>
+          </a:p>
+        </p:txBody>
+      </p:sp>
+      <p:sp>
+        <p:nvSpPr>
+          <p:cNvPr id="284" name=""/>
           <p:cNvSpPr/>
           <p:nvPr/>
         </p:nvSpPr>
@@ -9217,15 +10414,12 @@
         </p:spPr>
         <p:txBody>
           <a:bodyPr/>
-          <a:p>
-            <a:pPr/>
-            <a:endParaRPr/>
-          </a:p>
-        </p:txBody>
-      </p:sp>
-      <p:sp>
-        <p:nvSpPr>
-          <p:cNvPr id="248" name="" descr="{&quot;isTemplate&quot;:true,&quot;type&quot;:&quot;text&quot;}"/>
+          <a:p/>
+        </p:txBody>
+      </p:sp>
+      <p:sp>
+        <p:nvSpPr>
+          <p:cNvPr id="285" name="" descr="{&quot;isTemplate&quot;:true,&quot;type&quot;:&quot;text&quot;}"/>
           <p:cNvSpPr txBox="1"/>
           <p:nvPr/>
         </p:nvSpPr>
@@ -9260,7 +10454,7 @@
       </p:sp>
       <p:sp>
         <p:nvSpPr>
-          <p:cNvPr id="249" name="" descr="{&quot;isTemplate&quot;:true,&quot;type&quot;:&quot;text&quot;}"/>
+          <p:cNvPr id="286" name="" descr="{&quot;isTemplate&quot;:true,&quot;type&quot;:&quot;text&quot;}"/>
           <p:cNvSpPr txBox="1"/>
           <p:nvPr/>
         </p:nvSpPr>
@@ -9287,22 +10481,22 @@
                 <a:latin typeface="Inter"/>
                 <a:ea typeface="Inter"/>
               </a:rPr>
-              <a:t>log lines pasted in by the operator</a:t>
-            </a:r>
-            <a:endParaRPr/>
-          </a:p>
-        </p:txBody>
-      </p:sp>
-      <p:sp>
-        <p:nvSpPr>
-          <p:cNvPr id="250" name="" descr="{&quot;isTemplate&quot;:true,&quot;type&quot;:&quot;text&quot;}"/>
+              <a:t>log lines pasted for a patrol</a:t>
+            </a:r>
+            <a:endParaRPr/>
+          </a:p>
+        </p:txBody>
+      </p:sp>
+      <p:sp>
+        <p:nvSpPr>
+          <p:cNvPr id="287" name="" descr="{&quot;isTemplate&quot;:true,&quot;type&quot;:&quot;text&quot;}"/>
           <p:cNvSpPr txBox="1"/>
           <p:nvPr/>
         </p:nvSpPr>
         <p:spPr>
           <a:xfrm rot="0" flipH="0" flipV="0">
             <a:off x="7305675" y="4362450"/>
-            <a:ext cx="4200525" cy="1171575"/>
+            <a:ext cx="4200525" cy="885825"/>
           </a:xfrm>
           <a:prstGeom prst="rect"/>
         </p:spPr>
@@ -9324,22 +10518,22 @@
                 <a:latin typeface="Inter"/>
                 <a:ea typeface="Inter"/>
               </a:rPr>
-              <a:t>Every figure above is read from Cloud Firestore when the page loads, and the header says so. The shift itself starts from a button: this build is a static site with no resident process, so a real deployment would have a scheduler fire it.</a:t>
-            </a:r>
-            <a:endParaRPr/>
-          </a:p>
-        </p:txBody>
-      </p:sp>
-      <p:sp>
-        <p:nvSpPr>
-          <p:cNvPr id="251" name="" descr="{&quot;isTemplate&quot;:true,&quot;type&quot;:&quot;text&quot;}"/>
+              <a:t>The deployed application reads simulated node documents from Cloud Firestore. A human starts each patrol. Scheduled operation would require a scheduler integration.</a:t>
+            </a:r>
+            <a:endParaRPr/>
+          </a:p>
+        </p:txBody>
+      </p:sp>
+      <p:sp>
+        <p:nvSpPr>
+          <p:cNvPr id="288" name="" descr="{&quot;isTemplate&quot;:true,&quot;type&quot;:&quot;text&quot;}"/>
           <p:cNvSpPr txBox="1"/>
           <p:nvPr/>
         </p:nvSpPr>
         <p:spPr>
           <a:xfrm rot="0" flipH="0" flipV="0">
             <a:off x="685800" y="6381750"/>
-            <a:ext cx="4210050" cy="161925"/>
+            <a:ext cx="3162300" cy="161925"/>
           </a:xfrm>
           <a:prstGeom prst="rect"/>
         </p:spPr>
@@ -9359,15 +10553,15 @@
                 <a:latin typeface="Inter"/>
                 <a:ea typeface="Inter"/>
               </a:rPr>
-              <a:t>Captured from the deployed page at gpu-waste-auditor-2026.web.app</a:t>
-            </a:r>
-            <a:endParaRPr/>
-          </a:p>
-        </p:txBody>
-      </p:sp>
-      <p:sp>
-        <p:nvSpPr>
-          <p:cNvPr id="252" name="" descr="{&quot;isTemplate&quot;:true,&quot;type&quot;:&quot;text&quot;}"/>
+              <a:t>Local English capture preserves the initial clean state</a:t>
+            </a:r>
+            <a:endParaRPr/>
+          </a:p>
+        </p:txBody>
+      </p:sp>
+      <p:sp>
+        <p:nvSpPr>
+          <p:cNvPr id="289" name="" descr="{&quot;isTemplate&quot;:true,&quot;type&quot;:&quot;text&quot;}"/>
           <p:cNvSpPr txBox="1"/>
           <p:nvPr/>
         </p:nvSpPr>
@@ -9394,7 +10588,7 @@
                 <a:latin typeface="JetBrains Mono"/>
                 <a:ea typeface="JetBrains Mono"/>
               </a:rPr>
-              <a:t>07 / 14</a:t>
+              <a:t>07 / 15</a:t>
             </a:r>
             <a:endParaRPr/>
           </a:p>
@@ -9410,7 +10604,7 @@
   <p:cSld>
     <p:spTree>
       <p:nvGrpSpPr>
-        <p:cNvPr id="253" name=""/>
+        <p:cNvPr id="290" name="" descr="// 08: operation log above the recorded verification count.&#10;const FONT = 'Inter, &quot;Helvetica Neue&quot;, Arial, sans-serif';&#10;const MONO = '&quot;JetBrains Mono&quot;, &quot;SF Mono&quot;, Menlo, monospace';&#10;const INK = '#0B1220';&#10;const GREEN = '#16B981';&#10;const DIM = '#64748B';&#10;const BODY = '#1A2434';&#10;&#10;const WRITES = [&#10;    { field: 'lyg2112.cordoned', from: 'false', to: 'true' },&#10;    { field: 'lyg2115.cordoned', from: 'false', to: 'true' },&#10;];&#10;&#10;&lt;Slide style={{ width: 1280, height: 720, padding: '18px 72px', background: '#FFFFFF', fontFamily: FONT }}&gt;&#10;    &lt;Box style={{ width: 1136, height: 92, flexDirection: 'row', justifyContent: 'space-between', alignItems: 'flex-end' }}&gt;&#10;        &lt;Text style={{ fontSize: 34, fontWeight: 700, color: INK, lineHeight: 1.3 }}&gt;Action verification&lt;/Text&gt;&#10;        &lt;Text style={{ fontFamily: MONO, fontSize: 14, color: DIM, lineHeight: 1.45 }}&gt;Operation log, local shift replay&lt;/Text&gt;&#10;    &lt;/Box&gt;&#10;&#10;    &lt;Box style={{ width: 1136, height: 544 }}&gt;&#10;&#10;        &lt;Box style={{ width: 1136, height: 264, alignItems: 'center' }}&gt;&#10;            &lt;Image src='assets/crop-oplog.png' style={{ width: 1136, height: 264, border: '1px solid #E9EDF4' }} /&gt;&#10;        &lt;/Box&gt;&#10;&#10;        &lt;Box style={{ width: 1136, height: 260, flexDirection: 'row', gap: 32, marginTop: 20 }}&gt;&#10;&#10;            &lt;Box style={{ width: 330, justifyContent: 'center' }}&gt;&#10;                &lt;Text style={{ fontFamily: MONO, fontSize: 104, fontWeight: 700, color: GREEN, lineHeight: 1.05 }}&gt;2 / 2&lt;/Text&gt;&#10;                &lt;Text style={{ fontSize: 15, color: DIM, lineHeight: 1.5, marginTop: 6 }}&gt;verified cordons in the earlier recorded run, replayed here&lt;/Text&gt;&#10;            &lt;/Box&gt;&#10;&#10;            &lt;Box style={{ width: 774, gap: 12, justifyContent: 'center' }}&gt;&#10;                {WRITES.map((w, i) =&gt; (&#10;                    &lt;Box key={i} style={{ flexDirection: 'row', alignItems: 'center', gap: 14 }}&gt;&#10;                        &lt;Text style={{ fontFamily: MONO, fontSize: 17, fontWeight: 500, color: INK, width: 200 }}&gt;{w.field}&lt;/Text&gt;&#10;                        &lt;Text style={{ fontFamily: MONO, fontSize: 17, color: DIM }}&gt;{w.from}&lt;/Text&gt;&#10;                        &lt;Text style={{ fontFamily: MONO, fontSize: 17, color: GREEN }}&gt;to&lt;/Text&gt;&#10;                        &lt;Text style={{ fontFamily: MONO, fontSize: 17, fontWeight: 700, color: GREEN }}&gt;{w.to}&lt;/Text&gt;&#10;                    &lt;/Box&gt;&#10;                ))}&#10;                &lt;Box style={{ width: 774, height: 1, background: '#E6EBF3', marginTop: 4, marginBottom: 4 }} /&gt;&#10;                &lt;Text style={{ fontSize: 20, fontWeight: 600, color: INK, lineHeight: 1.45 }}&gt;&#10;                    The execution path checks the returned node state before recording verification.&#10;                &lt;/Text&gt;&#10;                &lt;Text style={{ fontSize: 14, color: DIM, lineHeight: 1.55 }}&gt;&#10;                    An unchanged value fails verification. The deployed path updates the simulated Firestore cluster.&#10;                    This English capture replays the two cordon events locally and does not run a new patrol.&#10;                &lt;/Text&gt;&#10;            &lt;/Box&gt;&#10;&#10;        &lt;/Box&gt;&#10;&#10;    &lt;/Box&gt;&#10;&#10;    &lt;Box style={{ width: 1136, height: 48, flexDirection: 'row', justifyContent: 'space-between', alignItems: 'center' }}&gt;&#10;        &lt;Text style={{ fontSize: 14, color: DIM }}&gt;Both cordons use the low risk execution path&lt;/Text&gt;&#10;        &lt;Text style={{ fontFamily: MONO, fontSize: 14, color: DIM }}&gt;08 / 15&lt;/Text&gt;&#10;    &lt;/Box&gt;&#10;&lt;/Slide&gt;&#10;"/>
         <p:cNvGrpSpPr/>
         <p:nvPr/>
       </p:nvGrpSpPr>
@@ -9424,7 +10618,7 @@
       </p:grpSpPr>
       <p:sp>
         <p:nvSpPr>
-          <p:cNvPr id="254" name=""/>
+          <p:cNvPr id="291" name=""/>
           <p:cNvSpPr/>
           <p:nvPr/>
         </p:nvSpPr>
@@ -9443,22 +10637,19 @@
         </p:spPr>
         <p:txBody>
           <a:bodyPr/>
-          <a:p>
-            <a:pPr/>
-            <a:endParaRPr/>
-          </a:p>
-        </p:txBody>
-      </p:sp>
-      <p:sp>
-        <p:nvSpPr>
-          <p:cNvPr id="255" name="" descr="{&quot;isTemplate&quot;:true,&quot;type&quot;:&quot;text&quot;}"/>
+          <a:p/>
+        </p:txBody>
+      </p:sp>
+      <p:sp>
+        <p:nvSpPr>
+          <p:cNvPr id="292" name="" descr="{&quot;isTemplate&quot;:true,&quot;type&quot;:&quot;text&quot;}"/>
           <p:cNvSpPr txBox="1"/>
           <p:nvPr/>
         </p:nvSpPr>
         <p:spPr>
           <a:xfrm rot="0" flipH="0" flipV="0">
             <a:off x="685800" y="533400"/>
-            <a:ext cx="4038600" cy="514350"/>
+            <a:ext cx="2809875" cy="514350"/>
           </a:xfrm>
           <a:prstGeom prst="rect"/>
         </p:spPr>
@@ -9478,22 +10669,22 @@
                 <a:latin typeface="Inter"/>
                 <a:ea typeface="Inter"/>
               </a:rPr>
-              <a:t>The writes actually landed</a:t>
-            </a:r>
-            <a:endParaRPr/>
-          </a:p>
-        </p:txBody>
-      </p:sp>
-      <p:sp>
-        <p:nvSpPr>
-          <p:cNvPr id="256" name="" descr="{&quot;isTemplate&quot;:true,&quot;type&quot;:&quot;text&quot;}"/>
-          <p:cNvSpPr txBox="1"/>
-          <p:nvPr/>
-        </p:nvSpPr>
-        <p:spPr>
-          <a:xfrm rot="0" flipH="0" flipV="0">
-            <a:off x="8686800" y="809625"/>
-            <a:ext cx="2819400" cy="238125"/>
+              <a:t>Action verification</a:t>
+            </a:r>
+            <a:endParaRPr/>
+          </a:p>
+        </p:txBody>
+      </p:sp>
+      <p:sp>
+        <p:nvSpPr>
+          <p:cNvPr id="293" name="" descr="{&quot;isTemplate&quot;:true,&quot;type&quot;:&quot;text&quot;}"/>
+          <p:cNvSpPr txBox="1"/>
+          <p:nvPr/>
+        </p:nvSpPr>
+        <p:spPr>
+          <a:xfrm rot="0" flipH="0" flipV="0">
+            <a:off x="8848725" y="809625"/>
+            <a:ext cx="2657475" cy="238125"/>
           </a:xfrm>
           <a:prstGeom prst="rect"/>
         </p:spPr>
@@ -9513,15 +10704,15 @@
                 <a:latin typeface="JetBrains Mono"/>
                 <a:ea typeface="JetBrains Mono"/>
               </a:rPr>
-              <a:t>Operation log · write, then re-read</a:t>
-            </a:r>
-            <a:endParaRPr/>
-          </a:p>
-        </p:txBody>
-      </p:sp>
-      <p:sp>
-        <p:nvSpPr>
-          <p:cNvPr id="257" name=""/>
+              <a:t>Operation log, local shift replay</a:t>
+            </a:r>
+            <a:endParaRPr/>
+          </a:p>
+        </p:txBody>
+      </p:sp>
+      <p:sp>
+        <p:nvSpPr>
+          <p:cNvPr id="294" name=""/>
           <p:cNvSpPr/>
           <p:nvPr/>
         </p:nvSpPr>
@@ -9542,15 +10733,12 @@
         </p:spPr>
         <p:txBody>
           <a:bodyPr/>
-          <a:p>
-            <a:pPr/>
-            <a:endParaRPr/>
-          </a:p>
+          <a:p/>
         </p:txBody>
       </p:sp>
       <p:pic>
         <p:nvPicPr>
-          <p:cNvPr id="258" name=""/>
+          <p:cNvPr id="295" name=""/>
           <p:cNvPicPr>
             <a:picLocks noChangeAspect="1"/>
           </p:cNvPicPr>
@@ -9575,7 +10763,7 @@
       </p:pic>
       <p:sp>
         <p:nvSpPr>
-          <p:cNvPr id="259" name="" descr="{&quot;isTemplate&quot;:true,&quot;type&quot;:&quot;text&quot;}"/>
+          <p:cNvPr id="296" name="" descr="{&quot;isTemplate&quot;:true,&quot;type&quot;:&quot;text&quot;}"/>
           <p:cNvSpPr txBox="1"/>
           <p:nvPr/>
         </p:nvSpPr>
@@ -9610,7 +10798,7 @@
       </p:sp>
       <p:sp>
         <p:nvSpPr>
-          <p:cNvPr id="260" name="" descr="{&quot;isTemplate&quot;:true,&quot;type&quot;:&quot;text&quot;}"/>
+          <p:cNvPr id="297" name="" descr="{&quot;isTemplate&quot;:true,&quot;type&quot;:&quot;text&quot;}"/>
           <p:cNvSpPr txBox="1"/>
           <p:nvPr/>
         </p:nvSpPr>
@@ -9639,21 +10827,21 @@
                 <a:latin typeface="Inter"/>
                 <a:ea typeface="Inter"/>
               </a:rPr>
-              <a:t>actions executed, then re-read from the server to confirm</a:t>
-            </a:r>
-            <a:endParaRPr/>
-          </a:p>
-        </p:txBody>
-      </p:sp>
-      <p:sp>
-        <p:nvSpPr>
-          <p:cNvPr id="261" name="" descr="{&quot;isTemplate&quot;:true,&quot;type&quot;:&quot;text&quot;}"/>
-          <p:cNvSpPr txBox="1"/>
-          <p:nvPr/>
-        </p:nvSpPr>
-        <p:spPr>
-          <a:xfrm rot="0" flipH="0" flipV="0">
-            <a:off x="4133850" y="3933825"/>
+              <a:t>verified cordons in the earlier recorded run, replayed here</a:t>
+            </a:r>
+            <a:endParaRPr/>
+          </a:p>
+        </p:txBody>
+      </p:sp>
+      <p:sp>
+        <p:nvSpPr>
+          <p:cNvPr id="298" name="" descr="{&quot;isTemplate&quot;:true,&quot;type&quot;:&quot;text&quot;}"/>
+          <p:cNvSpPr txBox="1"/>
+          <p:nvPr/>
+        </p:nvSpPr>
+        <p:spPr>
+          <a:xfrm rot="0" flipH="0" flipV="0">
+            <a:off x="4133850" y="4105275"/>
             <a:ext cx="1905000" cy="200025"/>
           </a:xfrm>
           <a:prstGeom prst="rect"/>
@@ -9682,13 +10870,13 @@
       </p:sp>
       <p:sp>
         <p:nvSpPr>
-          <p:cNvPr id="262" name="" descr="{&quot;isTemplate&quot;:true,&quot;type&quot;:&quot;text&quot;}"/>
-          <p:cNvSpPr txBox="1"/>
-          <p:nvPr/>
-        </p:nvSpPr>
-        <p:spPr>
-          <a:xfrm rot="0" flipH="0" flipV="0">
-            <a:off x="6172200" y="3933825"/>
+          <p:cNvPr id="299" name="" descr="{&quot;isTemplate&quot;:true,&quot;type&quot;:&quot;text&quot;}"/>
+          <p:cNvSpPr txBox="1"/>
+          <p:nvPr/>
+        </p:nvSpPr>
+        <p:spPr>
+          <a:xfrm rot="0" flipH="0" flipV="0">
+            <a:off x="6172200" y="4105275"/>
             <a:ext cx="495300" cy="200025"/>
           </a:xfrm>
           <a:prstGeom prst="rect"/>
@@ -9717,14 +10905,14 @@
       </p:sp>
       <p:sp>
         <p:nvSpPr>
-          <p:cNvPr id="263" name="" descr="{&quot;isTemplate&quot;:true,&quot;type&quot;:&quot;text&quot;}"/>
-          <p:cNvSpPr txBox="1"/>
-          <p:nvPr/>
-        </p:nvSpPr>
-        <p:spPr>
-          <a:xfrm rot="0" flipH="0" flipV="0">
-            <a:off x="6800850" y="3933825"/>
-            <a:ext cx="104775" cy="200025"/>
+          <p:cNvPr id="300" name="" descr="{&quot;isTemplate&quot;:true,&quot;type&quot;:&quot;text&quot;}"/>
+          <p:cNvSpPr txBox="1"/>
+          <p:nvPr/>
+        </p:nvSpPr>
+        <p:spPr>
+          <a:xfrm rot="0" flipH="0" flipV="0">
+            <a:off x="6800850" y="4105275"/>
+            <a:ext cx="200025" cy="200025"/>
           </a:xfrm>
           <a:prstGeom prst="rect"/>
         </p:spPr>
@@ -9737,28 +10925,28 @@
               </a:lnSpc>
             </a:pPr>
             <a:r>
-              <a:rPr sz="1275">
+              <a:rPr lang="en-US" sz="1275">
                 <a:solidFill>
                   <a:srgbClr val="16B981"/>
                 </a:solidFill>
                 <a:latin typeface="JetBrains Mono"/>
                 <a:ea typeface="JetBrains Mono"/>
               </a:rPr>
-              <a:t>→</a:t>
-            </a:r>
-            <a:endParaRPr/>
-          </a:p>
-        </p:txBody>
-      </p:sp>
-      <p:sp>
-        <p:nvSpPr>
-          <p:cNvPr id="264" name="" descr="{&quot;isTemplate&quot;:true,&quot;type&quot;:&quot;text&quot;}"/>
-          <p:cNvSpPr txBox="1"/>
-          <p:nvPr/>
-        </p:nvSpPr>
-        <p:spPr>
-          <a:xfrm rot="0" flipH="0" flipV="0">
-            <a:off x="7038975" y="3933825"/>
+              <a:t>to</a:t>
+            </a:r>
+            <a:endParaRPr/>
+          </a:p>
+        </p:txBody>
+      </p:sp>
+      <p:sp>
+        <p:nvSpPr>
+          <p:cNvPr id="301" name="" descr="{&quot;isTemplate&quot;:true,&quot;type&quot;:&quot;text&quot;}"/>
+          <p:cNvSpPr txBox="1"/>
+          <p:nvPr/>
+        </p:nvSpPr>
+        <p:spPr>
+          <a:xfrm rot="0" flipH="0" flipV="0">
+            <a:off x="7134225" y="4105275"/>
             <a:ext cx="390525" cy="200025"/>
           </a:xfrm>
           <a:prstGeom prst="rect"/>
@@ -9787,13 +10975,13 @@
       </p:sp>
       <p:sp>
         <p:nvSpPr>
-          <p:cNvPr id="265" name="" descr="{&quot;isTemplate&quot;:true,&quot;type&quot;:&quot;text&quot;}"/>
-          <p:cNvSpPr txBox="1"/>
-          <p:nvPr/>
-        </p:nvSpPr>
-        <p:spPr>
-          <a:xfrm rot="0" flipH="0" flipV="0">
-            <a:off x="4133850" y="4248150"/>
+          <p:cNvPr id="302" name="" descr="{&quot;isTemplate&quot;:true,&quot;type&quot;:&quot;text&quot;}"/>
+          <p:cNvSpPr txBox="1"/>
+          <p:nvPr/>
+        </p:nvSpPr>
+        <p:spPr>
+          <a:xfrm rot="0" flipH="0" flipV="0">
+            <a:off x="4133850" y="4419600"/>
             <a:ext cx="1905000" cy="200025"/>
           </a:xfrm>
           <a:prstGeom prst="rect"/>
@@ -9822,13 +11010,13 @@
       </p:sp>
       <p:sp>
         <p:nvSpPr>
-          <p:cNvPr id="266" name="" descr="{&quot;isTemplate&quot;:true,&quot;type&quot;:&quot;text&quot;}"/>
-          <p:cNvSpPr txBox="1"/>
-          <p:nvPr/>
-        </p:nvSpPr>
-        <p:spPr>
-          <a:xfrm rot="0" flipH="0" flipV="0">
-            <a:off x="6172200" y="4248150"/>
+          <p:cNvPr id="303" name="" descr="{&quot;isTemplate&quot;:true,&quot;type&quot;:&quot;text&quot;}"/>
+          <p:cNvSpPr txBox="1"/>
+          <p:nvPr/>
+        </p:nvSpPr>
+        <p:spPr>
+          <a:xfrm rot="0" flipH="0" flipV="0">
+            <a:off x="6172200" y="4419600"/>
             <a:ext cx="495300" cy="200025"/>
           </a:xfrm>
           <a:prstGeom prst="rect"/>
@@ -9857,14 +11045,14 @@
       </p:sp>
       <p:sp>
         <p:nvSpPr>
-          <p:cNvPr id="267" name="" descr="{&quot;isTemplate&quot;:true,&quot;type&quot;:&quot;text&quot;}"/>
-          <p:cNvSpPr txBox="1"/>
-          <p:nvPr/>
-        </p:nvSpPr>
-        <p:spPr>
-          <a:xfrm rot="0" flipH="0" flipV="0">
-            <a:off x="6800850" y="4248150"/>
-            <a:ext cx="104775" cy="200025"/>
+          <p:cNvPr id="304" name="" descr="{&quot;isTemplate&quot;:true,&quot;type&quot;:&quot;text&quot;}"/>
+          <p:cNvSpPr txBox="1"/>
+          <p:nvPr/>
+        </p:nvSpPr>
+        <p:spPr>
+          <a:xfrm rot="0" flipH="0" flipV="0">
+            <a:off x="6800850" y="4419600"/>
+            <a:ext cx="200025" cy="200025"/>
           </a:xfrm>
           <a:prstGeom prst="rect"/>
         </p:spPr>
@@ -9877,28 +11065,28 @@
               </a:lnSpc>
             </a:pPr>
             <a:r>
-              <a:rPr sz="1275">
+              <a:rPr lang="en-US" sz="1275">
                 <a:solidFill>
                   <a:srgbClr val="16B981"/>
                 </a:solidFill>
                 <a:latin typeface="JetBrains Mono"/>
                 <a:ea typeface="JetBrains Mono"/>
               </a:rPr>
-              <a:t>→</a:t>
-            </a:r>
-            <a:endParaRPr/>
-          </a:p>
-        </p:txBody>
-      </p:sp>
-      <p:sp>
-        <p:nvSpPr>
-          <p:cNvPr id="268" name="" descr="{&quot;isTemplate&quot;:true,&quot;type&quot;:&quot;text&quot;}"/>
-          <p:cNvSpPr txBox="1"/>
-          <p:nvPr/>
-        </p:nvSpPr>
-        <p:spPr>
-          <a:xfrm rot="0" flipH="0" flipV="0">
-            <a:off x="7038975" y="4248150"/>
+              <a:t>to</a:t>
+            </a:r>
+            <a:endParaRPr/>
+          </a:p>
+        </p:txBody>
+      </p:sp>
+      <p:sp>
+        <p:nvSpPr>
+          <p:cNvPr id="305" name="" descr="{&quot;isTemplate&quot;:true,&quot;type&quot;:&quot;text&quot;}"/>
+          <p:cNvSpPr txBox="1"/>
+          <p:nvPr/>
+        </p:nvSpPr>
+        <p:spPr>
+          <a:xfrm rot="0" flipH="0" flipV="0">
+            <a:off x="7134225" y="4419600"/>
             <a:ext cx="390525" cy="200025"/>
           </a:xfrm>
           <a:prstGeom prst="rect"/>
@@ -9927,13 +11115,13 @@
       </p:sp>
       <p:sp>
         <p:nvSpPr>
-          <p:cNvPr id="269" name=""/>
+          <p:cNvPr id="306" name=""/>
           <p:cNvSpPr/>
           <p:nvPr/>
         </p:nvSpPr>
         <p:spPr>
           <a:xfrm rot="0" flipH="0" flipV="0">
-            <a:off x="4133850" y="4600575"/>
+            <a:off x="4133850" y="4772025"/>
             <a:ext cx="7372350" cy="9525"/>
           </a:xfrm>
           <a:prstGeom prst="rect">
@@ -9946,22 +11134,54 @@
         </p:spPr>
         <p:txBody>
           <a:bodyPr/>
-          <a:p>
-            <a:pPr/>
-            <a:endParaRPr/>
-          </a:p>
-        </p:txBody>
-      </p:sp>
-      <p:sp>
-        <p:nvSpPr>
-          <p:cNvPr id="270" name="" descr="{&quot;isTemplate&quot;:true,&quot;type&quot;:&quot;text&quot;}"/>
-          <p:cNvSpPr txBox="1"/>
-          <p:nvPr/>
-        </p:nvSpPr>
-        <p:spPr>
-          <a:xfrm rot="0" flipH="0" flipV="0">
-            <a:off x="4133850" y="4762500"/>
-            <a:ext cx="7372350" cy="666750"/>
+          <a:p/>
+        </p:txBody>
+      </p:sp>
+      <p:sp>
+        <p:nvSpPr>
+          <p:cNvPr id="307" name="" descr="{&quot;isTemplate&quot;:true,&quot;type&quot;:&quot;text&quot;}"/>
+          <p:cNvSpPr txBox="1"/>
+          <p:nvPr/>
+        </p:nvSpPr>
+        <p:spPr>
+          <a:xfrm rot="0" flipH="0" flipV="0">
+            <a:off x="4133850" y="4933950"/>
+            <a:ext cx="7372350" cy="333375"/>
+          </a:xfrm>
+          <a:prstGeom prst="rect"/>
+        </p:spPr>
+        <p:txBody>
+          <a:bodyPr wrap="none" lIns="0" tIns="0" rIns="0" bIns="0"/>
+          <a:p>
+            <a:pPr>
+              <a:lnSpc>
+                <a:spcPct val="145000"/>
+              </a:lnSpc>
+            </a:pPr>
+            <a:r>
+              <a:rPr lang="en-US" sz="1500" b="1">
+                <a:solidFill>
+                  <a:srgbClr val="0B1220"/>
+                </a:solidFill>
+                <a:latin typeface="Inter"/>
+                <a:ea typeface="Inter"/>
+              </a:rPr>
+              <a:t>The execution path checks the returned node state before recording verification.</a:t>
+            </a:r>
+            <a:endParaRPr/>
+          </a:p>
+        </p:txBody>
+      </p:sp>
+      <p:sp>
+        <p:nvSpPr>
+          <p:cNvPr id="308" name="" descr="{&quot;isTemplate&quot;:true,&quot;type&quot;:&quot;text&quot;}"/>
+          <p:cNvSpPr txBox="1"/>
+          <p:nvPr/>
+        </p:nvSpPr>
+        <p:spPr>
+          <a:xfrm rot="0" flipH="0" flipV="0">
+            <a:off x="4133850" y="5381625"/>
+            <a:ext cx="7372350" cy="504825"/>
           </a:xfrm>
           <a:prstGeom prst="rect"/>
         </p:spPr>
@@ -9972,44 +11192,42 @@
           <a:p>
             <a:pPr>
               <a:lnSpc>
-                <a:spcPct val="145000"/>
-              </a:lnSpc>
-            </a:pPr>
-            <a:r>
-              <a:rPr lang="en-US" sz="1500" b="1">
-                <a:solidFill>
-                  <a:srgbClr val="0B1220"/>
+                <a:spcPct val="155000"/>
+              </a:lnSpc>
+            </a:pPr>
+            <a:r>
+              <a:rPr lang="en-US" sz="1050">
+                <a:solidFill>
+                  <a:srgbClr val="64748B"/>
                 </a:solidFill>
                 <a:latin typeface="Inter"/>
                 <a:ea typeface="Inter"/>
               </a:rPr>
-              <a:t>A write is only logged as verified after the app reads the field back from Firestore.</a:t>
-            </a:r>
-            <a:endParaRPr/>
-          </a:p>
-        </p:txBody>
-      </p:sp>
-      <p:sp>
-        <p:nvSpPr>
-          <p:cNvPr id="271" name="" descr="{&quot;isTemplate&quot;:true,&quot;type&quot;:&quot;text&quot;}"/>
-          <p:cNvSpPr txBox="1"/>
-          <p:nvPr/>
-        </p:nvSpPr>
-        <p:spPr>
-          <a:xfrm rot="0" flipH="0" flipV="0">
-            <a:off x="4133850" y="5543550"/>
-            <a:ext cx="7372350" cy="504825"/>
-          </a:xfrm>
-          <a:prstGeom prst="rect"/>
-        </p:spPr>
-        <p:txBody>
-          <a:bodyPr wrap="square" lIns="0" tIns="0" rIns="0" bIns="0">
-            <a:normAutofit/>
-          </a:bodyPr>
-          <a:p>
-            <a:pPr>
-              <a:lnSpc>
-                <a:spcPct val="155000"/>
+              <a:t>An unchanged value fails verification. The deployed path updates the simulated Firestore cluster. This English capture replays the two cordon events locally and does not run a new patrol.</a:t>
+            </a:r>
+            <a:endParaRPr/>
+          </a:p>
+        </p:txBody>
+      </p:sp>
+      <p:sp>
+        <p:nvSpPr>
+          <p:cNvPr id="309" name="" descr="{&quot;isTemplate&quot;:true,&quot;type&quot;:&quot;text&quot;}"/>
+          <p:cNvSpPr txBox="1"/>
+          <p:nvPr/>
+        </p:nvSpPr>
+        <p:spPr>
+          <a:xfrm rot="0" flipH="0" flipV="0">
+            <a:off x="685800" y="6381750"/>
+            <a:ext cx="2695575" cy="161925"/>
+          </a:xfrm>
+          <a:prstGeom prst="rect"/>
+        </p:spPr>
+        <p:txBody>
+          <a:bodyPr wrap="none" lIns="0" tIns="0" rIns="0" bIns="0"/>
+          <a:p>
+            <a:pPr>
+              <a:lnSpc>
+                <a:spcPct val="100000"/>
               </a:lnSpc>
             </a:pPr>
             <a:r>
@@ -10020,70 +11238,15 @@
                 <a:latin typeface="Inter"/>
                 <a:ea typeface="Inter"/>
               </a:rPr>
-              <a:t xml:space="preserve">A write that returns success but leaves the value unchanged is logged as “verification failed” instead. Open the </a:t>
-            </a:r>
-            <a:r>
-              <a:rPr lang="en-US" sz="1050">
-                <a:solidFill>
-                  <a:srgbClr val="1A2434"/>
-                </a:solidFill>
-                <a:latin typeface="Inter"/>
-                <a:ea typeface="Inter"/>
-              </a:rPr>
-              <a:t>cluster</a:t>
-            </a:r>
-            <a:r>
-              <a:rPr lang="en-US" sz="1050">
-                <a:solidFill>
-                  <a:srgbClr val="64748B"/>
-                </a:solidFill>
-                <a:latin typeface="Inter"/>
-                <a:ea typeface="Inter"/>
-              </a:rPr>
-              <a:t xml:space="preserve"> collection in the Firebase console during a run and the two states move while you watch.</a:t>
-            </a:r>
-            <a:endParaRPr/>
-          </a:p>
-        </p:txBody>
-      </p:sp>
-      <p:sp>
-        <p:nvSpPr>
-          <p:cNvPr id="272" name="" descr="{&quot;isTemplate&quot;:true,&quot;type&quot;:&quot;text&quot;}"/>
-          <p:cNvSpPr txBox="1"/>
-          <p:nvPr/>
-        </p:nvSpPr>
-        <p:spPr>
-          <a:xfrm rot="0" flipH="0" flipV="0">
-            <a:off x="685800" y="6381750"/>
-            <a:ext cx="4638675" cy="161925"/>
-          </a:xfrm>
-          <a:prstGeom prst="rect"/>
-        </p:spPr>
-        <p:txBody>
-          <a:bodyPr wrap="none" lIns="0" tIns="0" rIns="0" bIns="0"/>
-          <a:p>
-            <a:pPr>
-              <a:lnSpc>
-                <a:spcPct val="100000"/>
-              </a:lnSpc>
-            </a:pPr>
-            <a:r>
-              <a:rPr lang="en-US" sz="1050">
-                <a:solidFill>
-                  <a:srgbClr val="64748B"/>
-                </a:solidFill>
-                <a:latin typeface="Inter"/>
-                <a:ea typeface="Inter"/>
-              </a:rPr>
-              <a:t>Both cordons are low-risk actions, so the agent was allowed to run them itself</a:t>
-            </a:r>
-            <a:endParaRPr/>
-          </a:p>
-        </p:txBody>
-      </p:sp>
-      <p:sp>
-        <p:nvSpPr>
-          <p:cNvPr id="273" name="" descr="{&quot;isTemplate&quot;:true,&quot;type&quot;:&quot;text&quot;}"/>
+              <a:t>Both cordons use the low risk execution path</a:t>
+            </a:r>
+            <a:endParaRPr/>
+          </a:p>
+        </p:txBody>
+      </p:sp>
+      <p:sp>
+        <p:nvSpPr>
+          <p:cNvPr id="310" name="" descr="{&quot;isTemplate&quot;:true,&quot;type&quot;:&quot;text&quot;}"/>
           <p:cNvSpPr txBox="1"/>
           <p:nvPr/>
         </p:nvSpPr>
@@ -10110,7 +11273,7 @@
                 <a:latin typeface="JetBrains Mono"/>
                 <a:ea typeface="JetBrains Mono"/>
               </a:rPr>
-              <a:t>08 / 14</a:t>
+              <a:t>08 / 15</a:t>
             </a:r>
             <a:endParaRPr/>
           </a:p>
@@ -10126,7 +11289,7 @@
   <p:cSld>
     <p:spTree>
       <p:nvGrpSpPr>
-        <p:cNvPr id="274" name=""/>
+        <p:cNvPr id="311" name="" descr="// 09: risk levels, execution gate and application evidence.&#10;const FONT = 'Inter, &quot;Helvetica Neue&quot;, Arial, sans-serif';&#10;const MONO = '&quot;JetBrains Mono&quot;, &quot;SF Mono&quot;, Menlo, monospace';&#10;const INK = '#0B1220';&#10;const BLUE = '#2F6BFF';&#10;const RED = '#E5484D';&#10;const GREEN = '#16B981';&#10;const AMBER = '#B26B00';&#10;const PANEL = '#F1F4FA';&#10;const DIM = '#64748B';&#10;const BODY = '#1A2434';&#10;&#10;const LEVELS = [&#10;    { name: 'LOW', count: '6', color: GREEN, rule: 'Reversible effects limited to a task or scheduling state.', gate: 'eligible for automatic execution' },&#10;    { name: 'MEDIUM', count: '5', color: AMBER, rule: 'Affects other jobs on the same node, or needs a short interruption.', gate: 'per-item approval + impact acknowledgement' },&#10;    { name: 'HIGH', count: '3', color: RED, rule: 'May remove hardware capacity or affect multiple nodes.', gate: 'approval, change ticket and second confirmation' },&#10;];&#10;&#10;&lt;Slide style={{ width: 1280, height: 720, padding: '18px 72px', background: '#FFFFFF', fontFamily: FONT }}&gt;&#10;    &lt;Box style={{ width: 1136, height: 92, flexDirection: 'row', justifyContent: 'space-between', alignItems: 'flex-end' }}&gt;&#10;        &lt;Text style={{ fontSize: 34, fontWeight: 700, color: INK, lineHeight: 1.3 }}&gt;Action risk and approval&lt;/Text&gt;&#10;        &lt;Text style={{ fontFamily: MONO, fontSize: 14, color: DIM, lineHeight: 1.45 }}&gt;14 actions, 6 low / 5 medium / 3 high&lt;/Text&gt;&#10;    &lt;/Box&gt;&#10;&#10;    &lt;Box style={{ width: 1136, height: 544 }}&gt;&#10;&#10;        &lt;Box style={{ width: 1136, height: 250, flexDirection: 'row', gap: 32 }}&gt;&#10;&#10;            &lt;Box style={{ width: 700 }}&gt;&#10;                {LEVELS.map((l, i) =&gt; (&#10;                    &lt;Box key={i} style={{ width: 700, height: 62, flexDirection: 'row', alignItems: 'flex-start', gap: 16, borderTop: '1px solid #EEF2F8' }}&gt;&#10;                        &lt;Text style={{ fontFamily: MONO, fontSize: 14, fontWeight: 700, color: l.color, width: 74, lineHeight: 1.9 }}&gt;{l.name}&lt;/Text&gt;&#10;                        &lt;Text style={{ fontFamily: MONO, fontSize: 22, fontWeight: 700, color: INK, width: 40, lineHeight: 1.25 }}&gt;{l.count}&lt;/Text&gt;&#10;                        &lt;Box style={{ width: 552 }}&gt;&#10;                            &lt;Text style={{ fontSize: 15, color: BODY, lineHeight: 1.5 }}&gt;{l.rule}&lt;/Text&gt;&#10;                            &lt;Text style={{ fontFamily: MONO, fontSize: 13, color: DIM, lineHeight: 1.6 }}&gt;{l.gate}&lt;/Text&gt;&#10;                        &lt;/Box&gt;&#10;                    &lt;/Box&gt;&#10;                ))}&#10;                &lt;Text style={{ fontSize: 13, color: DIM, lineHeight: 1.6, marginTop: 12, width: 700 }}&gt;&#10;                    The catalog also marks &lt;span style={{ fontFamily: MONO, color: BODY }}&gt;raise_nccl_timeout&lt;/span&gt; as discouraged.&#10;                    It hides a timeout symptom without resolving its cause and is excluded from model candidates.&#10;                &lt;/Text&gt;&#10;            &lt;/Box&gt;&#10;&#10;            &lt;Box style={{ width: 404 }}&gt;&#10;                &lt;Text style={{ fontSize: 18, fontWeight: 600, color: INK, lineHeight: 1.45 }}&gt;Execution allow-list&lt;/Text&gt;&#10;                &lt;Box style={{ marginTop: 8, padding: 10, borderRadius: 6, background: INK }}&gt;&#10;                    &lt;Text style={{ fontFamily: MONO, fontSize: 13, color: '#E2E8F0', lineHeight: 1.7 }}&gt;&#10;                        if (act.risk !== 'low') {'{'}&#10;                        &lt;br /&gt;&#10;                        {'  '}return {'{'} refused: true {'}'}&#10;                        &lt;br /&gt;&#10;                        {'}'}&#10;                    &lt;/Text&gt;&#10;                &lt;/Box&gt;&#10;                &lt;Text style={{ fontSize: 14, color: BODY, lineHeight: 1.55, marginTop: 8, width: 404 }}&gt;&#10;                    The model selects an action ID. The action library supplies its risk level.&#10;                &lt;/Text&gt;&#10;                &lt;Text style={{ fontSize: 16, fontWeight: 700, color: BLUE, lineHeight: 1.5, marginTop: 8, width: 404 }}&gt;&#10;                    The tool refuses automatic execution above low risk.&#10;                &lt;/Text&gt;&#10;            &lt;/Box&gt;&#10;&#10;        &lt;/Box&gt;&#10;&#10;        &lt;Box style={{ width: 1136, height: 272, marginTop: 16, alignItems: 'center', justifyContent: 'center' }}&gt;&#10;            {/* Include the complete risk panel heading in the measured crop. */}&#10;            &lt;Image src='assets/crop-risks.png' style={{ width: 1096, height: 210, border: '1px solid #E9EDF4' }} /&gt;&#10;        &lt;/Box&gt;&#10;&#10;    &lt;/Box&gt;&#10;&#10;    &lt;Box style={{ width: 1136, height: 48, flexDirection: 'row', justifyContent: 'space-between', alignItems: 'center' }}&gt;&#10;        &lt;Text style={{ fontSize: 14, color: DIM }}&gt;Risk levels and approval requirements from the English application&lt;/Text&gt;&#10;        &lt;Text style={{ fontFamily: MONO, fontSize: 14, color: DIM }}&gt;09 / 15&lt;/Text&gt;&#10;    &lt;/Box&gt;&#10;&lt;/Slide&gt;&#10;"/>
         <p:cNvGrpSpPr/>
         <p:nvPr/>
       </p:nvGrpSpPr>
@@ -10140,7 +11303,7 @@
       </p:grpSpPr>
       <p:sp>
         <p:nvSpPr>
-          <p:cNvPr id="275" name=""/>
+          <p:cNvPr id="312" name=""/>
           <p:cNvSpPr/>
           <p:nvPr/>
         </p:nvSpPr>
@@ -10159,22 +11322,19 @@
         </p:spPr>
         <p:txBody>
           <a:bodyPr/>
-          <a:p>
-            <a:pPr/>
-            <a:endParaRPr/>
-          </a:p>
-        </p:txBody>
-      </p:sp>
-      <p:sp>
-        <p:nvSpPr>
-          <p:cNvPr id="276" name="" descr="{&quot;isTemplate&quot;:true,&quot;type&quot;:&quot;text&quot;}"/>
+          <a:p/>
+        </p:txBody>
+      </p:sp>
+      <p:sp>
+        <p:nvSpPr>
+          <p:cNvPr id="313" name="" descr="{&quot;isTemplate&quot;:true,&quot;type&quot;:&quot;text&quot;}"/>
           <p:cNvSpPr txBox="1"/>
           <p:nvPr/>
         </p:nvSpPr>
         <p:spPr>
           <a:xfrm rot="0" flipH="0" flipV="0">
             <a:off x="685800" y="533400"/>
-            <a:ext cx="5667375" cy="514350"/>
+            <a:ext cx="3752850" cy="514350"/>
           </a:xfrm>
           <a:prstGeom prst="rect"/>
         </p:spPr>
@@ -10194,22 +11354,22 @@
                 <a:latin typeface="Inter"/>
                 <a:ea typeface="Inter"/>
               </a:rPr>
-              <a:t>The model does not set the risk level</a:t>
-            </a:r>
-            <a:endParaRPr/>
-          </a:p>
-        </p:txBody>
-      </p:sp>
-      <p:sp>
-        <p:nvSpPr>
-          <p:cNvPr id="277" name="" descr="{&quot;isTemplate&quot;:true,&quot;type&quot;:&quot;text&quot;}"/>
-          <p:cNvSpPr txBox="1"/>
-          <p:nvPr/>
-        </p:nvSpPr>
-        <p:spPr>
-          <a:xfrm rot="0" flipH="0" flipV="0">
-            <a:off x="8448675" y="809625"/>
-            <a:ext cx="3057525" cy="238125"/>
+              <a:t>Action risk and approval</a:t>
+            </a:r>
+            <a:endParaRPr/>
+          </a:p>
+        </p:txBody>
+      </p:sp>
+      <p:sp>
+        <p:nvSpPr>
+          <p:cNvPr id="314" name="" descr="{&quot;isTemplate&quot;:true,&quot;type&quot;:&quot;text&quot;}"/>
+          <p:cNvSpPr txBox="1"/>
+          <p:nvPr/>
+        </p:nvSpPr>
+        <p:spPr>
+          <a:xfrm rot="0" flipH="0" flipV="0">
+            <a:off x="8534400" y="809625"/>
+            <a:ext cx="2971800" cy="238125"/>
           </a:xfrm>
           <a:prstGeom prst="rect"/>
         </p:spPr>
@@ -10229,15 +11389,15 @@
                 <a:latin typeface="JetBrains Mono"/>
                 <a:ea typeface="JetBrains Mono"/>
               </a:rPr>
-              <a:t>14 actions · 6 low / 5 medium / 3 high</a:t>
-            </a:r>
-            <a:endParaRPr/>
-          </a:p>
-        </p:txBody>
-      </p:sp>
-      <p:sp>
-        <p:nvSpPr>
-          <p:cNvPr id="278" name=""/>
+              <a:t>14 actions, 6 low / 5 medium / 3 high</a:t>
+            </a:r>
+            <a:endParaRPr/>
+          </a:p>
+        </p:txBody>
+      </p:sp>
+      <p:sp>
+        <p:nvSpPr>
+          <p:cNvPr id="315" name=""/>
           <p:cNvSpPr/>
           <p:nvPr/>
         </p:nvSpPr>
@@ -10272,15 +11432,12 @@
         </p:spPr>
         <p:txBody>
           <a:bodyPr/>
-          <a:p>
-            <a:pPr/>
-            <a:endParaRPr/>
-          </a:p>
-        </p:txBody>
-      </p:sp>
-      <p:sp>
-        <p:nvSpPr>
-          <p:cNvPr id="279" name="" descr="{&quot;isTemplate&quot;:true,&quot;type&quot;:&quot;text&quot;}"/>
+          <a:p/>
+        </p:txBody>
+      </p:sp>
+      <p:sp>
+        <p:nvSpPr>
+          <p:cNvPr id="316" name="" descr="{&quot;isTemplate&quot;:true,&quot;type&quot;:&quot;text&quot;}"/>
           <p:cNvSpPr txBox="1"/>
           <p:nvPr/>
         </p:nvSpPr>
@@ -10315,7 +11472,7 @@
       </p:sp>
       <p:sp>
         <p:nvSpPr>
-          <p:cNvPr id="280" name="" descr="{&quot;isTemplate&quot;:true,&quot;type&quot;:&quot;text&quot;}"/>
+          <p:cNvPr id="317" name="" descr="{&quot;isTemplate&quot;:true,&quot;type&quot;:&quot;text&quot;}"/>
           <p:cNvSpPr txBox="1"/>
           <p:nvPr/>
         </p:nvSpPr>
@@ -10350,7 +11507,7 @@
       </p:sp>
       <p:sp>
         <p:nvSpPr>
-          <p:cNvPr id="281" name="" descr="{&quot;isTemplate&quot;:true,&quot;type&quot;:&quot;text&quot;}"/>
+          <p:cNvPr id="318" name="" descr="{&quot;isTemplate&quot;:true,&quot;type&quot;:&quot;text&quot;}"/>
           <p:cNvSpPr txBox="1"/>
           <p:nvPr/>
         </p:nvSpPr>
@@ -10377,15 +11534,15 @@
                 <a:latin typeface="Inter"/>
                 <a:ea typeface="Inter"/>
               </a:rPr>
-              <a:t>Task-local, reversible, never touches hardware or the system.</a:t>
-            </a:r>
-            <a:endParaRPr/>
-          </a:p>
-        </p:txBody>
-      </p:sp>
-      <p:sp>
-        <p:nvSpPr>
-          <p:cNvPr id="282" name="" descr="{&quot;isTemplate&quot;:true,&quot;type&quot;:&quot;text&quot;}"/>
+              <a:t>Reversible effects limited to a task or scheduling state.</a:t>
+            </a:r>
+            <a:endParaRPr/>
+          </a:p>
+        </p:txBody>
+      </p:sp>
+      <p:sp>
+        <p:nvSpPr>
+          <p:cNvPr id="319" name="" descr="{&quot;isTemplate&quot;:true,&quot;type&quot;:&quot;text&quot;}"/>
           <p:cNvSpPr txBox="1"/>
           <p:nvPr/>
         </p:nvSpPr>
@@ -10412,15 +11569,15 @@
                 <a:latin typeface="JetBrains Mono"/>
                 <a:ea typeface="JetBrains Mono"/>
               </a:rPr>
-              <a:t>the agent may run it itself</a:t>
-            </a:r>
-            <a:endParaRPr/>
-          </a:p>
-        </p:txBody>
-      </p:sp>
-      <p:sp>
-        <p:nvSpPr>
-          <p:cNvPr id="283" name=""/>
+              <a:t>eligible for automatic execution</a:t>
+            </a:r>
+            <a:endParaRPr/>
+          </a:p>
+        </p:txBody>
+      </p:sp>
+      <p:sp>
+        <p:nvSpPr>
+          <p:cNvPr id="320" name=""/>
           <p:cNvSpPr/>
           <p:nvPr/>
         </p:nvSpPr>
@@ -10455,15 +11612,12 @@
         </p:spPr>
         <p:txBody>
           <a:bodyPr/>
-          <a:p>
-            <a:pPr/>
-            <a:endParaRPr/>
-          </a:p>
-        </p:txBody>
-      </p:sp>
-      <p:sp>
-        <p:nvSpPr>
-          <p:cNvPr id="284" name="" descr="{&quot;isTemplate&quot;:true,&quot;type&quot;:&quot;text&quot;}"/>
+          <a:p/>
+        </p:txBody>
+      </p:sp>
+      <p:sp>
+        <p:nvSpPr>
+          <p:cNvPr id="321" name="" descr="{&quot;isTemplate&quot;:true,&quot;type&quot;:&quot;text&quot;}"/>
           <p:cNvSpPr txBox="1"/>
           <p:nvPr/>
         </p:nvSpPr>
@@ -10498,7 +11652,7 @@
       </p:sp>
       <p:sp>
         <p:nvSpPr>
-          <p:cNvPr id="285" name="" descr="{&quot;isTemplate&quot;:true,&quot;type&quot;:&quot;text&quot;}"/>
+          <p:cNvPr id="322" name="" descr="{&quot;isTemplate&quot;:true,&quot;type&quot;:&quot;text&quot;}"/>
           <p:cNvSpPr txBox="1"/>
           <p:nvPr/>
         </p:nvSpPr>
@@ -10533,7 +11687,7 @@
       </p:sp>
       <p:sp>
         <p:nvSpPr>
-          <p:cNvPr id="286" name="" descr="{&quot;isTemplate&quot;:true,&quot;type&quot;:&quot;text&quot;}"/>
+          <p:cNvPr id="323" name="" descr="{&quot;isTemplate&quot;:true,&quot;type&quot;:&quot;text&quot;}"/>
           <p:cNvSpPr txBox="1"/>
           <p:nvPr/>
         </p:nvSpPr>
@@ -10568,7 +11722,7 @@
       </p:sp>
       <p:sp>
         <p:nvSpPr>
-          <p:cNvPr id="287" name="" descr="{&quot;isTemplate&quot;:true,&quot;type&quot;:&quot;text&quot;}"/>
+          <p:cNvPr id="324" name="" descr="{&quot;isTemplate&quot;:true,&quot;type&quot;:&quot;text&quot;}"/>
           <p:cNvSpPr txBox="1"/>
           <p:nvPr/>
         </p:nvSpPr>
@@ -10603,7 +11757,7 @@
       </p:sp>
       <p:sp>
         <p:nvSpPr>
-          <p:cNvPr id="288" name=""/>
+          <p:cNvPr id="325" name=""/>
           <p:cNvSpPr/>
           <p:nvPr/>
         </p:nvSpPr>
@@ -10638,15 +11792,12 @@
         </p:spPr>
         <p:txBody>
           <a:bodyPr/>
-          <a:p>
-            <a:pPr/>
-            <a:endParaRPr/>
-          </a:p>
-        </p:txBody>
-      </p:sp>
-      <p:sp>
-        <p:nvSpPr>
-          <p:cNvPr id="289" name="" descr="{&quot;isTemplate&quot;:true,&quot;type&quot;:&quot;text&quot;}"/>
+          <a:p/>
+        </p:txBody>
+      </p:sp>
+      <p:sp>
+        <p:nvSpPr>
+          <p:cNvPr id="326" name="" descr="{&quot;isTemplate&quot;:true,&quot;type&quot;:&quot;text&quot;}"/>
           <p:cNvSpPr txBox="1"/>
           <p:nvPr/>
         </p:nvSpPr>
@@ -10681,7 +11832,7 @@
       </p:sp>
       <p:sp>
         <p:nvSpPr>
-          <p:cNvPr id="290" name="" descr="{&quot;isTemplate&quot;:true,&quot;type&quot;:&quot;text&quot;}"/>
+          <p:cNvPr id="327" name="" descr="{&quot;isTemplate&quot;:true,&quot;type&quot;:&quot;text&quot;}"/>
           <p:cNvSpPr txBox="1"/>
           <p:nvPr/>
         </p:nvSpPr>
@@ -10716,7 +11867,7 @@
       </p:sp>
       <p:sp>
         <p:nvSpPr>
-          <p:cNvPr id="291" name="" descr="{&quot;isTemplate&quot;:true,&quot;type&quot;:&quot;text&quot;}"/>
+          <p:cNvPr id="328" name="" descr="{&quot;isTemplate&quot;:true,&quot;type&quot;:&quot;text&quot;}"/>
           <p:cNvSpPr txBox="1"/>
           <p:nvPr/>
         </p:nvSpPr>
@@ -10743,15 +11894,15 @@
                 <a:latin typeface="Inter"/>
                 <a:ea typeface="Inter"/>
               </a:rPr>
-              <a:t>Irreversible, touches hardware assets, or crosses nodes.</a:t>
-            </a:r>
-            <a:endParaRPr/>
-          </a:p>
-        </p:txBody>
-      </p:sp>
-      <p:sp>
-        <p:nvSpPr>
-          <p:cNvPr id="292" name="" descr="{&quot;isTemplate&quot;:true,&quot;type&quot;:&quot;text&quot;}"/>
+              <a:t>May remove hardware capacity or affect multiple nodes.</a:t>
+            </a:r>
+            <a:endParaRPr/>
+          </a:p>
+        </p:txBody>
+      </p:sp>
+      <p:sp>
+        <p:nvSpPr>
+          <p:cNvPr id="329" name="" descr="{&quot;isTemplate&quot;:true,&quot;type&quot;:&quot;text&quot;}"/>
           <p:cNvSpPr txBox="1"/>
           <p:nvPr/>
         </p:nvSpPr>
@@ -10778,15 +11929,15 @@
                 <a:latin typeface="JetBrains Mono"/>
                 <a:ea typeface="JetBrains Mono"/>
               </a:rPr>
-              <a:t>approval + change ticket + second confirmation</a:t>
-            </a:r>
-            <a:endParaRPr/>
-          </a:p>
-        </p:txBody>
-      </p:sp>
-      <p:sp>
-        <p:nvSpPr>
-          <p:cNvPr id="293" name="" descr="{&quot;isTemplate&quot;:true,&quot;type&quot;:&quot;text&quot;}"/>
+              <a:t>approval, change ticket and second confirmation</a:t>
+            </a:r>
+            <a:endParaRPr/>
+          </a:p>
+        </p:txBody>
+      </p:sp>
+      <p:sp>
+        <p:nvSpPr>
+          <p:cNvPr id="330" name="" descr="{&quot;isTemplate&quot;:true,&quot;type&quot;:&quot;text&quot;}"/>
           <p:cNvSpPr txBox="1"/>
           <p:nvPr/>
         </p:nvSpPr>
@@ -10815,7 +11966,7 @@
                 <a:latin typeface="Inter"/>
                 <a:ea typeface="Inter"/>
               </a:rPr>
-              <a:t xml:space="preserve">A fifteenth action is registered and deliberately withheld: </a:t>
+              <a:t xml:space="preserve">The catalog also marks </a:t>
             </a:r>
             <a:r>
               <a:rPr lang="en-US" sz="975">
@@ -10835,15 +11986,15 @@
                 <a:latin typeface="Inter"/>
                 <a:ea typeface="Inter"/>
               </a:rPr>
-              <a:t>. Raising the timeout would suppress the symptom instead of fixing it, so the knowledge base marks it discouraged.</a:t>
-            </a:r>
-            <a:endParaRPr/>
-          </a:p>
-        </p:txBody>
-      </p:sp>
-      <p:sp>
-        <p:nvSpPr>
-          <p:cNvPr id="294" name="" descr="{&quot;isTemplate&quot;:true,&quot;type&quot;:&quot;text&quot;}"/>
+              <a:t xml:space="preserve"> as discouraged. It hides a timeout symptom without resolving its cause and is excluded from model candidates.</a:t>
+            </a:r>
+            <a:endParaRPr/>
+          </a:p>
+        </p:txBody>
+      </p:sp>
+      <p:sp>
+        <p:nvSpPr>
+          <p:cNvPr id="331" name="" descr="{&quot;isTemplate&quot;:true,&quot;type&quot;:&quot;text&quot;}"/>
           <p:cNvSpPr txBox="1"/>
           <p:nvPr/>
         </p:nvSpPr>
@@ -10870,15 +12021,15 @@
                 <a:latin typeface="Inter"/>
                 <a:ea typeface="Inter"/>
               </a:rPr>
-              <a:t>The gate is a whitelist, not a prompt rule</a:t>
-            </a:r>
-            <a:endParaRPr/>
-          </a:p>
-        </p:txBody>
-      </p:sp>
-      <p:sp>
-        <p:nvSpPr>
-          <p:cNvPr id="295" name=""/>
+              <a:t>Execution allow-list</a:t>
+            </a:r>
+            <a:endParaRPr/>
+          </a:p>
+        </p:txBody>
+      </p:sp>
+      <p:sp>
+        <p:nvSpPr>
+          <p:cNvPr id="332" name=""/>
           <p:cNvSpPr/>
           <p:nvPr/>
         </p:nvSpPr>
@@ -10899,15 +12050,12 @@
         </p:spPr>
         <p:txBody>
           <a:bodyPr/>
-          <a:p>
-            <a:pPr/>
-            <a:endParaRPr/>
-          </a:p>
-        </p:txBody>
-      </p:sp>
-      <p:sp>
-        <p:nvSpPr>
-          <p:cNvPr id="296" name="" descr="{&quot;isTemplate&quot;:true,&quot;type&quot;:&quot;text&quot;}"/>
+          <a:p/>
+        </p:txBody>
+      </p:sp>
+      <p:sp>
+        <p:nvSpPr>
+          <p:cNvPr id="333" name="" descr="{&quot;isTemplate&quot;:true,&quot;type&quot;:&quot;text&quot;}"/>
           <p:cNvSpPr txBox="1"/>
           <p:nvPr/>
         </p:nvSpPr>
@@ -11028,7 +12176,7 @@
       </p:sp>
       <p:sp>
         <p:nvSpPr>
-          <p:cNvPr id="297" name="" descr="{&quot;isTemplate&quot;:true,&quot;type&quot;:&quot;text&quot;}"/>
+          <p:cNvPr id="334" name="" descr="{&quot;isTemplate&quot;:true,&quot;type&quot;:&quot;text&quot;}"/>
           <p:cNvSpPr txBox="1"/>
           <p:nvPr/>
         </p:nvSpPr>
@@ -11057,15 +12205,15 @@
                 <a:latin typeface="Inter"/>
                 <a:ea typeface="Inter"/>
               </a:rPr>
-              <a:t>The tool schema has no risk field, so the model has no way to call an action low-risk.</a:t>
-            </a:r>
-            <a:endParaRPr/>
-          </a:p>
-        </p:txBody>
-      </p:sp>
-      <p:sp>
-        <p:nvSpPr>
-          <p:cNvPr id="298" name="" descr="{&quot;isTemplate&quot;:true,&quot;type&quot;:&quot;text&quot;}"/>
+              <a:t>The model selects an action ID. The action library supplies its risk level.</a:t>
+            </a:r>
+            <a:endParaRPr/>
+          </a:p>
+        </p:txBody>
+      </p:sp>
+      <p:sp>
+        <p:nvSpPr>
+          <p:cNvPr id="335" name="" descr="{&quot;isTemplate&quot;:true,&quot;type&quot;:&quot;text&quot;}"/>
           <p:cNvSpPr txBox="1"/>
           <p:nvPr/>
         </p:nvSpPr>
@@ -11092,15 +12240,15 @@
                 <a:latin typeface="Inter"/>
                 <a:ea typeface="Inter"/>
               </a:rPr>
-              <a:t>A refused action is stopped inside the tool.</a:t>
-            </a:r>
-            <a:endParaRPr/>
-          </a:p>
-        </p:txBody>
-      </p:sp>
-      <p:sp>
-        <p:nvSpPr>
-          <p:cNvPr id="299" name=""/>
+              <a:t>The tool refuses automatic execution above low risk.</a:t>
+            </a:r>
+            <a:endParaRPr/>
+          </a:p>
+        </p:txBody>
+      </p:sp>
+      <p:sp>
+        <p:nvSpPr>
+          <p:cNvPr id="336" name=""/>
           <p:cNvSpPr/>
           <p:nvPr/>
         </p:nvSpPr>
@@ -11121,15 +12269,12 @@
         </p:spPr>
         <p:txBody>
           <a:bodyPr/>
-          <a:p>
-            <a:pPr/>
-            <a:endParaRPr/>
-          </a:p>
+          <a:p/>
         </p:txBody>
       </p:sp>
       <p:pic>
         <p:nvPicPr>
-          <p:cNvPr id="300" name=""/>
+          <p:cNvPr id="337" name=""/>
           <p:cNvPicPr>
             <a:picLocks noChangeAspect="1"/>
           </p:cNvPicPr>
@@ -11154,14 +12299,14 @@
       </p:pic>
       <p:sp>
         <p:nvSpPr>
-          <p:cNvPr id="301" name="" descr="{&quot;isTemplate&quot;:true,&quot;type&quot;:&quot;text&quot;}"/>
+          <p:cNvPr id="338" name="" descr="{&quot;isTemplate&quot;:true,&quot;type&quot;:&quot;text&quot;}"/>
           <p:cNvSpPr txBox="1"/>
           <p:nvPr/>
         </p:nvSpPr>
         <p:spPr>
           <a:xfrm rot="0" flipH="0" flipV="0">
             <a:off x="685800" y="6381750"/>
-            <a:ext cx="4324350" cy="161925"/>
+            <a:ext cx="3962400" cy="161925"/>
           </a:xfrm>
           <a:prstGeom prst="rect"/>
         </p:spPr>
@@ -11181,15 +12326,15 @@
                 <a:latin typeface="Inter"/>
                 <a:ea typeface="Inter"/>
               </a:rPr>
-              <a:t>The three levels above are the page’s own header, captured as it renders</a:t>
-            </a:r>
-            <a:endParaRPr/>
-          </a:p>
-        </p:txBody>
-      </p:sp>
-      <p:sp>
-        <p:nvSpPr>
-          <p:cNvPr id="302" name="" descr="{&quot;isTemplate&quot;:true,&quot;type&quot;:&quot;text&quot;}"/>
+              <a:t>Risk levels and approval requirements from the English application</a:t>
+            </a:r>
+            <a:endParaRPr/>
+          </a:p>
+        </p:txBody>
+      </p:sp>
+      <p:sp>
+        <p:nvSpPr>
+          <p:cNvPr id="339" name="" descr="{&quot;isTemplate&quot;:true,&quot;type&quot;:&quot;text&quot;}"/>
           <p:cNvSpPr txBox="1"/>
           <p:nvPr/>
         </p:nvSpPr>
@@ -11216,7 +12361,7 @@
                 <a:latin typeface="JetBrains Mono"/>
                 <a:ea typeface="JetBrains Mono"/>
               </a:rPr>
-              <a:t>09 / 14</a:t>
+              <a:t>09 / 15</a:t>
             </a:r>
             <a:endParaRPr/>
           </a:p>
